--- a/Dar-Soins_PFE_Presentation.pptx
+++ b/Dar-Soins_PFE_Presentation.pptx
@@ -633,43 +633,39 @@
           <a:lstStyle/>
           <a:p>
             <a:r>
-              <a:t>Voici le Business Model Canvas de Dar-Soins, structuré selon les 9 blocs du modèle d'Alexander Osterwalder.</a:t>
+              <a:t>Voici la structure détaillée du Business Model Canvas de Dar-Soins.</a:t>
             </a:r>
           </a:p>
           <a:p/>
           <a:p>
             <a:r>
-              <a:t>Nos Partenaires Clés sont les infirmiers diplômés d'État, les fournisseurs de matériel médical et, à terme, les compagnies d'assurance dans le cadre de l'AMO.</a:t>
+              <a:t>Notre modèle repose sur 4 piliers de monétisation très complémentaires qui assurent la résilience et la rentabilité du projet :</a:t>
+            </a:r>
+          </a:p>
+          <a:p>
+            <a:r>
+              <a:t>1. La commission sur les actes (15 à 20%), qui constitue le flux principal et croît proportionnellement au volume des soins réalisés.</a:t>
+            </a:r>
+          </a:p>
+          <a:p>
+            <a:r>
+              <a:t>2. Les abonnements pour les soignants premium, offrant une visibilité renforcée et des outils de gestion avancés.</a:t>
+            </a:r>
+          </a:p>
+          <a:p>
+            <a:r>
+              <a:t>3. La marge commerciale sur le matériel médical et les consommables gérés directement dans le module Stock de l'ERP.</a:t>
+            </a:r>
+          </a:p>
+          <a:p>
+            <a:r>
+              <a:t>4. Les contrats de garde de nuit, longue durée et les partenariats d'entreprise pour les soins programmés.</a:t>
             </a:r>
           </a:p>
           <a:p/>
           <a:p>
             <a:r>
-              <a:t>Nos Activités Clés sont le développement et la maintenance de la plateforme web, la mise en relation intelligente patient-infirmier, la gestion ERP et la facturation automatisée.</a:t>
-            </a:r>
-          </a:p>
-          <a:p/>
-          <a:p>
-            <a:r>
-              <a:t>Notre Proposition de Valeur est claire : offrir des soins à domicile digitalisés, transparents en termes de tarification, et sécurisés par des mécanismes d'authentification et de traçabilité.</a:t>
-            </a:r>
-          </a:p>
-          <a:p/>
-          <a:p>
-            <a:r>
-              <a:t>Nos Segments Clients cibles sont les patients chroniques nécessitant des soins réguliers, les personnes âgées à mobilité réduite, les patients en post-opératoire, et les entreprises souhaitant proposer des soins à domicile à leurs employés.</a:t>
-            </a:r>
-          </a:p>
-          <a:p/>
-          <a:p>
-            <a:r>
-              <a:t>Les Sources de Revenus reposent sur trois axes : une commission de 15 à 20% prélevée sur chaque intervention, des abonnements premium pour les infirmiers souhaitant une meilleure visibilité, et la vente de matériel médical via l'ERP intégré.</a:t>
-            </a:r>
-          </a:p>
-          <a:p/>
-          <a:p>
-            <a:r>
-              <a:t>La Structure de Coûts comprend l'hébergement cloud, le développement, le marketing digital et le support technique.</a:t>
+              <a:t>Cette structure permet d'amortir rapidement les coûts d'infrastructure et de marketing pour atteindre un point mort financier dès la première année d'exploitation.</a:t>
             </a:r>
           </a:p>
         </p:txBody>
@@ -3251,13 +3247,19 @@
           <a:lstStyle/>
           <a:p>
             <a:r>
-              <a:t>Avant de concevoir la solution technique, il était indispensable de réaliser une étude de marché approfondie pour valider le besoin, identifier les acteurs existants et positionner Dar-Soins de manière différenciante.</a:t>
+              <a:t>Nous abordons à présent l'étude de marché et le modèle économique de Dar-Soins.</a:t>
             </a:r>
           </a:p>
           <a:p/>
           <a:p>
             <a:r>
-              <a:t>Nous allons analyser les concurrents directs et indirects ainsi que l'analyse SWOT du projet.</a:t>
+              <a:t>Avant de concevoir la solution technique, il était primordial de mener une analyse stratégique rigoureuse : évaluer l'écosystème de la santé au Maroc, analyser les concurrents directs et indirects, formaliser le diagnostic SWOT, et structurer un Business Model pérenne et scalable.</a:t>
+            </a:r>
+          </a:p>
+          <a:p/>
+          <a:p>
+            <a:r>
+              <a:t>Cette démarche garantit que Dar-Soins ne soit pas seulement une prouesse technique, mais également une opportunité à fort impact socio-économique.</a:t>
             </a:r>
           </a:p>
         </p:txBody>
@@ -3327,19 +3329,39 @@
           <a:lstStyle/>
           <a:p>
             <a:r>
-              <a:t>Notre étude de marché révèle qu'il n'existe actuellement aucune plateforme marocaine spécialisée exclusivement dans la mise en relation digitale patient-infirmier à domicile avec un parcours complet intégré.</a:t>
+              <a:t>Notre étude de marché montre qu'il existe un besoin massif et non comblé de soins à domicile structurés au Maroc.</a:t>
             </a:r>
           </a:p>
           <a:p/>
           <a:p>
             <a:r>
-              <a:t>SOS Médecins Maroc se concentre sur les urgences médicales ponctuelles. DabaDoc est un excellent outil de prise de rendez-vous en cabinet, mais ne couvre pas les soins à domicile. Les infirmiers freelance travaillent majoritairement par bouche-à-oreille, sans traçabilité ni transparence tarifaire. Les cliniques privées proposent parfois des services à domicile, mais à des tarifs premium et sans plateforme dédiée.</a:t>
+              <a:t>L'analyse de la concurrence fait ressortir quatre catégories d'acteurs :</a:t>
+            </a:r>
+          </a:p>
+          <a:p>
+            <a:r>
+              <a:t>1. Les plateformes de téléconsultation et de prise de rendez-vous comme DabaDoc, qui se limitent aux consultations en cabinet médical.</a:t>
+            </a:r>
+          </a:p>
+          <a:p>
+            <a:r>
+              <a:t>2. Les services d'urgence mobile comme SOS Médecins, réservés aux urgences médicales lourdes à des tarifs très élevés.</a:t>
+            </a:r>
+          </a:p>
+          <a:p>
+            <a:r>
+              <a:t>3. Les infirmiers libéraux indépendants, qui constituent l'essentiel de l'offre actuelle mais fonctionnent de manière informelle, sans régulation tarifaire ni suivi médical formel.</a:t>
+            </a:r>
+          </a:p>
+          <a:p>
+            <a:r>
+              <a:t>4. Les cliniques privées, dont les prestations à domicile sont marginales, lentes et très coûteuses.</a:t>
             </a:r>
           </a:p>
           <a:p/>
           <a:p>
             <a:r>
-              <a:t>L'analyse SWOT montre des forces significatives : un stack technologique moderne (Laravel 12, React 19), un ERP intégré, une UX glassmorphism soignée et un code sécurisé dès la conception. Les faiblesses sont principalement liées à la nature académique du projet. Les opportunités sont immenses avec la généralisation de l'AMO et la tendance mondiale vers la digitalisation de la santé. Les menaces restent mesurées : des acteurs internationaux pourraient entrer sur le marché, et il existe une résistance culturelle au changement dans le secteur médical.</a:t>
+              <a:t>Comme le prouve notre matrice comparative, Dar-Soins est la seule plateforme capable de centraliser la demande de soins, l'affectation géolocalisée temps réel, la facturation automatisée, le dossier médical partagé et un ERP de gestion des stocks et du personnel.</a:t>
             </a:r>
           </a:p>
         </p:txBody>
@@ -3409,13 +3431,31 @@
           <a:lstStyle/>
           <a:p>
             <a:r>
-              <a:t>Passons maintenant à la partie économique du projet. Tout projet technologique, même académique, doit démontrer sa viabilité financière.</a:t>
+              <a:t>L'analyse SWOT met en évidence les atouts majeurs et les leviers de réussite de Dar-Soins :</a:t>
             </a:r>
           </a:p>
           <a:p/>
           <a:p>
             <a:r>
-              <a:t>Nous allons détailler le Business Model Canvas de Dar-Soins, suivi des projections financières sur 3 ans.</a:t>
+              <a:t>Parmi nos Forces principales : une architecture technologique d'excellence avec Laravel 12 et React 19, l'intégration native d'un ERP de gestion hospitalière, un système d'affectation géolocalisée et une traçabilité médicale complète conforme aux standards de sécurité les plus stricts.</a:t>
+            </a:r>
+          </a:p>
+          <a:p/>
+          <a:p>
+            <a:r>
+              <a:t>Nos Faiblesses sont classiques pour un nouveau produit : la nécessité d'amorcer le réseau d'infirmiers et d'accompagner les utilisateurs les moins familiers du digital via une ergonomie ultra-simplifiée.</a:t>
+            </a:r>
+          </a:p>
+          <a:p/>
+          <a:p>
+            <a:r>
+              <a:t>Les Opportunités sont historiques au Maroc : le déploiement généralisé de l'AMO, la transition démographique avec l'augmentation des affections de longue durée, et la volonté nationale de moderniser le système de santé.</a:t>
+            </a:r>
+          </a:p>
+          <a:p/>
+          <a:p>
+            <a:r>
+              <a:t>Face aux Menaces comme le risque de désintermédiation ou la résistance au paiement en ligne, Dar-Soins apporte des réponses concrètes : flexibilité des moyens de paiement (espèces, carte, virement), sécurisation du dossier patient et fidélisation des soignants grâce à un outil ERP gratuit et complet pour leur gestion.</a:t>
             </a:r>
           </a:p>
         </p:txBody>
@@ -6978,8 +7018,8 @@
         </p:nvSpPr>
         <p:spPr>
           <a:xfrm>
-            <a:off x="1463040" y="274320"/>
-            <a:ext cx="9144000" cy="548640"/>
+            <a:off x="1463040" y="228600"/>
+            <a:ext cx="9601200" cy="502920"/>
           </a:xfrm>
           <a:prstGeom prst="rect">
             <a:avLst/>
@@ -6993,7 +7033,7 @@
           <a:lstStyle/>
           <a:p>
             <a:pPr algn="l">
-              <a:defRPr sz="2800" b="1">
+              <a:defRPr sz="2600" b="1">
                 <a:solidFill>
                   <a:srgbClr val="2563EB"/>
                 </a:solidFill>
@@ -7001,21 +7041,57 @@
               </a:defRPr>
             </a:pPr>
             <a:r>
-              <a:t>Business Model Canvas</a:t>
-            </a:r>
-          </a:p>
-        </p:txBody>
-      </p:sp>
-      <p:sp>
-        <p:nvSpPr>
-          <p:cNvPr id="6" name="Rounded Rectangle 5"/>
+              <a:t>Business Model Canvas Enrichi</a:t>
+            </a:r>
+          </a:p>
+        </p:txBody>
+      </p:sp>
+      <p:sp>
+        <p:nvSpPr>
+          <p:cNvPr id="6" name="TextBox 5"/>
+          <p:cNvSpPr txBox="1"/>
+          <p:nvPr/>
+        </p:nvSpPr>
+        <p:spPr>
+          <a:xfrm>
+            <a:off x="1463040" y="658368"/>
+            <a:ext cx="9601200" cy="320040"/>
+          </a:xfrm>
+          <a:prstGeom prst="rect">
+            <a:avLst/>
+          </a:prstGeom>
+          <a:noFill/>
+        </p:spPr>
+        <p:txBody>
+          <a:bodyPr wrap="square">
+            <a:spAutoFit/>
+          </a:bodyPr>
+          <a:lstStyle/>
+          <a:p>
+            <a:pPr algn="l">
+              <a:defRPr sz="1300" b="0">
+                <a:solidFill>
+                  <a:srgbClr val="94A3B8"/>
+                </a:solidFill>
+                <a:latin typeface="Calibri"/>
+              </a:defRPr>
+            </a:pPr>
+            <a:r>
+              <a:t>Architecture de valeur, flux de revenus et leviers de viabilité économique</a:t>
+            </a:r>
+          </a:p>
+        </p:txBody>
+      </p:sp>
+      <p:sp>
+        <p:nvSpPr>
+          <p:cNvPr id="7" name="Rounded Rectangle 6"/>
           <p:cNvSpPr/>
           <p:nvPr/>
         </p:nvSpPr>
         <p:spPr>
           <a:xfrm>
-            <a:off x="548640" y="1097280"/>
-            <a:ext cx="2286000" cy="2011680"/>
+            <a:off x="548640" y="1051560"/>
+            <a:ext cx="2240280" cy="2560320"/>
           </a:xfrm>
           <a:prstGeom prst="roundRect">
             <a:avLst/>
@@ -7053,14 +7129,57 @@
       </p:sp>
       <p:sp>
         <p:nvSpPr>
-          <p:cNvPr id="7" name="TextBox 6"/>
-          <p:cNvSpPr txBox="1"/>
-          <p:nvPr/>
-        </p:nvSpPr>
-        <p:spPr>
-          <a:xfrm>
-            <a:off x="640080" y="1170432"/>
-            <a:ext cx="2103120" cy="365760"/>
+          <p:cNvPr id="8" name="Rounded Rectangle 7"/>
+          <p:cNvSpPr/>
+          <p:nvPr/>
+        </p:nvSpPr>
+        <p:spPr>
+          <a:xfrm>
+            <a:off x="603504" y="1106424"/>
+            <a:ext cx="2130552" cy="292608"/>
+          </a:xfrm>
+          <a:prstGeom prst="roundRect">
+            <a:avLst/>
+          </a:prstGeom>
+          <a:solidFill>
+            <a:srgbClr val="EEF2FF"/>
+          </a:solidFill>
+          <a:ln>
+            <a:noFill/>
+          </a:ln>
+        </p:spPr>
+        <p:style>
+          <a:lnRef idx="1">
+            <a:schemeClr val="accent1"/>
+          </a:lnRef>
+          <a:fillRef idx="3">
+            <a:schemeClr val="accent1"/>
+          </a:fillRef>
+          <a:effectRef idx="2">
+            <a:schemeClr val="accent1"/>
+          </a:effectRef>
+          <a:fontRef idx="minor">
+            <a:schemeClr val="lt1"/>
+          </a:fontRef>
+        </p:style>
+        <p:txBody>
+          <a:bodyPr rtlCol="0" anchor="ctr"/>
+          <a:lstStyle/>
+          <a:p>
+            <a:pPr algn="ctr"/>
+          </a:p>
+        </p:txBody>
+      </p:sp>
+      <p:sp>
+        <p:nvSpPr>
+          <p:cNvPr id="9" name="TextBox 8"/>
+          <p:cNvSpPr txBox="1"/>
+          <p:nvPr/>
+        </p:nvSpPr>
+        <p:spPr>
+          <a:xfrm>
+            <a:off x="640080" y="1124712"/>
+            <a:ext cx="2057400" cy="256032"/>
           </a:xfrm>
           <a:prstGeom prst="rect">
             <a:avLst/>
@@ -7089,14 +7208,14 @@
       </p:sp>
       <p:sp>
         <p:nvSpPr>
-          <p:cNvPr id="8" name="TextBox 7"/>
-          <p:cNvSpPr txBox="1"/>
-          <p:nvPr/>
-        </p:nvSpPr>
-        <p:spPr>
-          <a:xfrm>
-            <a:off x="640080" y="1536192"/>
-            <a:ext cx="2103120" cy="1508760"/>
+          <p:cNvPr id="10" name="TextBox 9"/>
+          <p:cNvSpPr txBox="1"/>
+          <p:nvPr/>
+        </p:nvSpPr>
+        <p:spPr>
+          <a:xfrm>
+            <a:off x="640080" y="1435608"/>
+            <a:ext cx="2057400" cy="2121408"/>
           </a:xfrm>
           <a:prstGeom prst="rect">
             <a:avLst/>
@@ -7110,7 +7229,7 @@
           <a:lstStyle/>
           <a:p>
             <a:pPr algn="l">
-              <a:defRPr sz="900" b="0">
+              <a:defRPr sz="880" b="0">
                 <a:solidFill>
                   <a:srgbClr val="1E293B"/>
                 </a:solidFill>
@@ -7118,29 +7237,33 @@
               </a:defRPr>
             </a:pPr>
             <a:r>
-              <a:t>Infirmiers diplômés</a:t>
+              <a:t>• Infirmiers diplômés d'État certifiés</a:t>
             </a:r>
             <a:br/>
             <a:r>
-              <a:t>Fournisseurs médicaux</a:t>
+              <a:t>• Grossistes &amp; Fournisseurs médicaux</a:t>
             </a:r>
             <a:br/>
             <a:r>
-              <a:t>Assurances (AMO)</a:t>
-            </a:r>
-          </a:p>
-        </p:txBody>
-      </p:sp>
-      <p:sp>
-        <p:nvSpPr>
-          <p:cNvPr id="9" name="Rounded Rectangle 8"/>
+              <a:t>• Compagnies d'assurance (AMO/CNSS)</a:t>
+            </a:r>
+            <a:br/>
+            <a:r>
+              <a:t>• Cliniques &amp; Laboratoires d'analyses</a:t>
+            </a:r>
+          </a:p>
+        </p:txBody>
+      </p:sp>
+      <p:sp>
+        <p:nvSpPr>
+          <p:cNvPr id="11" name="Rounded Rectangle 10"/>
           <p:cNvSpPr/>
           <p:nvPr/>
         </p:nvSpPr>
         <p:spPr>
           <a:xfrm>
-            <a:off x="2926080" y="1097280"/>
-            <a:ext cx="2286000" cy="2011680"/>
+            <a:off x="2852928" y="1051560"/>
+            <a:ext cx="2240280" cy="1243584"/>
           </a:xfrm>
           <a:prstGeom prst="roundRect">
             <a:avLst/>
@@ -7178,14 +7301,57 @@
       </p:sp>
       <p:sp>
         <p:nvSpPr>
-          <p:cNvPr id="10" name="TextBox 9"/>
-          <p:cNvSpPr txBox="1"/>
-          <p:nvPr/>
-        </p:nvSpPr>
-        <p:spPr>
-          <a:xfrm>
-            <a:off x="3017520" y="1170432"/>
-            <a:ext cx="2103120" cy="365760"/>
+          <p:cNvPr id="12" name="Rounded Rectangle 11"/>
+          <p:cNvSpPr/>
+          <p:nvPr/>
+        </p:nvSpPr>
+        <p:spPr>
+          <a:xfrm>
+            <a:off x="2907792" y="1106424"/>
+            <a:ext cx="2130552" cy="292608"/>
+          </a:xfrm>
+          <a:prstGeom prst="roundRect">
+            <a:avLst/>
+          </a:prstGeom>
+          <a:solidFill>
+            <a:srgbClr val="EEF2FF"/>
+          </a:solidFill>
+          <a:ln>
+            <a:noFill/>
+          </a:ln>
+        </p:spPr>
+        <p:style>
+          <a:lnRef idx="1">
+            <a:schemeClr val="accent1"/>
+          </a:lnRef>
+          <a:fillRef idx="3">
+            <a:schemeClr val="accent1"/>
+          </a:fillRef>
+          <a:effectRef idx="2">
+            <a:schemeClr val="accent1"/>
+          </a:effectRef>
+          <a:fontRef idx="minor">
+            <a:schemeClr val="lt1"/>
+          </a:fontRef>
+        </p:style>
+        <p:txBody>
+          <a:bodyPr rtlCol="0" anchor="ctr"/>
+          <a:lstStyle/>
+          <a:p>
+            <a:pPr algn="ctr"/>
+          </a:p>
+        </p:txBody>
+      </p:sp>
+      <p:sp>
+        <p:nvSpPr>
+          <p:cNvPr id="13" name="TextBox 12"/>
+          <p:cNvSpPr txBox="1"/>
+          <p:nvPr/>
+        </p:nvSpPr>
+        <p:spPr>
+          <a:xfrm>
+            <a:off x="2944368" y="1124712"/>
+            <a:ext cx="2057400" cy="256032"/>
           </a:xfrm>
           <a:prstGeom prst="rect">
             <a:avLst/>
@@ -7214,14 +7380,14 @@
       </p:sp>
       <p:sp>
         <p:nvSpPr>
-          <p:cNvPr id="11" name="TextBox 10"/>
-          <p:cNvSpPr txBox="1"/>
-          <p:nvPr/>
-        </p:nvSpPr>
-        <p:spPr>
-          <a:xfrm>
-            <a:off x="3017520" y="1536192"/>
-            <a:ext cx="2103120" cy="1508760"/>
+          <p:cNvPr id="14" name="TextBox 13"/>
+          <p:cNvSpPr txBox="1"/>
+          <p:nvPr/>
+        </p:nvSpPr>
+        <p:spPr>
+          <a:xfrm>
+            <a:off x="2944368" y="1435608"/>
+            <a:ext cx="2057400" cy="804672"/>
           </a:xfrm>
           <a:prstGeom prst="rect">
             <a:avLst/>
@@ -7235,7 +7401,7 @@
           <a:lstStyle/>
           <a:p>
             <a:pPr algn="l">
-              <a:defRPr sz="900" b="0">
+              <a:defRPr sz="880" b="0">
                 <a:solidFill>
                   <a:srgbClr val="1E293B"/>
                 </a:solidFill>
@@ -7243,33 +7409,33 @@
               </a:defRPr>
             </a:pPr>
             <a:r>
-              <a:t>Plateforme web</a:t>
+              <a:t>• Développement plateforme web/ERP</a:t>
             </a:r>
             <a:br/>
             <a:r>
-              <a:t>Mise en relation</a:t>
+              <a:t>• Dispatching &amp; géolocalisation</a:t>
             </a:r>
             <a:br/>
             <a:r>
-              <a:t>Gestion ERP</a:t>
+              <a:t>• Contrôle qualité &amp; vérification diplômes</a:t>
             </a:r>
             <a:br/>
             <a:r>
-              <a:t>Facturation</a:t>
-            </a:r>
-          </a:p>
-        </p:txBody>
-      </p:sp>
-      <p:sp>
-        <p:nvSpPr>
-          <p:cNvPr id="12" name="Rounded Rectangle 11"/>
+              <a:t>• Facturation &amp; support client 24/7</a:t>
+            </a:r>
+          </a:p>
+        </p:txBody>
+      </p:sp>
+      <p:sp>
+        <p:nvSpPr>
+          <p:cNvPr id="15" name="Rounded Rectangle 14"/>
           <p:cNvSpPr/>
           <p:nvPr/>
         </p:nvSpPr>
         <p:spPr>
           <a:xfrm>
-            <a:off x="5303520" y="1097280"/>
-            <a:ext cx="2011680" cy="2011680"/>
+            <a:off x="2852928" y="2359152"/>
+            <a:ext cx="2240280" cy="1252728"/>
           </a:xfrm>
           <a:prstGeom prst="roundRect">
             <a:avLst/>
@@ -7307,14 +7473,57 @@
       </p:sp>
       <p:sp>
         <p:nvSpPr>
-          <p:cNvPr id="13" name="TextBox 12"/>
-          <p:cNvSpPr txBox="1"/>
-          <p:nvPr/>
-        </p:nvSpPr>
-        <p:spPr>
-          <a:xfrm>
-            <a:off x="5394960" y="1170432"/>
-            <a:ext cx="1828800" cy="365760"/>
+          <p:cNvPr id="16" name="Rounded Rectangle 15"/>
+          <p:cNvSpPr/>
+          <p:nvPr/>
+        </p:nvSpPr>
+        <p:spPr>
+          <a:xfrm>
+            <a:off x="2907792" y="2414016"/>
+            <a:ext cx="2130552" cy="292608"/>
+          </a:xfrm>
+          <a:prstGeom prst="roundRect">
+            <a:avLst/>
+          </a:prstGeom>
+          <a:solidFill>
+            <a:srgbClr val="EEF2FF"/>
+          </a:solidFill>
+          <a:ln>
+            <a:noFill/>
+          </a:ln>
+        </p:spPr>
+        <p:style>
+          <a:lnRef idx="1">
+            <a:schemeClr val="accent1"/>
+          </a:lnRef>
+          <a:fillRef idx="3">
+            <a:schemeClr val="accent1"/>
+          </a:fillRef>
+          <a:effectRef idx="2">
+            <a:schemeClr val="accent1"/>
+          </a:effectRef>
+          <a:fontRef idx="minor">
+            <a:schemeClr val="lt1"/>
+          </a:fontRef>
+        </p:style>
+        <p:txBody>
+          <a:bodyPr rtlCol="0" anchor="ctr"/>
+          <a:lstStyle/>
+          <a:p>
+            <a:pPr algn="ctr"/>
+          </a:p>
+        </p:txBody>
+      </p:sp>
+      <p:sp>
+        <p:nvSpPr>
+          <p:cNvPr id="17" name="TextBox 16"/>
+          <p:cNvSpPr txBox="1"/>
+          <p:nvPr/>
+        </p:nvSpPr>
+        <p:spPr>
+          <a:xfrm>
+            <a:off x="2944368" y="2432304"/>
+            <a:ext cx="2057400" cy="256032"/>
           </a:xfrm>
           <a:prstGeom prst="rect">
             <a:avLst/>
@@ -7336,73 +7545,65 @@
               </a:defRPr>
             </a:pPr>
             <a:r>
-              <a:t>Proposition de</a:t>
+              <a:t>Ressources Clés</a:t>
+            </a:r>
+          </a:p>
+        </p:txBody>
+      </p:sp>
+      <p:sp>
+        <p:nvSpPr>
+          <p:cNvPr id="18" name="TextBox 17"/>
+          <p:cNvSpPr txBox="1"/>
+          <p:nvPr/>
+        </p:nvSpPr>
+        <p:spPr>
+          <a:xfrm>
+            <a:off x="2944368" y="2743200"/>
+            <a:ext cx="2057400" cy="813816"/>
+          </a:xfrm>
+          <a:prstGeom prst="rect">
+            <a:avLst/>
+          </a:prstGeom>
+          <a:noFill/>
+        </p:spPr>
+        <p:txBody>
+          <a:bodyPr wrap="square">
+            <a:spAutoFit/>
+          </a:bodyPr>
+          <a:lstStyle/>
+          <a:p>
+            <a:pPr algn="l">
+              <a:defRPr sz="880" b="0">
+                <a:solidFill>
+                  <a:srgbClr val="1E293B"/>
+                </a:solidFill>
+                <a:latin typeface="Calibri"/>
+              </a:defRPr>
+            </a:pPr>
+            <a:r>
+              <a:t>• Infrastructure Cloud &amp; API sécurisée</a:t>
             </a:r>
             <a:br/>
             <a:r>
-              <a:t>Valeur</a:t>
-            </a:r>
-          </a:p>
-        </p:txBody>
-      </p:sp>
-      <p:sp>
-        <p:nvSpPr>
-          <p:cNvPr id="14" name="TextBox 13"/>
-          <p:cNvSpPr txBox="1"/>
-          <p:nvPr/>
-        </p:nvSpPr>
-        <p:spPr>
-          <a:xfrm>
-            <a:off x="5394960" y="1536192"/>
-            <a:ext cx="1828800" cy="1508760"/>
-          </a:xfrm>
-          <a:prstGeom prst="rect">
-            <a:avLst/>
-          </a:prstGeom>
-          <a:noFill/>
-        </p:spPr>
-        <p:txBody>
-          <a:bodyPr wrap="square">
-            <a:spAutoFit/>
-          </a:bodyPr>
-          <a:lstStyle/>
-          <a:p>
-            <a:pPr algn="l">
-              <a:defRPr sz="900" b="0">
-                <a:solidFill>
-                  <a:srgbClr val="1E293B"/>
-                </a:solidFill>
-                <a:latin typeface="Calibri"/>
-              </a:defRPr>
-            </a:pPr>
-            <a:r>
-              <a:t>Soins à domicile</a:t>
+              <a:t>• Réseau soignant qualifié</a:t>
             </a:r>
             <a:br/>
             <a:r>
-              <a:t>digitalisés,</a:t>
-            </a:r>
-            <a:br/>
-            <a:r>
-              <a:t>transparents</a:t>
-            </a:r>
-            <a:br/>
-            <a:r>
-              <a:t>et sécurisés</a:t>
-            </a:r>
-          </a:p>
-        </p:txBody>
-      </p:sp>
-      <p:sp>
-        <p:nvSpPr>
-          <p:cNvPr id="15" name="Rounded Rectangle 14"/>
+              <a:t>• Algorithme d'affectation intelligente</a:t>
+            </a:r>
+          </a:p>
+        </p:txBody>
+      </p:sp>
+      <p:sp>
+        <p:nvSpPr>
+          <p:cNvPr id="19" name="Rounded Rectangle 18"/>
           <p:cNvSpPr/>
           <p:nvPr/>
         </p:nvSpPr>
         <p:spPr>
           <a:xfrm>
-            <a:off x="7406640" y="1097280"/>
-            <a:ext cx="2286000" cy="2011680"/>
+            <a:off x="5157216" y="1051560"/>
+            <a:ext cx="2194560" cy="2560320"/>
           </a:xfrm>
           <a:prstGeom prst="roundRect">
             <a:avLst/>
@@ -7440,14 +7641,57 @@
       </p:sp>
       <p:sp>
         <p:nvSpPr>
-          <p:cNvPr id="16" name="TextBox 15"/>
-          <p:cNvSpPr txBox="1"/>
-          <p:nvPr/>
-        </p:nvSpPr>
-        <p:spPr>
-          <a:xfrm>
-            <a:off x="7498080" y="1170432"/>
-            <a:ext cx="2103120" cy="365760"/>
+          <p:cNvPr id="20" name="Rounded Rectangle 19"/>
+          <p:cNvSpPr/>
+          <p:nvPr/>
+        </p:nvSpPr>
+        <p:spPr>
+          <a:xfrm>
+            <a:off x="5212080" y="1106424"/>
+            <a:ext cx="2084832" cy="292608"/>
+          </a:xfrm>
+          <a:prstGeom prst="roundRect">
+            <a:avLst/>
+          </a:prstGeom>
+          <a:solidFill>
+            <a:srgbClr val="EEF2FF"/>
+          </a:solidFill>
+          <a:ln>
+            <a:noFill/>
+          </a:ln>
+        </p:spPr>
+        <p:style>
+          <a:lnRef idx="1">
+            <a:schemeClr val="accent1"/>
+          </a:lnRef>
+          <a:fillRef idx="3">
+            <a:schemeClr val="accent1"/>
+          </a:fillRef>
+          <a:effectRef idx="2">
+            <a:schemeClr val="accent1"/>
+          </a:effectRef>
+          <a:fontRef idx="minor">
+            <a:schemeClr val="lt1"/>
+          </a:fontRef>
+        </p:style>
+        <p:txBody>
+          <a:bodyPr rtlCol="0" anchor="ctr"/>
+          <a:lstStyle/>
+          <a:p>
+            <a:pPr algn="ctr"/>
+          </a:p>
+        </p:txBody>
+      </p:sp>
+      <p:sp>
+        <p:nvSpPr>
+          <p:cNvPr id="21" name="TextBox 20"/>
+          <p:cNvSpPr txBox="1"/>
+          <p:nvPr/>
+        </p:nvSpPr>
+        <p:spPr>
+          <a:xfrm>
+            <a:off x="5248656" y="1124712"/>
+            <a:ext cx="2011680" cy="256032"/>
           </a:xfrm>
           <a:prstGeom prst="rect">
             <a:avLst/>
@@ -7469,21 +7713,21 @@
               </a:defRPr>
             </a:pPr>
             <a:r>
-              <a:t>Relation Client</a:t>
-            </a:r>
-          </a:p>
-        </p:txBody>
-      </p:sp>
-      <p:sp>
-        <p:nvSpPr>
-          <p:cNvPr id="17" name="TextBox 16"/>
-          <p:cNvSpPr txBox="1"/>
-          <p:nvPr/>
-        </p:nvSpPr>
-        <p:spPr>
-          <a:xfrm>
-            <a:off x="7498080" y="1536192"/>
-            <a:ext cx="2103120" cy="1508760"/>
+              <a:t>Proposition de Valeur</a:t>
+            </a:r>
+          </a:p>
+        </p:txBody>
+      </p:sp>
+      <p:sp>
+        <p:nvSpPr>
+          <p:cNvPr id="22" name="TextBox 21"/>
+          <p:cNvSpPr txBox="1"/>
+          <p:nvPr/>
+        </p:nvSpPr>
+        <p:spPr>
+          <a:xfrm>
+            <a:off x="5248656" y="1435608"/>
+            <a:ext cx="2011680" cy="2121408"/>
           </a:xfrm>
           <a:prstGeom prst="rect">
             <a:avLst/>
@@ -7497,7 +7741,7 @@
           <a:lstStyle/>
           <a:p>
             <a:pPr algn="l">
-              <a:defRPr sz="900" b="0">
+              <a:defRPr sz="880" b="0">
                 <a:solidFill>
                   <a:srgbClr val="1E293B"/>
                 </a:solidFill>
@@ -7505,33 +7749,33 @@
               </a:defRPr>
             </a:pPr>
             <a:r>
-              <a:t>Application web</a:t>
+              <a:t>• Soins à domicile rapides et certifiés</a:t>
             </a:r>
             <a:br/>
             <a:r>
-              <a:t>Notifications</a:t>
+              <a:t>• Transparence des prix (devis clair)</a:t>
             </a:r>
             <a:br/>
             <a:r>
-              <a:t>Devis/Facture auto</a:t>
+              <a:t>• Dossier patient &amp; constantes partagés</a:t>
             </a:r>
             <a:br/>
             <a:r>
-              <a:t>Support</a:t>
-            </a:r>
-          </a:p>
-        </p:txBody>
-      </p:sp>
-      <p:sp>
-        <p:nvSpPr>
-          <p:cNvPr id="18" name="Rounded Rectangle 17"/>
+              <a:t>• ERP médical complet pour la gestion</a:t>
+            </a:r>
+          </a:p>
+        </p:txBody>
+      </p:sp>
+      <p:sp>
+        <p:nvSpPr>
+          <p:cNvPr id="23" name="Rounded Rectangle 22"/>
           <p:cNvSpPr/>
           <p:nvPr/>
         </p:nvSpPr>
         <p:spPr>
           <a:xfrm>
-            <a:off x="9784080" y="1097280"/>
-            <a:ext cx="2011680" cy="2011680"/>
+            <a:off x="7415783" y="1051560"/>
+            <a:ext cx="2240280" cy="1243584"/>
           </a:xfrm>
           <a:prstGeom prst="roundRect">
             <a:avLst/>
@@ -7569,14 +7813,57 @@
       </p:sp>
       <p:sp>
         <p:nvSpPr>
-          <p:cNvPr id="19" name="TextBox 18"/>
-          <p:cNvSpPr txBox="1"/>
-          <p:nvPr/>
-        </p:nvSpPr>
-        <p:spPr>
-          <a:xfrm>
-            <a:off x="9875520" y="1170432"/>
-            <a:ext cx="1828800" cy="365760"/>
+          <p:cNvPr id="24" name="Rounded Rectangle 23"/>
+          <p:cNvSpPr/>
+          <p:nvPr/>
+        </p:nvSpPr>
+        <p:spPr>
+          <a:xfrm>
+            <a:off x="7470647" y="1106424"/>
+            <a:ext cx="2130552" cy="292608"/>
+          </a:xfrm>
+          <a:prstGeom prst="roundRect">
+            <a:avLst/>
+          </a:prstGeom>
+          <a:solidFill>
+            <a:srgbClr val="EEF2FF"/>
+          </a:solidFill>
+          <a:ln>
+            <a:noFill/>
+          </a:ln>
+        </p:spPr>
+        <p:style>
+          <a:lnRef idx="1">
+            <a:schemeClr val="accent1"/>
+          </a:lnRef>
+          <a:fillRef idx="3">
+            <a:schemeClr val="accent1"/>
+          </a:fillRef>
+          <a:effectRef idx="2">
+            <a:schemeClr val="accent1"/>
+          </a:effectRef>
+          <a:fontRef idx="minor">
+            <a:schemeClr val="lt1"/>
+          </a:fontRef>
+        </p:style>
+        <p:txBody>
+          <a:bodyPr rtlCol="0" anchor="ctr"/>
+          <a:lstStyle/>
+          <a:p>
+            <a:pPr algn="ctr"/>
+          </a:p>
+        </p:txBody>
+      </p:sp>
+      <p:sp>
+        <p:nvSpPr>
+          <p:cNvPr id="25" name="TextBox 24"/>
+          <p:cNvSpPr txBox="1"/>
+          <p:nvPr/>
+        </p:nvSpPr>
+        <p:spPr>
+          <a:xfrm>
+            <a:off x="7507223" y="1124712"/>
+            <a:ext cx="2057400" cy="256032"/>
           </a:xfrm>
           <a:prstGeom prst="rect">
             <a:avLst/>
@@ -7598,21 +7885,21 @@
               </a:defRPr>
             </a:pPr>
             <a:r>
-              <a:t>Segments Clients</a:t>
-            </a:r>
-          </a:p>
-        </p:txBody>
-      </p:sp>
-      <p:sp>
-        <p:nvSpPr>
-          <p:cNvPr id="20" name="TextBox 19"/>
-          <p:cNvSpPr txBox="1"/>
-          <p:nvPr/>
-        </p:nvSpPr>
-        <p:spPr>
-          <a:xfrm>
-            <a:off x="9875520" y="1536192"/>
-            <a:ext cx="1828800" cy="1508760"/>
+              <a:t>Relations Clients</a:t>
+            </a:r>
+          </a:p>
+        </p:txBody>
+      </p:sp>
+      <p:sp>
+        <p:nvSpPr>
+          <p:cNvPr id="26" name="TextBox 25"/>
+          <p:cNvSpPr txBox="1"/>
+          <p:nvPr/>
+        </p:nvSpPr>
+        <p:spPr>
+          <a:xfrm>
+            <a:off x="7507223" y="1435608"/>
+            <a:ext cx="2057400" cy="804672"/>
           </a:xfrm>
           <a:prstGeom prst="rect">
             <a:avLst/>
@@ -7626,7 +7913,7 @@
           <a:lstStyle/>
           <a:p>
             <a:pPr algn="l">
-              <a:defRPr sz="900" b="0">
+              <a:defRPr sz="880" b="0">
                 <a:solidFill>
                   <a:srgbClr val="1E293B"/>
                 </a:solidFill>
@@ -7634,33 +7921,33 @@
               </a:defRPr>
             </a:pPr>
             <a:r>
-              <a:t>Patients chroniques</a:t>
+              <a:t>• Suivi en temps réel de l'infirmier</a:t>
             </a:r>
             <a:br/>
             <a:r>
-              <a:t>Personnes âgées</a:t>
+              <a:t>• Espace client sécurisé avec historique</a:t>
             </a:r>
             <a:br/>
             <a:r>
-              <a:t>Post-opératoires</a:t>
+              <a:t>• Notifications instantanées</a:t>
             </a:r>
             <a:br/>
             <a:r>
-              <a:t>Entreprises</a:t>
-            </a:r>
-          </a:p>
-        </p:txBody>
-      </p:sp>
-      <p:sp>
-        <p:nvSpPr>
-          <p:cNvPr id="21" name="Rounded Rectangle 20"/>
+              <a:t>• Support &amp; assistance réactive</a:t>
+            </a:r>
+          </a:p>
+        </p:txBody>
+      </p:sp>
+      <p:sp>
+        <p:nvSpPr>
+          <p:cNvPr id="27" name="Rounded Rectangle 26"/>
           <p:cNvSpPr/>
           <p:nvPr/>
         </p:nvSpPr>
         <p:spPr>
           <a:xfrm>
-            <a:off x="2926080" y="3566160"/>
-            <a:ext cx="2286000" cy="2011680"/>
+            <a:off x="7415783" y="2359152"/>
+            <a:ext cx="2240280" cy="1252728"/>
           </a:xfrm>
           <a:prstGeom prst="roundRect">
             <a:avLst/>
@@ -7698,14 +7985,57 @@
       </p:sp>
       <p:sp>
         <p:nvSpPr>
-          <p:cNvPr id="22" name="TextBox 21"/>
-          <p:cNvSpPr txBox="1"/>
-          <p:nvPr/>
-        </p:nvSpPr>
-        <p:spPr>
-          <a:xfrm>
-            <a:off x="3017520" y="3639312"/>
-            <a:ext cx="2103120" cy="365760"/>
+          <p:cNvPr id="28" name="Rounded Rectangle 27"/>
+          <p:cNvSpPr/>
+          <p:nvPr/>
+        </p:nvSpPr>
+        <p:spPr>
+          <a:xfrm>
+            <a:off x="7470647" y="2414016"/>
+            <a:ext cx="2130552" cy="292608"/>
+          </a:xfrm>
+          <a:prstGeom prst="roundRect">
+            <a:avLst/>
+          </a:prstGeom>
+          <a:solidFill>
+            <a:srgbClr val="EEF2FF"/>
+          </a:solidFill>
+          <a:ln>
+            <a:noFill/>
+          </a:ln>
+        </p:spPr>
+        <p:style>
+          <a:lnRef idx="1">
+            <a:schemeClr val="accent1"/>
+          </a:lnRef>
+          <a:fillRef idx="3">
+            <a:schemeClr val="accent1"/>
+          </a:fillRef>
+          <a:effectRef idx="2">
+            <a:schemeClr val="accent1"/>
+          </a:effectRef>
+          <a:fontRef idx="minor">
+            <a:schemeClr val="lt1"/>
+          </a:fontRef>
+        </p:style>
+        <p:txBody>
+          <a:bodyPr rtlCol="0" anchor="ctr"/>
+          <a:lstStyle/>
+          <a:p>
+            <a:pPr algn="ctr"/>
+          </a:p>
+        </p:txBody>
+      </p:sp>
+      <p:sp>
+        <p:nvSpPr>
+          <p:cNvPr id="29" name="TextBox 28"/>
+          <p:cNvSpPr txBox="1"/>
+          <p:nvPr/>
+        </p:nvSpPr>
+        <p:spPr>
+          <a:xfrm>
+            <a:off x="7507223" y="2432304"/>
+            <a:ext cx="2057400" cy="256032"/>
           </a:xfrm>
           <a:prstGeom prst="rect">
             <a:avLst/>
@@ -7727,21 +8057,21 @@
               </a:defRPr>
             </a:pPr>
             <a:r>
-              <a:t>Ressources Clés</a:t>
-            </a:r>
-          </a:p>
-        </p:txBody>
-      </p:sp>
-      <p:sp>
-        <p:nvSpPr>
-          <p:cNvPr id="23" name="TextBox 22"/>
-          <p:cNvSpPr txBox="1"/>
-          <p:nvPr/>
-        </p:nvSpPr>
-        <p:spPr>
-          <a:xfrm>
-            <a:off x="3017520" y="4005072"/>
-            <a:ext cx="2103120" cy="1508760"/>
+              <a:t>Canaux</a:t>
+            </a:r>
+          </a:p>
+        </p:txBody>
+      </p:sp>
+      <p:sp>
+        <p:nvSpPr>
+          <p:cNvPr id="30" name="TextBox 29"/>
+          <p:cNvSpPr txBox="1"/>
+          <p:nvPr/>
+        </p:nvSpPr>
+        <p:spPr>
+          <a:xfrm>
+            <a:off x="7507223" y="2743200"/>
+            <a:ext cx="2057400" cy="813816"/>
           </a:xfrm>
           <a:prstGeom prst="rect">
             <a:avLst/>
@@ -7755,7 +8085,7 @@
           <a:lstStyle/>
           <a:p>
             <a:pPr algn="l">
-              <a:defRPr sz="900" b="0">
+              <a:defRPr sz="880" b="0">
                 <a:solidFill>
                   <a:srgbClr val="1E293B"/>
                 </a:solidFill>
@@ -7763,29 +8093,33 @@
               </a:defRPr>
             </a:pPr>
             <a:r>
-              <a:t>Développeurs</a:t>
+              <a:t>• Application Web Responsive</a:t>
             </a:r>
             <a:br/>
             <a:r>
-              <a:t>Infirmiers partenaires</a:t>
+              <a:t>• Référencement SEO &amp; Réseaux sociaux</a:t>
             </a:r>
             <a:br/>
             <a:r>
-              <a:t>Infrastructure cloud</a:t>
-            </a:r>
-          </a:p>
-        </p:txBody>
-      </p:sp>
-      <p:sp>
-        <p:nvSpPr>
-          <p:cNvPr id="24" name="Rounded Rectangle 23"/>
+              <a:t>• Recommandations médecins &amp; cliniques</a:t>
+            </a:r>
+            <a:br/>
+            <a:r>
+              <a:t>• Bouche-à-oreille et partenariats</a:t>
+            </a:r>
+          </a:p>
+        </p:txBody>
+      </p:sp>
+      <p:sp>
+        <p:nvSpPr>
+          <p:cNvPr id="31" name="Rounded Rectangle 30"/>
           <p:cNvSpPr/>
           <p:nvPr/>
         </p:nvSpPr>
         <p:spPr>
           <a:xfrm>
-            <a:off x="7406640" y="3566160"/>
-            <a:ext cx="2286000" cy="2011680"/>
+            <a:off x="9720072" y="1051560"/>
+            <a:ext cx="2011680" cy="2560320"/>
           </a:xfrm>
           <a:prstGeom prst="roundRect">
             <a:avLst/>
@@ -7823,14 +8157,57 @@
       </p:sp>
       <p:sp>
         <p:nvSpPr>
-          <p:cNvPr id="25" name="TextBox 24"/>
-          <p:cNvSpPr txBox="1"/>
-          <p:nvPr/>
-        </p:nvSpPr>
-        <p:spPr>
-          <a:xfrm>
-            <a:off x="7498080" y="3639312"/>
-            <a:ext cx="2103120" cy="365760"/>
+          <p:cNvPr id="32" name="Rounded Rectangle 31"/>
+          <p:cNvSpPr/>
+          <p:nvPr/>
+        </p:nvSpPr>
+        <p:spPr>
+          <a:xfrm>
+            <a:off x="9774936" y="1106424"/>
+            <a:ext cx="1901952" cy="292608"/>
+          </a:xfrm>
+          <a:prstGeom prst="roundRect">
+            <a:avLst/>
+          </a:prstGeom>
+          <a:solidFill>
+            <a:srgbClr val="EEF2FF"/>
+          </a:solidFill>
+          <a:ln>
+            <a:noFill/>
+          </a:ln>
+        </p:spPr>
+        <p:style>
+          <a:lnRef idx="1">
+            <a:schemeClr val="accent1"/>
+          </a:lnRef>
+          <a:fillRef idx="3">
+            <a:schemeClr val="accent1"/>
+          </a:fillRef>
+          <a:effectRef idx="2">
+            <a:schemeClr val="accent1"/>
+          </a:effectRef>
+          <a:fontRef idx="minor">
+            <a:schemeClr val="lt1"/>
+          </a:fontRef>
+        </p:style>
+        <p:txBody>
+          <a:bodyPr rtlCol="0" anchor="ctr"/>
+          <a:lstStyle/>
+          <a:p>
+            <a:pPr algn="ctr"/>
+          </a:p>
+        </p:txBody>
+      </p:sp>
+      <p:sp>
+        <p:nvSpPr>
+          <p:cNvPr id="33" name="TextBox 32"/>
+          <p:cNvSpPr txBox="1"/>
+          <p:nvPr/>
+        </p:nvSpPr>
+        <p:spPr>
+          <a:xfrm>
+            <a:off x="9811512" y="1124712"/>
+            <a:ext cx="1828800" cy="256032"/>
           </a:xfrm>
           <a:prstGeom prst="rect">
             <a:avLst/>
@@ -7852,21 +8229,21 @@
               </a:defRPr>
             </a:pPr>
             <a:r>
-              <a:t>Canaux</a:t>
-            </a:r>
-          </a:p>
-        </p:txBody>
-      </p:sp>
-      <p:sp>
-        <p:nvSpPr>
-          <p:cNvPr id="26" name="TextBox 25"/>
-          <p:cNvSpPr txBox="1"/>
-          <p:nvPr/>
-        </p:nvSpPr>
-        <p:spPr>
-          <a:xfrm>
-            <a:off x="7498080" y="4005072"/>
-            <a:ext cx="2103120" cy="1508760"/>
+              <a:t>Segments Clients</a:t>
+            </a:r>
+          </a:p>
+        </p:txBody>
+      </p:sp>
+      <p:sp>
+        <p:nvSpPr>
+          <p:cNvPr id="34" name="TextBox 33"/>
+          <p:cNvSpPr txBox="1"/>
+          <p:nvPr/>
+        </p:nvSpPr>
+        <p:spPr>
+          <a:xfrm>
+            <a:off x="9811512" y="1435608"/>
+            <a:ext cx="1828800" cy="2121408"/>
           </a:xfrm>
           <a:prstGeom prst="rect">
             <a:avLst/>
@@ -7880,7 +8257,7 @@
           <a:lstStyle/>
           <a:p>
             <a:pPr algn="l">
-              <a:defRPr sz="900" b="0">
+              <a:defRPr sz="880" b="0">
                 <a:solidFill>
                   <a:srgbClr val="1E293B"/>
                 </a:solidFill>
@@ -7888,33 +8265,33 @@
               </a:defRPr>
             </a:pPr>
             <a:r>
-              <a:t>Site web</a:t>
+              <a:t>• Patients chroniques (diabète, HTA)</a:t>
             </a:r>
             <a:br/>
             <a:r>
-              <a:t>Référencement SEO</a:t>
+              <a:t>• Seniors &amp; personnes à mobilité réduite</a:t>
             </a:r>
             <a:br/>
             <a:r>
-              <a:t>Réseaux sociaux</a:t>
+              <a:t>• Patients en convalescence post-opératoire</a:t>
             </a:r>
             <a:br/>
             <a:r>
-              <a:t>Partenariats</a:t>
-            </a:r>
-          </a:p>
-        </p:txBody>
-      </p:sp>
-      <p:sp>
-        <p:nvSpPr>
-          <p:cNvPr id="27" name="Rounded Rectangle 26"/>
+              <a:t>• Entreprises (gardes &amp; bilans santé)</a:t>
+            </a:r>
+          </a:p>
+        </p:txBody>
+      </p:sp>
+      <p:sp>
+        <p:nvSpPr>
+          <p:cNvPr id="35" name="Rounded Rectangle 34"/>
           <p:cNvSpPr/>
           <p:nvPr/>
         </p:nvSpPr>
         <p:spPr>
           <a:xfrm>
-            <a:off x="548640" y="5303520"/>
-            <a:ext cx="5303520" cy="1097280"/>
+            <a:off x="548640" y="3730752"/>
+            <a:ext cx="5303520" cy="2286000"/>
           </a:xfrm>
           <a:prstGeom prst="roundRect">
             <a:avLst/>
@@ -7924,7 +8301,7 @@
           </a:solidFill>
           <a:ln w="19050">
             <a:solidFill>
-              <a:srgbClr val="BFDBFE"/>
+              <a:srgbClr val="EF4444"/>
             </a:solidFill>
           </a:ln>
         </p:spPr>
@@ -7952,14 +8329,14 @@
       </p:sp>
       <p:sp>
         <p:nvSpPr>
-          <p:cNvPr id="28" name="TextBox 27"/>
-          <p:cNvSpPr txBox="1"/>
-          <p:nvPr/>
-        </p:nvSpPr>
-        <p:spPr>
-          <a:xfrm>
-            <a:off x="640080" y="5376672"/>
-            <a:ext cx="5120640" cy="365760"/>
+          <p:cNvPr id="36" name="TextBox 35"/>
+          <p:cNvSpPr txBox="1"/>
+          <p:nvPr/>
+        </p:nvSpPr>
+        <p:spPr>
+          <a:xfrm>
+            <a:off x="685800" y="3803904"/>
+            <a:ext cx="5029200" cy="274320"/>
           </a:xfrm>
           <a:prstGeom prst="rect">
             <a:avLst/>
@@ -7973,9 +8350,9 @@
           <a:lstStyle/>
           <a:p>
             <a:pPr algn="l">
-              <a:defRPr sz="1000" b="1">
-                <a:solidFill>
-                  <a:srgbClr val="2563EB"/>
+              <a:defRPr sz="1200" b="1">
+                <a:solidFill>
+                  <a:srgbClr val="EF4444"/>
                 </a:solidFill>
                 <a:latin typeface="Calibri"/>
               </a:defRPr>
@@ -7988,50 +8365,117 @@
       </p:sp>
       <p:sp>
         <p:nvSpPr>
-          <p:cNvPr id="29" name="TextBox 28"/>
-          <p:cNvSpPr txBox="1"/>
-          <p:nvPr/>
-        </p:nvSpPr>
-        <p:spPr>
-          <a:xfrm>
-            <a:off x="640080" y="5742432"/>
-            <a:ext cx="5120640" cy="594360"/>
-          </a:xfrm>
-          <a:prstGeom prst="rect">
-            <a:avLst/>
-          </a:prstGeom>
-          <a:noFill/>
-        </p:spPr>
-        <p:txBody>
-          <a:bodyPr wrap="square">
-            <a:spAutoFit/>
-          </a:bodyPr>
-          <a:lstStyle/>
-          <a:p>
-            <a:pPr algn="l">
-              <a:defRPr sz="900" b="0">
+          <p:cNvPr id="37" name="TextBox 36"/>
+          <p:cNvSpPr txBox="1"/>
+          <p:nvPr/>
+        </p:nvSpPr>
+        <p:spPr>
+          <a:xfrm>
+            <a:off x="685800" y="4114800"/>
+            <a:ext cx="5029200" cy="1783080"/>
+          </a:xfrm>
+          <a:prstGeom prst="rect">
+            <a:avLst/>
+          </a:prstGeom>
+          <a:noFill/>
+        </p:spPr>
+        <p:txBody>
+          <a:bodyPr wrap="square">
+            <a:spAutoFit/>
+          </a:bodyPr>
+          <a:lstStyle/>
+          <a:p>
+            <a:pPr>
+              <a:spcAft>
+                <a:spcPts val="600"/>
+              </a:spcAft>
+              <a:defRPr sz="950">
                 <a:solidFill>
                   <a:srgbClr val="1E293B"/>
                 </a:solidFill>
                 <a:latin typeface="Calibri"/>
               </a:defRPr>
-            </a:pPr>
-            <a:r>
-              <a:t>Hébergement cloud · Développement · Marketing · Support technique</a:t>
-            </a:r>
-          </a:p>
-        </p:txBody>
-      </p:sp>
-      <p:sp>
-        <p:nvSpPr>
-          <p:cNvPr id="30" name="Rounded Rectangle 29"/>
+              <a:buChar char="▸"/>
+              <a:buClr>
+                <a:srgbClr val="EF63EB"/>
+              </a:buClr>
+            </a:pPr>
+            <a:r>
+              <a:t>Hébergement Cloud haute disponibilité &amp; sécurité des données</a:t>
+            </a:r>
+          </a:p>
+          <a:p>
+            <a:pPr>
+              <a:spcAft>
+                <a:spcPts val="600"/>
+              </a:spcAft>
+              <a:defRPr sz="950">
+                <a:solidFill>
+                  <a:srgbClr val="1E293B"/>
+                </a:solidFill>
+                <a:latin typeface="Calibri"/>
+              </a:defRPr>
+              <a:buChar char="▸"/>
+              <a:buClr>
+                <a:srgbClr val="EF63EB"/>
+              </a:buClr>
+            </a:pPr>
+            <a:r>
+              <a:t>Maintenance applicative, développement continu et R&amp;D</a:t>
+            </a:r>
+          </a:p>
+          <a:p>
+            <a:pPr>
+              <a:spcAft>
+                <a:spcPts val="600"/>
+              </a:spcAft>
+              <a:defRPr sz="950">
+                <a:solidFill>
+                  <a:srgbClr val="1E293B"/>
+                </a:solidFill>
+                <a:latin typeface="Calibri"/>
+              </a:defRPr>
+              <a:buChar char="▸"/>
+              <a:buClr>
+                <a:srgbClr val="EF63EB"/>
+              </a:buClr>
+            </a:pPr>
+            <a:r>
+              <a:t>Marketing digital, acquisition client et communication B2B</a:t>
+            </a:r>
+          </a:p>
+          <a:p>
+            <a:pPr>
+              <a:spcAft>
+                <a:spcPts val="600"/>
+              </a:spcAft>
+              <a:defRPr sz="950">
+                <a:solidFill>
+                  <a:srgbClr val="1E293B"/>
+                </a:solidFill>
+                <a:latin typeface="Calibri"/>
+              </a:defRPr>
+              <a:buChar char="▸"/>
+              <a:buClr>
+                <a:srgbClr val="EF63EB"/>
+              </a:buClr>
+            </a:pPr>
+            <a:r>
+              <a:t>Frais administratifs, assurance responsabilité civile et support</a:t>
+            </a:r>
+          </a:p>
+        </p:txBody>
+      </p:sp>
+      <p:sp>
+        <p:nvSpPr>
+          <p:cNvPr id="38" name="Rounded Rectangle 37"/>
           <p:cNvSpPr/>
           <p:nvPr/>
         </p:nvSpPr>
         <p:spPr>
           <a:xfrm>
-            <a:off x="6035040" y="5303520"/>
-            <a:ext cx="5760720" cy="1097280"/>
+            <a:off x="5943600" y="3730752"/>
+            <a:ext cx="5788152" cy="2286000"/>
           </a:xfrm>
           <a:prstGeom prst="roundRect">
             <a:avLst/>
@@ -8041,7 +8485,7 @@
           </a:solidFill>
           <a:ln w="19050">
             <a:solidFill>
-              <a:srgbClr val="BFDBFE"/>
+              <a:srgbClr val="10B981"/>
             </a:solidFill>
           </a:ln>
         </p:spPr>
@@ -8069,14 +8513,14 @@
       </p:sp>
       <p:sp>
         <p:nvSpPr>
-          <p:cNvPr id="31" name="TextBox 30"/>
-          <p:cNvSpPr txBox="1"/>
-          <p:nvPr/>
-        </p:nvSpPr>
-        <p:spPr>
-          <a:xfrm>
-            <a:off x="6126480" y="5376672"/>
-            <a:ext cx="5577840" cy="365760"/>
+          <p:cNvPr id="39" name="TextBox 38"/>
+          <p:cNvSpPr txBox="1"/>
+          <p:nvPr/>
+        </p:nvSpPr>
+        <p:spPr>
+          <a:xfrm>
+            <a:off x="6080760" y="3803904"/>
+            <a:ext cx="5486400" cy="274320"/>
           </a:xfrm>
           <a:prstGeom prst="rect">
             <a:avLst/>
@@ -8090,58 +8534,125 @@
           <a:lstStyle/>
           <a:p>
             <a:pPr algn="l">
-              <a:defRPr sz="1000" b="1">
-                <a:solidFill>
-                  <a:srgbClr val="2563EB"/>
-                </a:solidFill>
-                <a:latin typeface="Calibri"/>
-              </a:defRPr>
-            </a:pPr>
-            <a:r>
-              <a:t>Sources de Revenus</a:t>
-            </a:r>
-          </a:p>
-        </p:txBody>
-      </p:sp>
-      <p:sp>
-        <p:nvSpPr>
-          <p:cNvPr id="32" name="TextBox 31"/>
-          <p:cNvSpPr txBox="1"/>
-          <p:nvPr/>
-        </p:nvSpPr>
-        <p:spPr>
-          <a:xfrm>
-            <a:off x="6126480" y="5742432"/>
-            <a:ext cx="5577840" cy="594360"/>
-          </a:xfrm>
-          <a:prstGeom prst="rect">
-            <a:avLst/>
-          </a:prstGeom>
-          <a:noFill/>
-        </p:spPr>
-        <p:txBody>
-          <a:bodyPr wrap="square">
-            <a:spAutoFit/>
-          </a:bodyPr>
-          <a:lstStyle/>
-          <a:p>
-            <a:pPr algn="l">
-              <a:defRPr sz="900" b="0">
+              <a:defRPr sz="1200" b="1">
+                <a:solidFill>
+                  <a:srgbClr val="059669"/>
+                </a:solidFill>
+                <a:latin typeface="Calibri"/>
+              </a:defRPr>
+            </a:pPr>
+            <a:r>
+              <a:t>Sources de Revenus Multiples (Monétisation)</a:t>
+            </a:r>
+          </a:p>
+        </p:txBody>
+      </p:sp>
+      <p:sp>
+        <p:nvSpPr>
+          <p:cNvPr id="40" name="TextBox 39"/>
+          <p:cNvSpPr txBox="1"/>
+          <p:nvPr/>
+        </p:nvSpPr>
+        <p:spPr>
+          <a:xfrm>
+            <a:off x="6080760" y="4114800"/>
+            <a:ext cx="5486400" cy="1783080"/>
+          </a:xfrm>
+          <a:prstGeom prst="rect">
+            <a:avLst/>
+          </a:prstGeom>
+          <a:noFill/>
+        </p:spPr>
+        <p:txBody>
+          <a:bodyPr wrap="square">
+            <a:spAutoFit/>
+          </a:bodyPr>
+          <a:lstStyle/>
+          <a:p>
+            <a:pPr>
+              <a:spcAft>
+                <a:spcPts val="600"/>
+              </a:spcAft>
+              <a:defRPr sz="950">
                 <a:solidFill>
                   <a:srgbClr val="1E293B"/>
                 </a:solidFill>
                 <a:latin typeface="Calibri"/>
               </a:defRPr>
-            </a:pPr>
-            <a:r>
-              <a:t>Commission par intervention (15-20%) · Abonnements Premium · Vente de matériel médical</a:t>
-            </a:r>
-          </a:p>
-        </p:txBody>
-      </p:sp>
-      <p:sp>
-        <p:nvSpPr>
-          <p:cNvPr id="33" name="TextBox 32"/>
+              <a:buChar char="▸"/>
+              <a:buClr>
+                <a:srgbClr val="1063EB"/>
+              </a:buClr>
+            </a:pPr>
+            <a:r>
+              <a:t>Commission par acte (15% à 20%) prélevée sur chaque soin validé</a:t>
+            </a:r>
+          </a:p>
+          <a:p>
+            <a:pPr>
+              <a:spcAft>
+                <a:spcPts val="600"/>
+              </a:spcAft>
+              <a:defRPr sz="950">
+                <a:solidFill>
+                  <a:srgbClr val="1E293B"/>
+                </a:solidFill>
+                <a:latin typeface="Calibri"/>
+              </a:defRPr>
+              <a:buChar char="▸"/>
+              <a:buClr>
+                <a:srgbClr val="1063EB"/>
+              </a:buClr>
+            </a:pPr>
+            <a:r>
+              <a:t>Abonnements Infirmiers Pro (visibilité prioritaire, modules ERP avancés)</a:t>
+            </a:r>
+          </a:p>
+          <a:p>
+            <a:pPr>
+              <a:spcAft>
+                <a:spcPts val="600"/>
+              </a:spcAft>
+              <a:defRPr sz="950">
+                <a:solidFill>
+                  <a:srgbClr val="1E293B"/>
+                </a:solidFill>
+                <a:latin typeface="Calibri"/>
+              </a:defRPr>
+              <a:buChar char="▸"/>
+              <a:buClr>
+                <a:srgbClr val="1063EB"/>
+              </a:buClr>
+            </a:pPr>
+            <a:r>
+              <a:t>Marge sur vente de matériel &amp; consommables médicaux via ERP</a:t>
+            </a:r>
+          </a:p>
+          <a:p>
+            <a:pPr>
+              <a:spcAft>
+                <a:spcPts val="600"/>
+              </a:spcAft>
+              <a:defRPr sz="950">
+                <a:solidFill>
+                  <a:srgbClr val="1E293B"/>
+                </a:solidFill>
+                <a:latin typeface="Calibri"/>
+              </a:defRPr>
+              <a:buChar char="▸"/>
+              <a:buClr>
+                <a:srgbClr val="1063EB"/>
+              </a:buClr>
+            </a:pPr>
+            <a:r>
+              <a:t>Contrats de garde longue durée &amp; forfaits santé pour entreprises (B2B)</a:t>
+            </a:r>
+          </a:p>
+        </p:txBody>
+      </p:sp>
+      <p:sp>
+        <p:nvSpPr>
+          <p:cNvPr id="41" name="TextBox 40"/>
           <p:cNvSpPr txBox="1"/>
           <p:nvPr/>
         </p:nvSpPr>
@@ -19252,7 +19763,7 @@
               </a:defRPr>
             </a:pPr>
             <a:r>
-              <a:t>Étude de Marché et Analyse Concurrentielle</a:t>
+              <a:t>Étude de Marché &amp; Modèle Économique</a:t>
             </a:r>
           </a:p>
         </p:txBody>
@@ -19340,7 +19851,7 @@
               </a:defRPr>
             </a:pPr>
             <a:r>
-              <a:t>Business Model &amp; Business Plan</a:t>
+              <a:t>Business Plan &amp; Projections Financières</a:t>
             </a:r>
           </a:p>
         </p:txBody>
@@ -32440,7 +32951,7 @@
               </a:defRPr>
             </a:pPr>
             <a:r>
-              <a:t>III. Étude de Marché</a:t>
+              <a:t>III. Étude de Marché &amp; Modèle Économique</a:t>
             </a:r>
           </a:p>
         </p:txBody>
@@ -32476,7 +32987,7 @@
               </a:defRPr>
             </a:pPr>
             <a:r>
-              <a:t>Analyse concurrentielle et positionnement</a:t>
+              <a:t>Benchmark concurrentiel, diagnostic SWOT et Business Model Canvas</a:t>
             </a:r>
           </a:p>
         </p:txBody>
@@ -32660,8 +33171,8 @@
         </p:nvSpPr>
         <p:spPr>
           <a:xfrm>
-            <a:off x="1463040" y="274320"/>
-            <a:ext cx="9144000" cy="548640"/>
+            <a:off x="1463040" y="228600"/>
+            <a:ext cx="9601200" cy="502920"/>
           </a:xfrm>
           <a:prstGeom prst="rect">
             <a:avLst/>
@@ -32675,7 +33186,7 @@
           <a:lstStyle/>
           <a:p>
             <a:pPr algn="l">
-              <a:defRPr sz="2800" b="1">
+              <a:defRPr sz="2600" b="1">
                 <a:solidFill>
                   <a:srgbClr val="2563EB"/>
                 </a:solidFill>
@@ -32683,7 +33194,7 @@
               </a:defRPr>
             </a:pPr>
             <a:r>
-              <a:t>Analyse Concurrentielle &amp; SWOT</a:t>
+              <a:t>Étude de Marché &amp; Analyse Concurrentielle</a:t>
             </a:r>
           </a:p>
         </p:txBody>
@@ -32696,8 +33207,8 @@
         </p:nvSpPr>
         <p:spPr>
           <a:xfrm>
-            <a:off x="731520" y="1005840"/>
-            <a:ext cx="4572000" cy="365760"/>
+            <a:off x="1463040" y="658368"/>
+            <a:ext cx="9601200" cy="320040"/>
           </a:xfrm>
           <a:prstGeom prst="rect">
             <a:avLst/>
@@ -32711,7 +33222,43 @@
           <a:lstStyle/>
           <a:p>
             <a:pPr algn="l">
-              <a:defRPr sz="1800" b="1">
+              <a:defRPr sz="1300" b="0">
+                <a:solidFill>
+                  <a:srgbClr val="94A3B8"/>
+                </a:solidFill>
+                <a:latin typeface="Calibri"/>
+              </a:defRPr>
+            </a:pPr>
+            <a:r>
+              <a:t>Benchmark du secteur e-santé et des soins à domicile au Maroc</a:t>
+            </a:r>
+          </a:p>
+        </p:txBody>
+      </p:sp>
+      <p:sp>
+        <p:nvSpPr>
+          <p:cNvPr id="7" name="TextBox 6"/>
+          <p:cNvSpPr txBox="1"/>
+          <p:nvPr/>
+        </p:nvSpPr>
+        <p:spPr>
+          <a:xfrm>
+            <a:off x="640080" y="1051560"/>
+            <a:ext cx="5303520" cy="320040"/>
+          </a:xfrm>
+          <a:prstGeom prst="rect">
+            <a:avLst/>
+          </a:prstGeom>
+          <a:noFill/>
+        </p:spPr>
+        <p:txBody>
+          <a:bodyPr wrap="square">
+            <a:spAutoFit/>
+          </a:bodyPr>
+          <a:lstStyle/>
+          <a:p>
+            <a:pPr algn="l">
+              <a:defRPr sz="1600" b="1">
                 <a:solidFill>
                   <a:srgbClr val="1E40AF"/>
                 </a:solidFill>
@@ -32719,110 +33266,7 @@
               </a:defRPr>
             </a:pPr>
             <a:r>
-              <a:t>Concurrents Identifiés</a:t>
-            </a:r>
-          </a:p>
-        </p:txBody>
-      </p:sp>
-      <p:sp>
-        <p:nvSpPr>
-          <p:cNvPr id="7" name="TextBox 6"/>
-          <p:cNvSpPr txBox="1"/>
-          <p:nvPr/>
-        </p:nvSpPr>
-        <p:spPr>
-          <a:xfrm>
-            <a:off x="731520" y="1463040"/>
-            <a:ext cx="5120640" cy="2011680"/>
-          </a:xfrm>
-          <a:prstGeom prst="rect">
-            <a:avLst/>
-          </a:prstGeom>
-          <a:noFill/>
-        </p:spPr>
-        <p:txBody>
-          <a:bodyPr wrap="square">
-            <a:spAutoFit/>
-          </a:bodyPr>
-          <a:lstStyle/>
-          <a:p>
-            <a:pPr>
-              <a:spcAft>
-                <a:spcPts val="600"/>
-              </a:spcAft>
-              <a:defRPr sz="1300">
-                <a:solidFill>
-                  <a:srgbClr val="1E293B"/>
-                </a:solidFill>
-                <a:latin typeface="Calibri"/>
-              </a:defRPr>
-              <a:buChar char="▸"/>
-              <a:buClr>
-                <a:srgbClr val="2563EB"/>
-              </a:buClr>
-            </a:pPr>
-            <a:r>
-              <a:t>SOS Médecins Maroc — Urgences médicales, pas de soins planifiés</a:t>
-            </a:r>
-          </a:p>
-          <a:p>
-            <a:pPr>
-              <a:spcAft>
-                <a:spcPts val="600"/>
-              </a:spcAft>
-              <a:defRPr sz="1300">
-                <a:solidFill>
-                  <a:srgbClr val="1E293B"/>
-                </a:solidFill>
-                <a:latin typeface="Calibri"/>
-              </a:defRPr>
-              <a:buChar char="▸"/>
-              <a:buClr>
-                <a:srgbClr val="2563EB"/>
-              </a:buClr>
-            </a:pPr>
-            <a:r>
-              <a:t>DabaDoc — Prise de RDV cabinet, pas de soins à domicile</a:t>
-            </a:r>
-          </a:p>
-          <a:p>
-            <a:pPr>
-              <a:spcAft>
-                <a:spcPts val="600"/>
-              </a:spcAft>
-              <a:defRPr sz="1300">
-                <a:solidFill>
-                  <a:srgbClr val="1E293B"/>
-                </a:solidFill>
-                <a:latin typeface="Calibri"/>
-              </a:defRPr>
-              <a:buChar char="▸"/>
-              <a:buClr>
-                <a:srgbClr val="2563EB"/>
-              </a:buClr>
-            </a:pPr>
-            <a:r>
-              <a:t>Infirmiers Freelance — Pas de plateforme, bouche-à-oreille</a:t>
-            </a:r>
-          </a:p>
-          <a:p>
-            <a:pPr>
-              <a:spcAft>
-                <a:spcPts val="600"/>
-              </a:spcAft>
-              <a:defRPr sz="1300">
-                <a:solidFill>
-                  <a:srgbClr val="1E293B"/>
-                </a:solidFill>
-                <a:latin typeface="Calibri"/>
-              </a:defRPr>
-              <a:buChar char="▸"/>
-              <a:buClr>
-                <a:srgbClr val="2563EB"/>
-              </a:buClr>
-            </a:pPr>
-            <a:r>
-              <a:t>Cliniques privées — Services à domicile limités, prix élevé</a:t>
+              <a:t>Cartographie des Acteurs Existants</a:t>
             </a:r>
           </a:p>
         </p:txBody>
@@ -32835,8 +33279,8 @@
         </p:nvSpPr>
         <p:spPr>
           <a:xfrm>
-            <a:off x="6400800" y="1005840"/>
-            <a:ext cx="2560320" cy="2194560"/>
+            <a:off x="640080" y="1417320"/>
+            <a:ext cx="5120640" cy="932688"/>
           </a:xfrm>
           <a:prstGeom prst="roundRect">
             <a:avLst/>
@@ -32844,9 +33288,9 @@
           <a:solidFill>
             <a:srgbClr val="FFFFFF"/>
           </a:solidFill>
-          <a:ln w="25400">
+          <a:ln w="19050">
             <a:solidFill>
-              <a:srgbClr val="10B981"/>
+              <a:srgbClr val="3B82F6"/>
             </a:solidFill>
           </a:ln>
         </p:spPr>
@@ -32880,30 +33324,30 @@
         </p:nvSpPr>
         <p:spPr>
           <a:xfrm>
-            <a:off x="6537960" y="1143000"/>
-            <a:ext cx="2286000" cy="320040"/>
-          </a:xfrm>
-          <a:prstGeom prst="rect">
-            <a:avLst/>
-          </a:prstGeom>
-          <a:noFill/>
-        </p:spPr>
-        <p:txBody>
-          <a:bodyPr wrap="square">
-            <a:spAutoFit/>
-          </a:bodyPr>
-          <a:lstStyle/>
-          <a:p>
-            <a:pPr algn="ctr">
-              <a:defRPr sz="1600" b="1">
-                <a:solidFill>
-                  <a:srgbClr val="10B981"/>
-                </a:solidFill>
-                <a:latin typeface="Calibri"/>
-              </a:defRPr>
-            </a:pPr>
-            <a:r>
-              <a:t>Forces</a:t>
+            <a:off x="777240" y="1490472"/>
+            <a:ext cx="4846320" cy="292608"/>
+          </a:xfrm>
+          <a:prstGeom prst="rect">
+            <a:avLst/>
+          </a:prstGeom>
+          <a:noFill/>
+        </p:spPr>
+        <p:txBody>
+          <a:bodyPr wrap="square">
+            <a:spAutoFit/>
+          </a:bodyPr>
+          <a:lstStyle/>
+          <a:p>
+            <a:pPr algn="l">
+              <a:defRPr sz="1300" b="1">
+                <a:solidFill>
+                  <a:srgbClr val="3B82F6"/>
+                </a:solidFill>
+                <a:latin typeface="Calibri"/>
+              </a:defRPr>
+            </a:pPr>
+            <a:r>
+              <a:t>DabaDoc / Plateformes RDV</a:t>
             </a:r>
           </a:p>
         </p:txBody>
@@ -32916,22 +33360,22 @@
         </p:nvSpPr>
         <p:spPr>
           <a:xfrm>
-            <a:off x="6537960" y="1600200"/>
-            <a:ext cx="2286000" cy="1371600"/>
-          </a:xfrm>
-          <a:prstGeom prst="rect">
-            <a:avLst/>
-          </a:prstGeom>
-          <a:noFill/>
-        </p:spPr>
-        <p:txBody>
-          <a:bodyPr wrap="square">
-            <a:spAutoFit/>
-          </a:bodyPr>
-          <a:lstStyle/>
-          <a:p>
-            <a:pPr algn="ctr">
-              <a:defRPr sz="1200" b="0">
+            <a:off x="777240" y="1764792"/>
+            <a:ext cx="4846320" cy="530352"/>
+          </a:xfrm>
+          <a:prstGeom prst="rect">
+            <a:avLst/>
+          </a:prstGeom>
+          <a:noFill/>
+        </p:spPr>
+        <p:txBody>
+          <a:bodyPr wrap="square">
+            <a:spAutoFit/>
+          </a:bodyPr>
+          <a:lstStyle/>
+          <a:p>
+            <a:pPr algn="l">
+              <a:defRPr sz="1050" b="0">
                 <a:solidFill>
                   <a:srgbClr val="1E293B"/>
                 </a:solidFill>
@@ -32939,11 +33383,7 @@
               </a:defRPr>
             </a:pPr>
             <a:r>
-              <a:t>Stack moderne, ERP intégré,</a:t>
-            </a:r>
-            <a:br/>
-            <a:r>
-              <a:t>UX soignée, code sécurisé</a:t>
+              <a:t>Prise de RDV cabinet uniquement · Aucun acte infirmier à domicile · Zéro suivi matériel/constantes.</a:t>
             </a:r>
           </a:p>
         </p:txBody>
@@ -32956,8 +33396,8 @@
         </p:nvSpPr>
         <p:spPr>
           <a:xfrm>
-            <a:off x="9235440" y="1005840"/>
-            <a:ext cx="2560320" cy="2194560"/>
+            <a:off x="640080" y="2441448"/>
+            <a:ext cx="5120640" cy="932688"/>
           </a:xfrm>
           <a:prstGeom prst="roundRect">
             <a:avLst/>
@@ -32965,7 +33405,7 @@
           <a:solidFill>
             <a:srgbClr val="FFFFFF"/>
           </a:solidFill>
-          <a:ln w="25400">
+          <a:ln w="19050">
             <a:solidFill>
               <a:srgbClr val="EF4444"/>
             </a:solidFill>
@@ -33001,22 +33441,22 @@
         </p:nvSpPr>
         <p:spPr>
           <a:xfrm>
-            <a:off x="9372600" y="1143000"/>
-            <a:ext cx="2286000" cy="320040"/>
-          </a:xfrm>
-          <a:prstGeom prst="rect">
-            <a:avLst/>
-          </a:prstGeom>
-          <a:noFill/>
-        </p:spPr>
-        <p:txBody>
-          <a:bodyPr wrap="square">
-            <a:spAutoFit/>
-          </a:bodyPr>
-          <a:lstStyle/>
-          <a:p>
-            <a:pPr algn="ctr">
-              <a:defRPr sz="1600" b="1">
+            <a:off x="777240" y="2514600"/>
+            <a:ext cx="4846320" cy="292608"/>
+          </a:xfrm>
+          <a:prstGeom prst="rect">
+            <a:avLst/>
+          </a:prstGeom>
+          <a:noFill/>
+        </p:spPr>
+        <p:txBody>
+          <a:bodyPr wrap="square">
+            <a:spAutoFit/>
+          </a:bodyPr>
+          <a:lstStyle/>
+          <a:p>
+            <a:pPr algn="l">
+              <a:defRPr sz="1300" b="1">
                 <a:solidFill>
                   <a:srgbClr val="EF4444"/>
                 </a:solidFill>
@@ -33024,7 +33464,7 @@
               </a:defRPr>
             </a:pPr>
             <a:r>
-              <a:t>Faiblesses</a:t>
+              <a:t>SOS Médecins / SAMU privé</a:t>
             </a:r>
           </a:p>
         </p:txBody>
@@ -33037,22 +33477,22 @@
         </p:nvSpPr>
         <p:spPr>
           <a:xfrm>
-            <a:off x="9372600" y="1600200"/>
-            <a:ext cx="2286000" cy="1371600"/>
-          </a:xfrm>
-          <a:prstGeom prst="rect">
-            <a:avLst/>
-          </a:prstGeom>
-          <a:noFill/>
-        </p:spPr>
-        <p:txBody>
-          <a:bodyPr wrap="square">
-            <a:spAutoFit/>
-          </a:bodyPr>
-          <a:lstStyle/>
-          <a:p>
-            <a:pPr algn="ctr">
-              <a:defRPr sz="1200" b="0">
+            <a:off x="777240" y="2788920"/>
+            <a:ext cx="4846320" cy="530352"/>
+          </a:xfrm>
+          <a:prstGeom prst="rect">
+            <a:avLst/>
+          </a:prstGeom>
+          <a:noFill/>
+        </p:spPr>
+        <p:txBody>
+          <a:bodyPr wrap="square">
+            <a:spAutoFit/>
+          </a:bodyPr>
+          <a:lstStyle/>
+          <a:p>
+            <a:pPr algn="l">
+              <a:defRPr sz="1050" b="0">
                 <a:solidFill>
                   <a:srgbClr val="1E293B"/>
                 </a:solidFill>
@@ -33060,11 +33500,7 @@
               </a:defRPr>
             </a:pPr>
             <a:r>
-              <a:t>Projet académique,</a:t>
-            </a:r>
-            <a:br/>
-            <a:r>
-              <a:t>pas encore déployé en prod</a:t>
+              <a:t>Focalisé sur l'urgence vitale ponctuelle · Tarifs très élevés (&gt;600 MAD) · Non adapté aux soins réguliers.</a:t>
             </a:r>
           </a:p>
         </p:txBody>
@@ -33077,8 +33513,8 @@
         </p:nvSpPr>
         <p:spPr>
           <a:xfrm>
-            <a:off x="6400800" y="3566160"/>
-            <a:ext cx="2560320" cy="2194560"/>
+            <a:off x="640080" y="3465576"/>
+            <a:ext cx="5120640" cy="932688"/>
           </a:xfrm>
           <a:prstGeom prst="roundRect">
             <a:avLst/>
@@ -33086,9 +33522,9 @@
           <a:solidFill>
             <a:srgbClr val="FFFFFF"/>
           </a:solidFill>
-          <a:ln w="25400">
+          <a:ln w="19050">
             <a:solidFill>
-              <a:srgbClr val="2563EB"/>
+              <a:srgbClr val="F59E0B"/>
             </a:solidFill>
           </a:ln>
         </p:spPr>
@@ -33122,30 +33558,30 @@
         </p:nvSpPr>
         <p:spPr>
           <a:xfrm>
-            <a:off x="6537960" y="3703320"/>
-            <a:ext cx="2286000" cy="320040"/>
-          </a:xfrm>
-          <a:prstGeom prst="rect">
-            <a:avLst/>
-          </a:prstGeom>
-          <a:noFill/>
-        </p:spPr>
-        <p:txBody>
-          <a:bodyPr wrap="square">
-            <a:spAutoFit/>
-          </a:bodyPr>
-          <a:lstStyle/>
-          <a:p>
-            <a:pPr algn="ctr">
-              <a:defRPr sz="1600" b="1">
-                <a:solidFill>
-                  <a:srgbClr val="2563EB"/>
-                </a:solidFill>
-                <a:latin typeface="Calibri"/>
-              </a:defRPr>
-            </a:pPr>
-            <a:r>
-              <a:t>Opportunités</a:t>
+            <a:off x="777240" y="3538728"/>
+            <a:ext cx="4846320" cy="292608"/>
+          </a:xfrm>
+          <a:prstGeom prst="rect">
+            <a:avLst/>
+          </a:prstGeom>
+          <a:noFill/>
+        </p:spPr>
+        <p:txBody>
+          <a:bodyPr wrap="square">
+            <a:spAutoFit/>
+          </a:bodyPr>
+          <a:lstStyle/>
+          <a:p>
+            <a:pPr algn="l">
+              <a:defRPr sz="1300" b="1">
+                <a:solidFill>
+                  <a:srgbClr val="F59E0B"/>
+                </a:solidFill>
+                <a:latin typeface="Calibri"/>
+              </a:defRPr>
+            </a:pPr>
+            <a:r>
+              <a:t>Infirmiers Libéraux (Informel)</a:t>
             </a:r>
           </a:p>
         </p:txBody>
@@ -33158,22 +33594,22 @@
         </p:nvSpPr>
         <p:spPr>
           <a:xfrm>
-            <a:off x="6537960" y="4160520"/>
-            <a:ext cx="2286000" cy="1371600"/>
-          </a:xfrm>
-          <a:prstGeom prst="rect">
-            <a:avLst/>
-          </a:prstGeom>
-          <a:noFill/>
-        </p:spPr>
-        <p:txBody>
-          <a:bodyPr wrap="square">
-            <a:spAutoFit/>
-          </a:bodyPr>
-          <a:lstStyle/>
-          <a:p>
-            <a:pPr algn="ctr">
-              <a:defRPr sz="1200" b="0">
+            <a:off x="777240" y="3813048"/>
+            <a:ext cx="4846320" cy="530352"/>
+          </a:xfrm>
+          <a:prstGeom prst="rect">
+            <a:avLst/>
+          </a:prstGeom>
+          <a:noFill/>
+        </p:spPr>
+        <p:txBody>
+          <a:bodyPr wrap="square">
+            <a:spAutoFit/>
+          </a:bodyPr>
+          <a:lstStyle/>
+          <a:p>
+            <a:pPr algn="l">
+              <a:defRPr sz="1050" b="0">
                 <a:solidFill>
                   <a:srgbClr val="1E293B"/>
                 </a:solidFill>
@@ -33181,11 +33617,7 @@
               </a:defRPr>
             </a:pPr>
             <a:r>
-              <a:t>Marché inexploité,</a:t>
-            </a:r>
-            <a:br/>
-            <a:r>
-              <a:t>AMO généralisée, digitalisation</a:t>
+              <a:t>Pratique par bouche-à-oreille · Aucune transparence tarifaire · Zéro traçabilité légale ni dossier patient.</a:t>
             </a:r>
           </a:p>
         </p:txBody>
@@ -33198,8 +33630,8 @@
         </p:nvSpPr>
         <p:spPr>
           <a:xfrm>
-            <a:off x="9235440" y="3566160"/>
-            <a:ext cx="2560320" cy="2194560"/>
+            <a:off x="640080" y="4489704"/>
+            <a:ext cx="5120640" cy="932688"/>
           </a:xfrm>
           <a:prstGeom prst="roundRect">
             <a:avLst/>
@@ -33207,9 +33639,9 @@
           <a:solidFill>
             <a:srgbClr val="FFFFFF"/>
           </a:solidFill>
-          <a:ln w="25400">
+          <a:ln w="19050">
             <a:solidFill>
-              <a:srgbClr val="F59E0B"/>
+              <a:srgbClr val="8B5CF6"/>
             </a:solidFill>
           </a:ln>
         </p:spPr>
@@ -33243,8 +33675,159 @@
         </p:nvSpPr>
         <p:spPr>
           <a:xfrm>
-            <a:off x="9372600" y="3703320"/>
-            <a:ext cx="2286000" cy="320040"/>
+            <a:off x="777240" y="4562856"/>
+            <a:ext cx="4846320" cy="292608"/>
+          </a:xfrm>
+          <a:prstGeom prst="rect">
+            <a:avLst/>
+          </a:prstGeom>
+          <a:noFill/>
+        </p:spPr>
+        <p:txBody>
+          <a:bodyPr wrap="square">
+            <a:spAutoFit/>
+          </a:bodyPr>
+          <a:lstStyle/>
+          <a:p>
+            <a:pPr algn="l">
+              <a:defRPr sz="1300" b="1">
+                <a:solidFill>
+                  <a:srgbClr val="8B5CF6"/>
+                </a:solidFill>
+                <a:latin typeface="Calibri"/>
+              </a:defRPr>
+            </a:pPr>
+            <a:r>
+              <a:t>Cliniques Privées</a:t>
+            </a:r>
+          </a:p>
+        </p:txBody>
+      </p:sp>
+      <p:sp>
+        <p:nvSpPr>
+          <p:cNvPr id="19" name="TextBox 18"/>
+          <p:cNvSpPr txBox="1"/>
+          <p:nvPr/>
+        </p:nvSpPr>
+        <p:spPr>
+          <a:xfrm>
+            <a:off x="777240" y="4837176"/>
+            <a:ext cx="4846320" cy="530352"/>
+          </a:xfrm>
+          <a:prstGeom prst="rect">
+            <a:avLst/>
+          </a:prstGeom>
+          <a:noFill/>
+        </p:spPr>
+        <p:txBody>
+          <a:bodyPr wrap="square">
+            <a:spAutoFit/>
+          </a:bodyPr>
+          <a:lstStyle/>
+          <a:p>
+            <a:pPr algn="l">
+              <a:defRPr sz="1050" b="0">
+                <a:solidFill>
+                  <a:srgbClr val="1E293B"/>
+                </a:solidFill>
+                <a:latin typeface="Calibri"/>
+              </a:defRPr>
+            </a:pPr>
+            <a:r>
+              <a:t>Offre à domicile marginale · Démarches administratives lourdes · Délais longs et tarification opaque.</a:t>
+            </a:r>
+          </a:p>
+        </p:txBody>
+      </p:sp>
+      <p:sp>
+        <p:nvSpPr>
+          <p:cNvPr id="20" name="TextBox 19"/>
+          <p:cNvSpPr txBox="1"/>
+          <p:nvPr/>
+        </p:nvSpPr>
+        <p:spPr>
+          <a:xfrm>
+            <a:off x="6035040" y="1051560"/>
+            <a:ext cx="5669280" cy="320040"/>
+          </a:xfrm>
+          <a:prstGeom prst="rect">
+            <a:avLst/>
+          </a:prstGeom>
+          <a:noFill/>
+        </p:spPr>
+        <p:txBody>
+          <a:bodyPr wrap="square">
+            <a:spAutoFit/>
+          </a:bodyPr>
+          <a:lstStyle/>
+          <a:p>
+            <a:pPr algn="l">
+              <a:defRPr sz="1600" b="1">
+                <a:solidFill>
+                  <a:srgbClr val="1E40AF"/>
+                </a:solidFill>
+                <a:latin typeface="Calibri"/>
+              </a:defRPr>
+            </a:pPr>
+            <a:r>
+              <a:t>Matrice Comparative des Solutions</a:t>
+            </a:r>
+          </a:p>
+        </p:txBody>
+      </p:sp>
+      <p:sp>
+        <p:nvSpPr>
+          <p:cNvPr id="21" name="Rectangle 20"/>
+          <p:cNvSpPr/>
+          <p:nvPr/>
+        </p:nvSpPr>
+        <p:spPr>
+          <a:xfrm>
+            <a:off x="6035040" y="1417320"/>
+            <a:ext cx="2103120" cy="329184"/>
+          </a:xfrm>
+          <a:prstGeom prst="rect">
+            <a:avLst/>
+          </a:prstGeom>
+          <a:solidFill>
+            <a:srgbClr val="2563EB"/>
+          </a:solidFill>
+          <a:ln>
+            <a:noFill/>
+          </a:ln>
+        </p:spPr>
+        <p:style>
+          <a:lnRef idx="1">
+            <a:schemeClr val="accent1"/>
+          </a:lnRef>
+          <a:fillRef idx="3">
+            <a:schemeClr val="accent1"/>
+          </a:fillRef>
+          <a:effectRef idx="2">
+            <a:schemeClr val="accent1"/>
+          </a:effectRef>
+          <a:fontRef idx="minor">
+            <a:schemeClr val="lt1"/>
+          </a:fontRef>
+        </p:style>
+        <p:txBody>
+          <a:bodyPr rtlCol="0" anchor="ctr"/>
+          <a:lstStyle/>
+          <a:p>
+            <a:pPr algn="ctr"/>
+          </a:p>
+        </p:txBody>
+      </p:sp>
+      <p:sp>
+        <p:nvSpPr>
+          <p:cNvPr id="22" name="TextBox 21"/>
+          <p:cNvSpPr txBox="1"/>
+          <p:nvPr/>
+        </p:nvSpPr>
+        <p:spPr>
+          <a:xfrm>
+            <a:off x="6053328" y="1453896"/>
+            <a:ext cx="2066544" cy="256032"/>
           </a:xfrm>
           <a:prstGeom prst="rect">
             <a:avLst/>
@@ -33258,7 +33841,647 @@
           <a:lstStyle/>
           <a:p>
             <a:pPr algn="ctr">
-              <a:defRPr sz="1600" b="1">
+              <a:defRPr sz="1000" b="1">
+                <a:solidFill>
+                  <a:srgbClr val="FFFFFF"/>
+                </a:solidFill>
+                <a:latin typeface="Calibri"/>
+              </a:defRPr>
+            </a:pPr>
+            <a:r>
+              <a:t>Critères Clés</a:t>
+            </a:r>
+          </a:p>
+        </p:txBody>
+      </p:sp>
+      <p:sp>
+        <p:nvSpPr>
+          <p:cNvPr id="23" name="Rectangle 22"/>
+          <p:cNvSpPr/>
+          <p:nvPr/>
+        </p:nvSpPr>
+        <p:spPr>
+          <a:xfrm>
+            <a:off x="8183879" y="1417320"/>
+            <a:ext cx="1005840" cy="329184"/>
+          </a:xfrm>
+          <a:prstGeom prst="rect">
+            <a:avLst/>
+          </a:prstGeom>
+          <a:solidFill>
+            <a:srgbClr val="10B981"/>
+          </a:solidFill>
+          <a:ln>
+            <a:noFill/>
+          </a:ln>
+        </p:spPr>
+        <p:style>
+          <a:lnRef idx="1">
+            <a:schemeClr val="accent1"/>
+          </a:lnRef>
+          <a:fillRef idx="3">
+            <a:schemeClr val="accent1"/>
+          </a:fillRef>
+          <a:effectRef idx="2">
+            <a:schemeClr val="accent1"/>
+          </a:effectRef>
+          <a:fontRef idx="minor">
+            <a:schemeClr val="lt1"/>
+          </a:fontRef>
+        </p:style>
+        <p:txBody>
+          <a:bodyPr rtlCol="0" anchor="ctr"/>
+          <a:lstStyle/>
+          <a:p>
+            <a:pPr algn="ctr"/>
+          </a:p>
+        </p:txBody>
+      </p:sp>
+      <p:sp>
+        <p:nvSpPr>
+          <p:cNvPr id="24" name="TextBox 23"/>
+          <p:cNvSpPr txBox="1"/>
+          <p:nvPr/>
+        </p:nvSpPr>
+        <p:spPr>
+          <a:xfrm>
+            <a:off x="8202167" y="1453896"/>
+            <a:ext cx="969264" cy="256032"/>
+          </a:xfrm>
+          <a:prstGeom prst="rect">
+            <a:avLst/>
+          </a:prstGeom>
+          <a:noFill/>
+        </p:spPr>
+        <p:txBody>
+          <a:bodyPr wrap="square">
+            <a:spAutoFit/>
+          </a:bodyPr>
+          <a:lstStyle/>
+          <a:p>
+            <a:pPr algn="ctr">
+              <a:defRPr sz="1000" b="1">
+                <a:solidFill>
+                  <a:srgbClr val="FFFFFF"/>
+                </a:solidFill>
+                <a:latin typeface="Calibri"/>
+              </a:defRPr>
+            </a:pPr>
+            <a:r>
+              <a:t>Dar-Soins</a:t>
+            </a:r>
+          </a:p>
+        </p:txBody>
+      </p:sp>
+      <p:sp>
+        <p:nvSpPr>
+          <p:cNvPr id="25" name="Rectangle 24"/>
+          <p:cNvSpPr/>
+          <p:nvPr/>
+        </p:nvSpPr>
+        <p:spPr>
+          <a:xfrm>
+            <a:off x="9235440" y="1417320"/>
+            <a:ext cx="822960" cy="329184"/>
+          </a:xfrm>
+          <a:prstGeom prst="rect">
+            <a:avLst/>
+          </a:prstGeom>
+          <a:solidFill>
+            <a:srgbClr val="2563EB"/>
+          </a:solidFill>
+          <a:ln>
+            <a:noFill/>
+          </a:ln>
+        </p:spPr>
+        <p:style>
+          <a:lnRef idx="1">
+            <a:schemeClr val="accent1"/>
+          </a:lnRef>
+          <a:fillRef idx="3">
+            <a:schemeClr val="accent1"/>
+          </a:fillRef>
+          <a:effectRef idx="2">
+            <a:schemeClr val="accent1"/>
+          </a:effectRef>
+          <a:fontRef idx="minor">
+            <a:schemeClr val="lt1"/>
+          </a:fontRef>
+        </p:style>
+        <p:txBody>
+          <a:bodyPr rtlCol="0" anchor="ctr"/>
+          <a:lstStyle/>
+          <a:p>
+            <a:pPr algn="ctr"/>
+          </a:p>
+        </p:txBody>
+      </p:sp>
+      <p:sp>
+        <p:nvSpPr>
+          <p:cNvPr id="26" name="TextBox 25"/>
+          <p:cNvSpPr txBox="1"/>
+          <p:nvPr/>
+        </p:nvSpPr>
+        <p:spPr>
+          <a:xfrm>
+            <a:off x="9253728" y="1453896"/>
+            <a:ext cx="786384" cy="256032"/>
+          </a:xfrm>
+          <a:prstGeom prst="rect">
+            <a:avLst/>
+          </a:prstGeom>
+          <a:noFill/>
+        </p:spPr>
+        <p:txBody>
+          <a:bodyPr wrap="square">
+            <a:spAutoFit/>
+          </a:bodyPr>
+          <a:lstStyle/>
+          <a:p>
+            <a:pPr algn="ctr">
+              <a:defRPr sz="1000" b="1">
+                <a:solidFill>
+                  <a:srgbClr val="FFFFFF"/>
+                </a:solidFill>
+                <a:latin typeface="Calibri"/>
+              </a:defRPr>
+            </a:pPr>
+            <a:r>
+              <a:t>DabaDoc</a:t>
+            </a:r>
+          </a:p>
+        </p:txBody>
+      </p:sp>
+      <p:sp>
+        <p:nvSpPr>
+          <p:cNvPr id="27" name="Rectangle 26"/>
+          <p:cNvSpPr/>
+          <p:nvPr/>
+        </p:nvSpPr>
+        <p:spPr>
+          <a:xfrm>
+            <a:off x="10104120" y="1417320"/>
+            <a:ext cx="822960" cy="329184"/>
+          </a:xfrm>
+          <a:prstGeom prst="rect">
+            <a:avLst/>
+          </a:prstGeom>
+          <a:solidFill>
+            <a:srgbClr val="2563EB"/>
+          </a:solidFill>
+          <a:ln>
+            <a:noFill/>
+          </a:ln>
+        </p:spPr>
+        <p:style>
+          <a:lnRef idx="1">
+            <a:schemeClr val="accent1"/>
+          </a:lnRef>
+          <a:fillRef idx="3">
+            <a:schemeClr val="accent1"/>
+          </a:fillRef>
+          <a:effectRef idx="2">
+            <a:schemeClr val="accent1"/>
+          </a:effectRef>
+          <a:fontRef idx="minor">
+            <a:schemeClr val="lt1"/>
+          </a:fontRef>
+        </p:style>
+        <p:txBody>
+          <a:bodyPr rtlCol="0" anchor="ctr"/>
+          <a:lstStyle/>
+          <a:p>
+            <a:pPr algn="ctr"/>
+          </a:p>
+        </p:txBody>
+      </p:sp>
+      <p:sp>
+        <p:nvSpPr>
+          <p:cNvPr id="28" name="TextBox 27"/>
+          <p:cNvSpPr txBox="1"/>
+          <p:nvPr/>
+        </p:nvSpPr>
+        <p:spPr>
+          <a:xfrm>
+            <a:off x="10122408" y="1453896"/>
+            <a:ext cx="786384" cy="256032"/>
+          </a:xfrm>
+          <a:prstGeom prst="rect">
+            <a:avLst/>
+          </a:prstGeom>
+          <a:noFill/>
+        </p:spPr>
+        <p:txBody>
+          <a:bodyPr wrap="square">
+            <a:spAutoFit/>
+          </a:bodyPr>
+          <a:lstStyle/>
+          <a:p>
+            <a:pPr algn="ctr">
+              <a:defRPr sz="1000" b="1">
+                <a:solidFill>
+                  <a:srgbClr val="FFFFFF"/>
+                </a:solidFill>
+                <a:latin typeface="Calibri"/>
+              </a:defRPr>
+            </a:pPr>
+            <a:r>
+              <a:t>SOS Méd.</a:t>
+            </a:r>
+          </a:p>
+        </p:txBody>
+      </p:sp>
+      <p:sp>
+        <p:nvSpPr>
+          <p:cNvPr id="29" name="Rectangle 28"/>
+          <p:cNvSpPr/>
+          <p:nvPr/>
+        </p:nvSpPr>
+        <p:spPr>
+          <a:xfrm>
+            <a:off x="10972800" y="1417320"/>
+            <a:ext cx="822960" cy="329184"/>
+          </a:xfrm>
+          <a:prstGeom prst="rect">
+            <a:avLst/>
+          </a:prstGeom>
+          <a:solidFill>
+            <a:srgbClr val="2563EB"/>
+          </a:solidFill>
+          <a:ln>
+            <a:noFill/>
+          </a:ln>
+        </p:spPr>
+        <p:style>
+          <a:lnRef idx="1">
+            <a:schemeClr val="accent1"/>
+          </a:lnRef>
+          <a:fillRef idx="3">
+            <a:schemeClr val="accent1"/>
+          </a:fillRef>
+          <a:effectRef idx="2">
+            <a:schemeClr val="accent1"/>
+          </a:effectRef>
+          <a:fontRef idx="minor">
+            <a:schemeClr val="lt1"/>
+          </a:fontRef>
+        </p:style>
+        <p:txBody>
+          <a:bodyPr rtlCol="0" anchor="ctr"/>
+          <a:lstStyle/>
+          <a:p>
+            <a:pPr algn="ctr"/>
+          </a:p>
+        </p:txBody>
+      </p:sp>
+      <p:sp>
+        <p:nvSpPr>
+          <p:cNvPr id="30" name="TextBox 29"/>
+          <p:cNvSpPr txBox="1"/>
+          <p:nvPr/>
+        </p:nvSpPr>
+        <p:spPr>
+          <a:xfrm>
+            <a:off x="10991088" y="1453896"/>
+            <a:ext cx="786384" cy="256032"/>
+          </a:xfrm>
+          <a:prstGeom prst="rect">
+            <a:avLst/>
+          </a:prstGeom>
+          <a:noFill/>
+        </p:spPr>
+        <p:txBody>
+          <a:bodyPr wrap="square">
+            <a:spAutoFit/>
+          </a:bodyPr>
+          <a:lstStyle/>
+          <a:p>
+            <a:pPr algn="ctr">
+              <a:defRPr sz="1000" b="1">
+                <a:solidFill>
+                  <a:srgbClr val="FFFFFF"/>
+                </a:solidFill>
+                <a:latin typeface="Calibri"/>
+              </a:defRPr>
+            </a:pPr>
+            <a:r>
+              <a:t>Freelance</a:t>
+            </a:r>
+          </a:p>
+        </p:txBody>
+      </p:sp>
+      <p:sp>
+        <p:nvSpPr>
+          <p:cNvPr id="31" name="Rectangle 30"/>
+          <p:cNvSpPr/>
+          <p:nvPr/>
+        </p:nvSpPr>
+        <p:spPr>
+          <a:xfrm>
+            <a:off x="6035040" y="1783080"/>
+            <a:ext cx="2103120" cy="365760"/>
+          </a:xfrm>
+          <a:prstGeom prst="rect">
+            <a:avLst/>
+          </a:prstGeom>
+          <a:solidFill>
+            <a:srgbClr val="FFFFFF"/>
+          </a:solidFill>
+          <a:ln w="12700">
+            <a:solidFill>
+              <a:srgbClr val="E2E8F0"/>
+            </a:solidFill>
+          </a:ln>
+        </p:spPr>
+        <p:style>
+          <a:lnRef idx="1">
+            <a:schemeClr val="accent1"/>
+          </a:lnRef>
+          <a:fillRef idx="3">
+            <a:schemeClr val="accent1"/>
+          </a:fillRef>
+          <a:effectRef idx="2">
+            <a:schemeClr val="accent1"/>
+          </a:effectRef>
+          <a:fontRef idx="minor">
+            <a:schemeClr val="lt1"/>
+          </a:fontRef>
+        </p:style>
+        <p:txBody>
+          <a:bodyPr rtlCol="0" anchor="ctr"/>
+          <a:lstStyle/>
+          <a:p>
+            <a:pPr algn="ctr"/>
+          </a:p>
+        </p:txBody>
+      </p:sp>
+      <p:sp>
+        <p:nvSpPr>
+          <p:cNvPr id="32" name="TextBox 31"/>
+          <p:cNvSpPr txBox="1"/>
+          <p:nvPr/>
+        </p:nvSpPr>
+        <p:spPr>
+          <a:xfrm>
+            <a:off x="6089904" y="1837944"/>
+            <a:ext cx="1993392" cy="274320"/>
+          </a:xfrm>
+          <a:prstGeom prst="rect">
+            <a:avLst/>
+          </a:prstGeom>
+          <a:noFill/>
+        </p:spPr>
+        <p:txBody>
+          <a:bodyPr wrap="square">
+            <a:spAutoFit/>
+          </a:bodyPr>
+          <a:lstStyle/>
+          <a:p>
+            <a:pPr algn="l">
+              <a:defRPr sz="950" b="1">
+                <a:solidFill>
+                  <a:srgbClr val="1E293B"/>
+                </a:solidFill>
+                <a:latin typeface="Calibri"/>
+              </a:defRPr>
+            </a:pPr>
+            <a:r>
+              <a:t>Soins infirmiers à domicile</a:t>
+            </a:r>
+          </a:p>
+        </p:txBody>
+      </p:sp>
+      <p:sp>
+        <p:nvSpPr>
+          <p:cNvPr id="33" name="Rectangle 32"/>
+          <p:cNvSpPr/>
+          <p:nvPr/>
+        </p:nvSpPr>
+        <p:spPr>
+          <a:xfrm>
+            <a:off x="8183879" y="1783080"/>
+            <a:ext cx="1005840" cy="365760"/>
+          </a:xfrm>
+          <a:prstGeom prst="rect">
+            <a:avLst/>
+          </a:prstGeom>
+          <a:solidFill>
+            <a:srgbClr val="FFFFFF"/>
+          </a:solidFill>
+          <a:ln w="12700">
+            <a:solidFill>
+              <a:srgbClr val="E2E8F0"/>
+            </a:solidFill>
+          </a:ln>
+        </p:spPr>
+        <p:style>
+          <a:lnRef idx="1">
+            <a:schemeClr val="accent1"/>
+          </a:lnRef>
+          <a:fillRef idx="3">
+            <a:schemeClr val="accent1"/>
+          </a:fillRef>
+          <a:effectRef idx="2">
+            <a:schemeClr val="accent1"/>
+          </a:effectRef>
+          <a:fontRef idx="minor">
+            <a:schemeClr val="lt1"/>
+          </a:fontRef>
+        </p:style>
+        <p:txBody>
+          <a:bodyPr rtlCol="0" anchor="ctr"/>
+          <a:lstStyle/>
+          <a:p>
+            <a:pPr algn="ctr"/>
+          </a:p>
+        </p:txBody>
+      </p:sp>
+      <p:sp>
+        <p:nvSpPr>
+          <p:cNvPr id="34" name="TextBox 33"/>
+          <p:cNvSpPr txBox="1"/>
+          <p:nvPr/>
+        </p:nvSpPr>
+        <p:spPr>
+          <a:xfrm>
+            <a:off x="8238743" y="1837944"/>
+            <a:ext cx="896112" cy="274320"/>
+          </a:xfrm>
+          <a:prstGeom prst="rect">
+            <a:avLst/>
+          </a:prstGeom>
+          <a:noFill/>
+        </p:spPr>
+        <p:txBody>
+          <a:bodyPr wrap="square">
+            <a:spAutoFit/>
+          </a:bodyPr>
+          <a:lstStyle/>
+          <a:p>
+            <a:pPr algn="ctr">
+              <a:defRPr sz="950" b="1">
+                <a:solidFill>
+                  <a:srgbClr val="059669"/>
+                </a:solidFill>
+                <a:latin typeface="Calibri"/>
+              </a:defRPr>
+            </a:pPr>
+            <a:r>
+              <a:t>OUI</a:t>
+            </a:r>
+          </a:p>
+        </p:txBody>
+      </p:sp>
+      <p:sp>
+        <p:nvSpPr>
+          <p:cNvPr id="35" name="Rectangle 34"/>
+          <p:cNvSpPr/>
+          <p:nvPr/>
+        </p:nvSpPr>
+        <p:spPr>
+          <a:xfrm>
+            <a:off x="9235440" y="1783080"/>
+            <a:ext cx="822960" cy="365760"/>
+          </a:xfrm>
+          <a:prstGeom prst="rect">
+            <a:avLst/>
+          </a:prstGeom>
+          <a:solidFill>
+            <a:srgbClr val="FFFFFF"/>
+          </a:solidFill>
+          <a:ln w="12700">
+            <a:solidFill>
+              <a:srgbClr val="E2E8F0"/>
+            </a:solidFill>
+          </a:ln>
+        </p:spPr>
+        <p:style>
+          <a:lnRef idx="1">
+            <a:schemeClr val="accent1"/>
+          </a:lnRef>
+          <a:fillRef idx="3">
+            <a:schemeClr val="accent1"/>
+          </a:fillRef>
+          <a:effectRef idx="2">
+            <a:schemeClr val="accent1"/>
+          </a:effectRef>
+          <a:fontRef idx="minor">
+            <a:schemeClr val="lt1"/>
+          </a:fontRef>
+        </p:style>
+        <p:txBody>
+          <a:bodyPr rtlCol="0" anchor="ctr"/>
+          <a:lstStyle/>
+          <a:p>
+            <a:pPr algn="ctr"/>
+          </a:p>
+        </p:txBody>
+      </p:sp>
+      <p:sp>
+        <p:nvSpPr>
+          <p:cNvPr id="36" name="TextBox 35"/>
+          <p:cNvSpPr txBox="1"/>
+          <p:nvPr/>
+        </p:nvSpPr>
+        <p:spPr>
+          <a:xfrm>
+            <a:off x="9290304" y="1837944"/>
+            <a:ext cx="713232" cy="274320"/>
+          </a:xfrm>
+          <a:prstGeom prst="rect">
+            <a:avLst/>
+          </a:prstGeom>
+          <a:noFill/>
+        </p:spPr>
+        <p:txBody>
+          <a:bodyPr wrap="square">
+            <a:spAutoFit/>
+          </a:bodyPr>
+          <a:lstStyle/>
+          <a:p>
+            <a:pPr algn="ctr">
+              <a:defRPr sz="950" b="0">
+                <a:solidFill>
+                  <a:srgbClr val="EF4444"/>
+                </a:solidFill>
+                <a:latin typeface="Calibri"/>
+              </a:defRPr>
+            </a:pPr>
+            <a:r>
+              <a:t>NON</a:t>
+            </a:r>
+          </a:p>
+        </p:txBody>
+      </p:sp>
+      <p:sp>
+        <p:nvSpPr>
+          <p:cNvPr id="37" name="Rectangle 36"/>
+          <p:cNvSpPr/>
+          <p:nvPr/>
+        </p:nvSpPr>
+        <p:spPr>
+          <a:xfrm>
+            <a:off x="10104120" y="1783080"/>
+            <a:ext cx="822960" cy="365760"/>
+          </a:xfrm>
+          <a:prstGeom prst="rect">
+            <a:avLst/>
+          </a:prstGeom>
+          <a:solidFill>
+            <a:srgbClr val="FFFFFF"/>
+          </a:solidFill>
+          <a:ln w="12700">
+            <a:solidFill>
+              <a:srgbClr val="E2E8F0"/>
+            </a:solidFill>
+          </a:ln>
+        </p:spPr>
+        <p:style>
+          <a:lnRef idx="1">
+            <a:schemeClr val="accent1"/>
+          </a:lnRef>
+          <a:fillRef idx="3">
+            <a:schemeClr val="accent1"/>
+          </a:fillRef>
+          <a:effectRef idx="2">
+            <a:schemeClr val="accent1"/>
+          </a:effectRef>
+          <a:fontRef idx="minor">
+            <a:schemeClr val="lt1"/>
+          </a:fontRef>
+        </p:style>
+        <p:txBody>
+          <a:bodyPr rtlCol="0" anchor="ctr"/>
+          <a:lstStyle/>
+          <a:p>
+            <a:pPr algn="ctr"/>
+          </a:p>
+        </p:txBody>
+      </p:sp>
+      <p:sp>
+        <p:nvSpPr>
+          <p:cNvPr id="38" name="TextBox 37"/>
+          <p:cNvSpPr txBox="1"/>
+          <p:nvPr/>
+        </p:nvSpPr>
+        <p:spPr>
+          <a:xfrm>
+            <a:off x="10158984" y="1837944"/>
+            <a:ext cx="713232" cy="274320"/>
+          </a:xfrm>
+          <a:prstGeom prst="rect">
+            <a:avLst/>
+          </a:prstGeom>
+          <a:noFill/>
+        </p:spPr>
+        <p:txBody>
+          <a:bodyPr wrap="square">
+            <a:spAutoFit/>
+          </a:bodyPr>
+          <a:lstStyle/>
+          <a:p>
+            <a:pPr algn="ctr">
+              <a:defRPr sz="950" b="0">
                 <a:solidFill>
                   <a:srgbClr val="F59E0B"/>
                 </a:solidFill>
@@ -33266,21 +34489,66 @@
               </a:defRPr>
             </a:pPr>
             <a:r>
-              <a:t>Menaces</a:t>
-            </a:r>
-          </a:p>
-        </p:txBody>
-      </p:sp>
-      <p:sp>
-        <p:nvSpPr>
-          <p:cNvPr id="19" name="TextBox 18"/>
-          <p:cNvSpPr txBox="1"/>
-          <p:nvPr/>
-        </p:nvSpPr>
-        <p:spPr>
-          <a:xfrm>
-            <a:off x="9372600" y="4160520"/>
-            <a:ext cx="2286000" cy="1371600"/>
+              <a:t>Partiel</a:t>
+            </a:r>
+          </a:p>
+        </p:txBody>
+      </p:sp>
+      <p:sp>
+        <p:nvSpPr>
+          <p:cNvPr id="39" name="Rectangle 38"/>
+          <p:cNvSpPr/>
+          <p:nvPr/>
+        </p:nvSpPr>
+        <p:spPr>
+          <a:xfrm>
+            <a:off x="10972800" y="1783080"/>
+            <a:ext cx="822960" cy="365760"/>
+          </a:xfrm>
+          <a:prstGeom prst="rect">
+            <a:avLst/>
+          </a:prstGeom>
+          <a:solidFill>
+            <a:srgbClr val="FFFFFF"/>
+          </a:solidFill>
+          <a:ln w="12700">
+            <a:solidFill>
+              <a:srgbClr val="E2E8F0"/>
+            </a:solidFill>
+          </a:ln>
+        </p:spPr>
+        <p:style>
+          <a:lnRef idx="1">
+            <a:schemeClr val="accent1"/>
+          </a:lnRef>
+          <a:fillRef idx="3">
+            <a:schemeClr val="accent1"/>
+          </a:fillRef>
+          <a:effectRef idx="2">
+            <a:schemeClr val="accent1"/>
+          </a:effectRef>
+          <a:fontRef idx="minor">
+            <a:schemeClr val="lt1"/>
+          </a:fontRef>
+        </p:style>
+        <p:txBody>
+          <a:bodyPr rtlCol="0" anchor="ctr"/>
+          <a:lstStyle/>
+          <a:p>
+            <a:pPr algn="ctr"/>
+          </a:p>
+        </p:txBody>
+      </p:sp>
+      <p:sp>
+        <p:nvSpPr>
+          <p:cNvPr id="40" name="TextBox 39"/>
+          <p:cNvSpPr txBox="1"/>
+          <p:nvPr/>
+        </p:nvSpPr>
+        <p:spPr>
+          <a:xfrm>
+            <a:off x="11027664" y="1837944"/>
+            <a:ext cx="713232" cy="274320"/>
           </a:xfrm>
           <a:prstGeom prst="rect">
             <a:avLst/>
@@ -33294,7 +34562,88 @@
           <a:lstStyle/>
           <a:p>
             <a:pPr algn="ctr">
-              <a:defRPr sz="1200" b="0">
+              <a:defRPr sz="950" b="0">
+                <a:solidFill>
+                  <a:srgbClr val="10B981"/>
+                </a:solidFill>
+                <a:latin typeface="Calibri"/>
+              </a:defRPr>
+            </a:pPr>
+            <a:r>
+              <a:t>OUI</a:t>
+            </a:r>
+          </a:p>
+        </p:txBody>
+      </p:sp>
+      <p:sp>
+        <p:nvSpPr>
+          <p:cNvPr id="41" name="Rectangle 40"/>
+          <p:cNvSpPr/>
+          <p:nvPr/>
+        </p:nvSpPr>
+        <p:spPr>
+          <a:xfrm>
+            <a:off x="6035040" y="2185416"/>
+            <a:ext cx="2103120" cy="365760"/>
+          </a:xfrm>
+          <a:prstGeom prst="rect">
+            <a:avLst/>
+          </a:prstGeom>
+          <a:solidFill>
+            <a:srgbClr val="F8FAFC"/>
+          </a:solidFill>
+          <a:ln w="12700">
+            <a:solidFill>
+              <a:srgbClr val="E2E8F0"/>
+            </a:solidFill>
+          </a:ln>
+        </p:spPr>
+        <p:style>
+          <a:lnRef idx="1">
+            <a:schemeClr val="accent1"/>
+          </a:lnRef>
+          <a:fillRef idx="3">
+            <a:schemeClr val="accent1"/>
+          </a:fillRef>
+          <a:effectRef idx="2">
+            <a:schemeClr val="accent1"/>
+          </a:effectRef>
+          <a:fontRef idx="minor">
+            <a:schemeClr val="lt1"/>
+          </a:fontRef>
+        </p:style>
+        <p:txBody>
+          <a:bodyPr rtlCol="0" anchor="ctr"/>
+          <a:lstStyle/>
+          <a:p>
+            <a:pPr algn="ctr"/>
+          </a:p>
+        </p:txBody>
+      </p:sp>
+      <p:sp>
+        <p:nvSpPr>
+          <p:cNvPr id="42" name="TextBox 41"/>
+          <p:cNvSpPr txBox="1"/>
+          <p:nvPr/>
+        </p:nvSpPr>
+        <p:spPr>
+          <a:xfrm>
+            <a:off x="6089904" y="2240280"/>
+            <a:ext cx="1993392" cy="274320"/>
+          </a:xfrm>
+          <a:prstGeom prst="rect">
+            <a:avLst/>
+          </a:prstGeom>
+          <a:noFill/>
+        </p:spPr>
+        <p:txBody>
+          <a:bodyPr wrap="square">
+            <a:spAutoFit/>
+          </a:bodyPr>
+          <a:lstStyle/>
+          <a:p>
+            <a:pPr algn="l">
+              <a:defRPr sz="950" b="1">
                 <a:solidFill>
                   <a:srgbClr val="1E293B"/>
                 </a:solidFill>
@@ -33302,18 +34651,2075 @@
               </a:defRPr>
             </a:pPr>
             <a:r>
-              <a:t>Nouveaux entrants,</a:t>
-            </a:r>
-            <a:br/>
-            <a:r>
-              <a:t>résistance au changement</a:t>
-            </a:r>
-          </a:p>
-        </p:txBody>
-      </p:sp>
-      <p:sp>
-        <p:nvSpPr>
-          <p:cNvPr id="20" name="TextBox 19"/>
+              <a:t>Dispatch &amp; Géolocalisation</a:t>
+            </a:r>
+          </a:p>
+        </p:txBody>
+      </p:sp>
+      <p:sp>
+        <p:nvSpPr>
+          <p:cNvPr id="43" name="Rectangle 42"/>
+          <p:cNvSpPr/>
+          <p:nvPr/>
+        </p:nvSpPr>
+        <p:spPr>
+          <a:xfrm>
+            <a:off x="8183879" y="2185416"/>
+            <a:ext cx="1005840" cy="365760"/>
+          </a:xfrm>
+          <a:prstGeom prst="rect">
+            <a:avLst/>
+          </a:prstGeom>
+          <a:solidFill>
+            <a:srgbClr val="F8FAFC"/>
+          </a:solidFill>
+          <a:ln w="12700">
+            <a:solidFill>
+              <a:srgbClr val="E2E8F0"/>
+            </a:solidFill>
+          </a:ln>
+        </p:spPr>
+        <p:style>
+          <a:lnRef idx="1">
+            <a:schemeClr val="accent1"/>
+          </a:lnRef>
+          <a:fillRef idx="3">
+            <a:schemeClr val="accent1"/>
+          </a:fillRef>
+          <a:effectRef idx="2">
+            <a:schemeClr val="accent1"/>
+          </a:effectRef>
+          <a:fontRef idx="minor">
+            <a:schemeClr val="lt1"/>
+          </a:fontRef>
+        </p:style>
+        <p:txBody>
+          <a:bodyPr rtlCol="0" anchor="ctr"/>
+          <a:lstStyle/>
+          <a:p>
+            <a:pPr algn="ctr"/>
+          </a:p>
+        </p:txBody>
+      </p:sp>
+      <p:sp>
+        <p:nvSpPr>
+          <p:cNvPr id="44" name="TextBox 43"/>
+          <p:cNvSpPr txBox="1"/>
+          <p:nvPr/>
+        </p:nvSpPr>
+        <p:spPr>
+          <a:xfrm>
+            <a:off x="8238743" y="2240280"/>
+            <a:ext cx="896112" cy="274320"/>
+          </a:xfrm>
+          <a:prstGeom prst="rect">
+            <a:avLst/>
+          </a:prstGeom>
+          <a:noFill/>
+        </p:spPr>
+        <p:txBody>
+          <a:bodyPr wrap="square">
+            <a:spAutoFit/>
+          </a:bodyPr>
+          <a:lstStyle/>
+          <a:p>
+            <a:pPr algn="ctr">
+              <a:defRPr sz="950" b="1">
+                <a:solidFill>
+                  <a:srgbClr val="059669"/>
+                </a:solidFill>
+                <a:latin typeface="Calibri"/>
+              </a:defRPr>
+            </a:pPr>
+            <a:r>
+              <a:t>OUI</a:t>
+            </a:r>
+          </a:p>
+        </p:txBody>
+      </p:sp>
+      <p:sp>
+        <p:nvSpPr>
+          <p:cNvPr id="45" name="Rectangle 44"/>
+          <p:cNvSpPr/>
+          <p:nvPr/>
+        </p:nvSpPr>
+        <p:spPr>
+          <a:xfrm>
+            <a:off x="9235440" y="2185416"/>
+            <a:ext cx="822960" cy="365760"/>
+          </a:xfrm>
+          <a:prstGeom prst="rect">
+            <a:avLst/>
+          </a:prstGeom>
+          <a:solidFill>
+            <a:srgbClr val="F8FAFC"/>
+          </a:solidFill>
+          <a:ln w="12700">
+            <a:solidFill>
+              <a:srgbClr val="E2E8F0"/>
+            </a:solidFill>
+          </a:ln>
+        </p:spPr>
+        <p:style>
+          <a:lnRef idx="1">
+            <a:schemeClr val="accent1"/>
+          </a:lnRef>
+          <a:fillRef idx="3">
+            <a:schemeClr val="accent1"/>
+          </a:fillRef>
+          <a:effectRef idx="2">
+            <a:schemeClr val="accent1"/>
+          </a:effectRef>
+          <a:fontRef idx="minor">
+            <a:schemeClr val="lt1"/>
+          </a:fontRef>
+        </p:style>
+        <p:txBody>
+          <a:bodyPr rtlCol="0" anchor="ctr"/>
+          <a:lstStyle/>
+          <a:p>
+            <a:pPr algn="ctr"/>
+          </a:p>
+        </p:txBody>
+      </p:sp>
+      <p:sp>
+        <p:nvSpPr>
+          <p:cNvPr id="46" name="TextBox 45"/>
+          <p:cNvSpPr txBox="1"/>
+          <p:nvPr/>
+        </p:nvSpPr>
+        <p:spPr>
+          <a:xfrm>
+            <a:off x="9290304" y="2240280"/>
+            <a:ext cx="713232" cy="274320"/>
+          </a:xfrm>
+          <a:prstGeom prst="rect">
+            <a:avLst/>
+          </a:prstGeom>
+          <a:noFill/>
+        </p:spPr>
+        <p:txBody>
+          <a:bodyPr wrap="square">
+            <a:spAutoFit/>
+          </a:bodyPr>
+          <a:lstStyle/>
+          <a:p>
+            <a:pPr algn="ctr">
+              <a:defRPr sz="950" b="0">
+                <a:solidFill>
+                  <a:srgbClr val="EF4444"/>
+                </a:solidFill>
+                <a:latin typeface="Calibri"/>
+              </a:defRPr>
+            </a:pPr>
+            <a:r>
+              <a:t>NON</a:t>
+            </a:r>
+          </a:p>
+        </p:txBody>
+      </p:sp>
+      <p:sp>
+        <p:nvSpPr>
+          <p:cNvPr id="47" name="Rectangle 46"/>
+          <p:cNvSpPr/>
+          <p:nvPr/>
+        </p:nvSpPr>
+        <p:spPr>
+          <a:xfrm>
+            <a:off x="10104120" y="2185416"/>
+            <a:ext cx="822960" cy="365760"/>
+          </a:xfrm>
+          <a:prstGeom prst="rect">
+            <a:avLst/>
+          </a:prstGeom>
+          <a:solidFill>
+            <a:srgbClr val="F8FAFC"/>
+          </a:solidFill>
+          <a:ln w="12700">
+            <a:solidFill>
+              <a:srgbClr val="E2E8F0"/>
+            </a:solidFill>
+          </a:ln>
+        </p:spPr>
+        <p:style>
+          <a:lnRef idx="1">
+            <a:schemeClr val="accent1"/>
+          </a:lnRef>
+          <a:fillRef idx="3">
+            <a:schemeClr val="accent1"/>
+          </a:fillRef>
+          <a:effectRef idx="2">
+            <a:schemeClr val="accent1"/>
+          </a:effectRef>
+          <a:fontRef idx="minor">
+            <a:schemeClr val="lt1"/>
+          </a:fontRef>
+        </p:style>
+        <p:txBody>
+          <a:bodyPr rtlCol="0" anchor="ctr"/>
+          <a:lstStyle/>
+          <a:p>
+            <a:pPr algn="ctr"/>
+          </a:p>
+        </p:txBody>
+      </p:sp>
+      <p:sp>
+        <p:nvSpPr>
+          <p:cNvPr id="48" name="TextBox 47"/>
+          <p:cNvSpPr txBox="1"/>
+          <p:nvPr/>
+        </p:nvSpPr>
+        <p:spPr>
+          <a:xfrm>
+            <a:off x="10158984" y="2240280"/>
+            <a:ext cx="713232" cy="274320"/>
+          </a:xfrm>
+          <a:prstGeom prst="rect">
+            <a:avLst/>
+          </a:prstGeom>
+          <a:noFill/>
+        </p:spPr>
+        <p:txBody>
+          <a:bodyPr wrap="square">
+            <a:spAutoFit/>
+          </a:bodyPr>
+          <a:lstStyle/>
+          <a:p>
+            <a:pPr algn="ctr">
+              <a:defRPr sz="950" b="0">
+                <a:solidFill>
+                  <a:srgbClr val="F59E0B"/>
+                </a:solidFill>
+                <a:latin typeface="Calibri"/>
+              </a:defRPr>
+            </a:pPr>
+            <a:r>
+              <a:t>Partiel</a:t>
+            </a:r>
+          </a:p>
+        </p:txBody>
+      </p:sp>
+      <p:sp>
+        <p:nvSpPr>
+          <p:cNvPr id="49" name="Rectangle 48"/>
+          <p:cNvSpPr/>
+          <p:nvPr/>
+        </p:nvSpPr>
+        <p:spPr>
+          <a:xfrm>
+            <a:off x="10972800" y="2185416"/>
+            <a:ext cx="822960" cy="365760"/>
+          </a:xfrm>
+          <a:prstGeom prst="rect">
+            <a:avLst/>
+          </a:prstGeom>
+          <a:solidFill>
+            <a:srgbClr val="F8FAFC"/>
+          </a:solidFill>
+          <a:ln w="12700">
+            <a:solidFill>
+              <a:srgbClr val="E2E8F0"/>
+            </a:solidFill>
+          </a:ln>
+        </p:spPr>
+        <p:style>
+          <a:lnRef idx="1">
+            <a:schemeClr val="accent1"/>
+          </a:lnRef>
+          <a:fillRef idx="3">
+            <a:schemeClr val="accent1"/>
+          </a:fillRef>
+          <a:effectRef idx="2">
+            <a:schemeClr val="accent1"/>
+          </a:effectRef>
+          <a:fontRef idx="minor">
+            <a:schemeClr val="lt1"/>
+          </a:fontRef>
+        </p:style>
+        <p:txBody>
+          <a:bodyPr rtlCol="0" anchor="ctr"/>
+          <a:lstStyle/>
+          <a:p>
+            <a:pPr algn="ctr"/>
+          </a:p>
+        </p:txBody>
+      </p:sp>
+      <p:sp>
+        <p:nvSpPr>
+          <p:cNvPr id="50" name="TextBox 49"/>
+          <p:cNvSpPr txBox="1"/>
+          <p:nvPr/>
+        </p:nvSpPr>
+        <p:spPr>
+          <a:xfrm>
+            <a:off x="11027664" y="2240280"/>
+            <a:ext cx="713232" cy="274320"/>
+          </a:xfrm>
+          <a:prstGeom prst="rect">
+            <a:avLst/>
+          </a:prstGeom>
+          <a:noFill/>
+        </p:spPr>
+        <p:txBody>
+          <a:bodyPr wrap="square">
+            <a:spAutoFit/>
+          </a:bodyPr>
+          <a:lstStyle/>
+          <a:p>
+            <a:pPr algn="ctr">
+              <a:defRPr sz="950" b="0">
+                <a:solidFill>
+                  <a:srgbClr val="EF4444"/>
+                </a:solidFill>
+                <a:latin typeface="Calibri"/>
+              </a:defRPr>
+            </a:pPr>
+            <a:r>
+              <a:t>NON</a:t>
+            </a:r>
+          </a:p>
+        </p:txBody>
+      </p:sp>
+      <p:sp>
+        <p:nvSpPr>
+          <p:cNvPr id="51" name="Rectangle 50"/>
+          <p:cNvSpPr/>
+          <p:nvPr/>
+        </p:nvSpPr>
+        <p:spPr>
+          <a:xfrm>
+            <a:off x="6035040" y="2587752"/>
+            <a:ext cx="2103120" cy="365760"/>
+          </a:xfrm>
+          <a:prstGeom prst="rect">
+            <a:avLst/>
+          </a:prstGeom>
+          <a:solidFill>
+            <a:srgbClr val="FFFFFF"/>
+          </a:solidFill>
+          <a:ln w="12700">
+            <a:solidFill>
+              <a:srgbClr val="E2E8F0"/>
+            </a:solidFill>
+          </a:ln>
+        </p:spPr>
+        <p:style>
+          <a:lnRef idx="1">
+            <a:schemeClr val="accent1"/>
+          </a:lnRef>
+          <a:fillRef idx="3">
+            <a:schemeClr val="accent1"/>
+          </a:fillRef>
+          <a:effectRef idx="2">
+            <a:schemeClr val="accent1"/>
+          </a:effectRef>
+          <a:fontRef idx="minor">
+            <a:schemeClr val="lt1"/>
+          </a:fontRef>
+        </p:style>
+        <p:txBody>
+          <a:bodyPr rtlCol="0" anchor="ctr"/>
+          <a:lstStyle/>
+          <a:p>
+            <a:pPr algn="ctr"/>
+          </a:p>
+        </p:txBody>
+      </p:sp>
+      <p:sp>
+        <p:nvSpPr>
+          <p:cNvPr id="52" name="TextBox 51"/>
+          <p:cNvSpPr txBox="1"/>
+          <p:nvPr/>
+        </p:nvSpPr>
+        <p:spPr>
+          <a:xfrm>
+            <a:off x="6089904" y="2642616"/>
+            <a:ext cx="1993392" cy="274320"/>
+          </a:xfrm>
+          <a:prstGeom prst="rect">
+            <a:avLst/>
+          </a:prstGeom>
+          <a:noFill/>
+        </p:spPr>
+        <p:txBody>
+          <a:bodyPr wrap="square">
+            <a:spAutoFit/>
+          </a:bodyPr>
+          <a:lstStyle/>
+          <a:p>
+            <a:pPr algn="l">
+              <a:defRPr sz="950" b="1">
+                <a:solidFill>
+                  <a:srgbClr val="1E293B"/>
+                </a:solidFill>
+                <a:latin typeface="Calibri"/>
+              </a:defRPr>
+            </a:pPr>
+            <a:r>
+              <a:t>Devis &amp; Facturation auto</a:t>
+            </a:r>
+          </a:p>
+        </p:txBody>
+      </p:sp>
+      <p:sp>
+        <p:nvSpPr>
+          <p:cNvPr id="53" name="Rectangle 52"/>
+          <p:cNvSpPr/>
+          <p:nvPr/>
+        </p:nvSpPr>
+        <p:spPr>
+          <a:xfrm>
+            <a:off x="8183879" y="2587752"/>
+            <a:ext cx="1005840" cy="365760"/>
+          </a:xfrm>
+          <a:prstGeom prst="rect">
+            <a:avLst/>
+          </a:prstGeom>
+          <a:solidFill>
+            <a:srgbClr val="FFFFFF"/>
+          </a:solidFill>
+          <a:ln w="12700">
+            <a:solidFill>
+              <a:srgbClr val="E2E8F0"/>
+            </a:solidFill>
+          </a:ln>
+        </p:spPr>
+        <p:style>
+          <a:lnRef idx="1">
+            <a:schemeClr val="accent1"/>
+          </a:lnRef>
+          <a:fillRef idx="3">
+            <a:schemeClr val="accent1"/>
+          </a:fillRef>
+          <a:effectRef idx="2">
+            <a:schemeClr val="accent1"/>
+          </a:effectRef>
+          <a:fontRef idx="minor">
+            <a:schemeClr val="lt1"/>
+          </a:fontRef>
+        </p:style>
+        <p:txBody>
+          <a:bodyPr rtlCol="0" anchor="ctr"/>
+          <a:lstStyle/>
+          <a:p>
+            <a:pPr algn="ctr"/>
+          </a:p>
+        </p:txBody>
+      </p:sp>
+      <p:sp>
+        <p:nvSpPr>
+          <p:cNvPr id="54" name="TextBox 53"/>
+          <p:cNvSpPr txBox="1"/>
+          <p:nvPr/>
+        </p:nvSpPr>
+        <p:spPr>
+          <a:xfrm>
+            <a:off x="8238743" y="2642616"/>
+            <a:ext cx="896112" cy="274320"/>
+          </a:xfrm>
+          <a:prstGeom prst="rect">
+            <a:avLst/>
+          </a:prstGeom>
+          <a:noFill/>
+        </p:spPr>
+        <p:txBody>
+          <a:bodyPr wrap="square">
+            <a:spAutoFit/>
+          </a:bodyPr>
+          <a:lstStyle/>
+          <a:p>
+            <a:pPr algn="ctr">
+              <a:defRPr sz="950" b="1">
+                <a:solidFill>
+                  <a:srgbClr val="059669"/>
+                </a:solidFill>
+                <a:latin typeface="Calibri"/>
+              </a:defRPr>
+            </a:pPr>
+            <a:r>
+              <a:t>OUI</a:t>
+            </a:r>
+          </a:p>
+        </p:txBody>
+      </p:sp>
+      <p:sp>
+        <p:nvSpPr>
+          <p:cNvPr id="55" name="Rectangle 54"/>
+          <p:cNvSpPr/>
+          <p:nvPr/>
+        </p:nvSpPr>
+        <p:spPr>
+          <a:xfrm>
+            <a:off x="9235440" y="2587752"/>
+            <a:ext cx="822960" cy="365760"/>
+          </a:xfrm>
+          <a:prstGeom prst="rect">
+            <a:avLst/>
+          </a:prstGeom>
+          <a:solidFill>
+            <a:srgbClr val="FFFFFF"/>
+          </a:solidFill>
+          <a:ln w="12700">
+            <a:solidFill>
+              <a:srgbClr val="E2E8F0"/>
+            </a:solidFill>
+          </a:ln>
+        </p:spPr>
+        <p:style>
+          <a:lnRef idx="1">
+            <a:schemeClr val="accent1"/>
+          </a:lnRef>
+          <a:fillRef idx="3">
+            <a:schemeClr val="accent1"/>
+          </a:fillRef>
+          <a:effectRef idx="2">
+            <a:schemeClr val="accent1"/>
+          </a:effectRef>
+          <a:fontRef idx="minor">
+            <a:schemeClr val="lt1"/>
+          </a:fontRef>
+        </p:style>
+        <p:txBody>
+          <a:bodyPr rtlCol="0" anchor="ctr"/>
+          <a:lstStyle/>
+          <a:p>
+            <a:pPr algn="ctr"/>
+          </a:p>
+        </p:txBody>
+      </p:sp>
+      <p:sp>
+        <p:nvSpPr>
+          <p:cNvPr id="56" name="TextBox 55"/>
+          <p:cNvSpPr txBox="1"/>
+          <p:nvPr/>
+        </p:nvSpPr>
+        <p:spPr>
+          <a:xfrm>
+            <a:off x="9290304" y="2642616"/>
+            <a:ext cx="713232" cy="274320"/>
+          </a:xfrm>
+          <a:prstGeom prst="rect">
+            <a:avLst/>
+          </a:prstGeom>
+          <a:noFill/>
+        </p:spPr>
+        <p:txBody>
+          <a:bodyPr wrap="square">
+            <a:spAutoFit/>
+          </a:bodyPr>
+          <a:lstStyle/>
+          <a:p>
+            <a:pPr algn="ctr">
+              <a:defRPr sz="950" b="0">
+                <a:solidFill>
+                  <a:srgbClr val="EF4444"/>
+                </a:solidFill>
+                <a:latin typeface="Calibri"/>
+              </a:defRPr>
+            </a:pPr>
+            <a:r>
+              <a:t>NON</a:t>
+            </a:r>
+          </a:p>
+        </p:txBody>
+      </p:sp>
+      <p:sp>
+        <p:nvSpPr>
+          <p:cNvPr id="57" name="Rectangle 56"/>
+          <p:cNvSpPr/>
+          <p:nvPr/>
+        </p:nvSpPr>
+        <p:spPr>
+          <a:xfrm>
+            <a:off x="10104120" y="2587752"/>
+            <a:ext cx="822960" cy="365760"/>
+          </a:xfrm>
+          <a:prstGeom prst="rect">
+            <a:avLst/>
+          </a:prstGeom>
+          <a:solidFill>
+            <a:srgbClr val="FFFFFF"/>
+          </a:solidFill>
+          <a:ln w="12700">
+            <a:solidFill>
+              <a:srgbClr val="E2E8F0"/>
+            </a:solidFill>
+          </a:ln>
+        </p:spPr>
+        <p:style>
+          <a:lnRef idx="1">
+            <a:schemeClr val="accent1"/>
+          </a:lnRef>
+          <a:fillRef idx="3">
+            <a:schemeClr val="accent1"/>
+          </a:fillRef>
+          <a:effectRef idx="2">
+            <a:schemeClr val="accent1"/>
+          </a:effectRef>
+          <a:fontRef idx="minor">
+            <a:schemeClr val="lt1"/>
+          </a:fontRef>
+        </p:style>
+        <p:txBody>
+          <a:bodyPr rtlCol="0" anchor="ctr"/>
+          <a:lstStyle/>
+          <a:p>
+            <a:pPr algn="ctr"/>
+          </a:p>
+        </p:txBody>
+      </p:sp>
+      <p:sp>
+        <p:nvSpPr>
+          <p:cNvPr id="58" name="TextBox 57"/>
+          <p:cNvSpPr txBox="1"/>
+          <p:nvPr/>
+        </p:nvSpPr>
+        <p:spPr>
+          <a:xfrm>
+            <a:off x="10158984" y="2642616"/>
+            <a:ext cx="713232" cy="274320"/>
+          </a:xfrm>
+          <a:prstGeom prst="rect">
+            <a:avLst/>
+          </a:prstGeom>
+          <a:noFill/>
+        </p:spPr>
+        <p:txBody>
+          <a:bodyPr wrap="square">
+            <a:spAutoFit/>
+          </a:bodyPr>
+          <a:lstStyle/>
+          <a:p>
+            <a:pPr algn="ctr">
+              <a:defRPr sz="950" b="0">
+                <a:solidFill>
+                  <a:srgbClr val="EF4444"/>
+                </a:solidFill>
+                <a:latin typeface="Calibri"/>
+              </a:defRPr>
+            </a:pPr>
+            <a:r>
+              <a:t>NON</a:t>
+            </a:r>
+          </a:p>
+        </p:txBody>
+      </p:sp>
+      <p:sp>
+        <p:nvSpPr>
+          <p:cNvPr id="59" name="Rectangle 58"/>
+          <p:cNvSpPr/>
+          <p:nvPr/>
+        </p:nvSpPr>
+        <p:spPr>
+          <a:xfrm>
+            <a:off x="10972800" y="2587752"/>
+            <a:ext cx="822960" cy="365760"/>
+          </a:xfrm>
+          <a:prstGeom prst="rect">
+            <a:avLst/>
+          </a:prstGeom>
+          <a:solidFill>
+            <a:srgbClr val="FFFFFF"/>
+          </a:solidFill>
+          <a:ln w="12700">
+            <a:solidFill>
+              <a:srgbClr val="E2E8F0"/>
+            </a:solidFill>
+          </a:ln>
+        </p:spPr>
+        <p:style>
+          <a:lnRef idx="1">
+            <a:schemeClr val="accent1"/>
+          </a:lnRef>
+          <a:fillRef idx="3">
+            <a:schemeClr val="accent1"/>
+          </a:fillRef>
+          <a:effectRef idx="2">
+            <a:schemeClr val="accent1"/>
+          </a:effectRef>
+          <a:fontRef idx="minor">
+            <a:schemeClr val="lt1"/>
+          </a:fontRef>
+        </p:style>
+        <p:txBody>
+          <a:bodyPr rtlCol="0" anchor="ctr"/>
+          <a:lstStyle/>
+          <a:p>
+            <a:pPr algn="ctr"/>
+          </a:p>
+        </p:txBody>
+      </p:sp>
+      <p:sp>
+        <p:nvSpPr>
+          <p:cNvPr id="60" name="TextBox 59"/>
+          <p:cNvSpPr txBox="1"/>
+          <p:nvPr/>
+        </p:nvSpPr>
+        <p:spPr>
+          <a:xfrm>
+            <a:off x="11027664" y="2642616"/>
+            <a:ext cx="713232" cy="274320"/>
+          </a:xfrm>
+          <a:prstGeom prst="rect">
+            <a:avLst/>
+          </a:prstGeom>
+          <a:noFill/>
+        </p:spPr>
+        <p:txBody>
+          <a:bodyPr wrap="square">
+            <a:spAutoFit/>
+          </a:bodyPr>
+          <a:lstStyle/>
+          <a:p>
+            <a:pPr algn="ctr">
+              <a:defRPr sz="950" b="0">
+                <a:solidFill>
+                  <a:srgbClr val="EF4444"/>
+                </a:solidFill>
+                <a:latin typeface="Calibri"/>
+              </a:defRPr>
+            </a:pPr>
+            <a:r>
+              <a:t>NON</a:t>
+            </a:r>
+          </a:p>
+        </p:txBody>
+      </p:sp>
+      <p:sp>
+        <p:nvSpPr>
+          <p:cNvPr id="61" name="Rectangle 60"/>
+          <p:cNvSpPr/>
+          <p:nvPr/>
+        </p:nvSpPr>
+        <p:spPr>
+          <a:xfrm>
+            <a:off x="6035040" y="2990088"/>
+            <a:ext cx="2103120" cy="365760"/>
+          </a:xfrm>
+          <a:prstGeom prst="rect">
+            <a:avLst/>
+          </a:prstGeom>
+          <a:solidFill>
+            <a:srgbClr val="F8FAFC"/>
+          </a:solidFill>
+          <a:ln w="12700">
+            <a:solidFill>
+              <a:srgbClr val="E2E8F0"/>
+            </a:solidFill>
+          </a:ln>
+        </p:spPr>
+        <p:style>
+          <a:lnRef idx="1">
+            <a:schemeClr val="accent1"/>
+          </a:lnRef>
+          <a:fillRef idx="3">
+            <a:schemeClr val="accent1"/>
+          </a:fillRef>
+          <a:effectRef idx="2">
+            <a:schemeClr val="accent1"/>
+          </a:effectRef>
+          <a:fontRef idx="minor">
+            <a:schemeClr val="lt1"/>
+          </a:fontRef>
+        </p:style>
+        <p:txBody>
+          <a:bodyPr rtlCol="0" anchor="ctr"/>
+          <a:lstStyle/>
+          <a:p>
+            <a:pPr algn="ctr"/>
+          </a:p>
+        </p:txBody>
+      </p:sp>
+      <p:sp>
+        <p:nvSpPr>
+          <p:cNvPr id="62" name="TextBox 61"/>
+          <p:cNvSpPr txBox="1"/>
+          <p:nvPr/>
+        </p:nvSpPr>
+        <p:spPr>
+          <a:xfrm>
+            <a:off x="6089904" y="3044952"/>
+            <a:ext cx="1993392" cy="274320"/>
+          </a:xfrm>
+          <a:prstGeom prst="rect">
+            <a:avLst/>
+          </a:prstGeom>
+          <a:noFill/>
+        </p:spPr>
+        <p:txBody>
+          <a:bodyPr wrap="square">
+            <a:spAutoFit/>
+          </a:bodyPr>
+          <a:lstStyle/>
+          <a:p>
+            <a:pPr algn="l">
+              <a:defRPr sz="950" b="1">
+                <a:solidFill>
+                  <a:srgbClr val="1E293B"/>
+                </a:solidFill>
+                <a:latin typeface="Calibri"/>
+              </a:defRPr>
+            </a:pPr>
+            <a:r>
+              <a:t>Suivi constantes &amp; Dossier</a:t>
+            </a:r>
+          </a:p>
+        </p:txBody>
+      </p:sp>
+      <p:sp>
+        <p:nvSpPr>
+          <p:cNvPr id="63" name="Rectangle 62"/>
+          <p:cNvSpPr/>
+          <p:nvPr/>
+        </p:nvSpPr>
+        <p:spPr>
+          <a:xfrm>
+            <a:off x="8183879" y="2990088"/>
+            <a:ext cx="1005840" cy="365760"/>
+          </a:xfrm>
+          <a:prstGeom prst="rect">
+            <a:avLst/>
+          </a:prstGeom>
+          <a:solidFill>
+            <a:srgbClr val="F8FAFC"/>
+          </a:solidFill>
+          <a:ln w="12700">
+            <a:solidFill>
+              <a:srgbClr val="E2E8F0"/>
+            </a:solidFill>
+          </a:ln>
+        </p:spPr>
+        <p:style>
+          <a:lnRef idx="1">
+            <a:schemeClr val="accent1"/>
+          </a:lnRef>
+          <a:fillRef idx="3">
+            <a:schemeClr val="accent1"/>
+          </a:fillRef>
+          <a:effectRef idx="2">
+            <a:schemeClr val="accent1"/>
+          </a:effectRef>
+          <a:fontRef idx="minor">
+            <a:schemeClr val="lt1"/>
+          </a:fontRef>
+        </p:style>
+        <p:txBody>
+          <a:bodyPr rtlCol="0" anchor="ctr"/>
+          <a:lstStyle/>
+          <a:p>
+            <a:pPr algn="ctr"/>
+          </a:p>
+        </p:txBody>
+      </p:sp>
+      <p:sp>
+        <p:nvSpPr>
+          <p:cNvPr id="64" name="TextBox 63"/>
+          <p:cNvSpPr txBox="1"/>
+          <p:nvPr/>
+        </p:nvSpPr>
+        <p:spPr>
+          <a:xfrm>
+            <a:off x="8238743" y="3044952"/>
+            <a:ext cx="896112" cy="274320"/>
+          </a:xfrm>
+          <a:prstGeom prst="rect">
+            <a:avLst/>
+          </a:prstGeom>
+          <a:noFill/>
+        </p:spPr>
+        <p:txBody>
+          <a:bodyPr wrap="square">
+            <a:spAutoFit/>
+          </a:bodyPr>
+          <a:lstStyle/>
+          <a:p>
+            <a:pPr algn="ctr">
+              <a:defRPr sz="950" b="1">
+                <a:solidFill>
+                  <a:srgbClr val="059669"/>
+                </a:solidFill>
+                <a:latin typeface="Calibri"/>
+              </a:defRPr>
+            </a:pPr>
+            <a:r>
+              <a:t>OUI</a:t>
+            </a:r>
+          </a:p>
+        </p:txBody>
+      </p:sp>
+      <p:sp>
+        <p:nvSpPr>
+          <p:cNvPr id="65" name="Rectangle 64"/>
+          <p:cNvSpPr/>
+          <p:nvPr/>
+        </p:nvSpPr>
+        <p:spPr>
+          <a:xfrm>
+            <a:off x="9235440" y="2990088"/>
+            <a:ext cx="822960" cy="365760"/>
+          </a:xfrm>
+          <a:prstGeom prst="rect">
+            <a:avLst/>
+          </a:prstGeom>
+          <a:solidFill>
+            <a:srgbClr val="F8FAFC"/>
+          </a:solidFill>
+          <a:ln w="12700">
+            <a:solidFill>
+              <a:srgbClr val="E2E8F0"/>
+            </a:solidFill>
+          </a:ln>
+        </p:spPr>
+        <p:style>
+          <a:lnRef idx="1">
+            <a:schemeClr val="accent1"/>
+          </a:lnRef>
+          <a:fillRef idx="3">
+            <a:schemeClr val="accent1"/>
+          </a:fillRef>
+          <a:effectRef idx="2">
+            <a:schemeClr val="accent1"/>
+          </a:effectRef>
+          <a:fontRef idx="minor">
+            <a:schemeClr val="lt1"/>
+          </a:fontRef>
+        </p:style>
+        <p:txBody>
+          <a:bodyPr rtlCol="0" anchor="ctr"/>
+          <a:lstStyle/>
+          <a:p>
+            <a:pPr algn="ctr"/>
+          </a:p>
+        </p:txBody>
+      </p:sp>
+      <p:sp>
+        <p:nvSpPr>
+          <p:cNvPr id="66" name="TextBox 65"/>
+          <p:cNvSpPr txBox="1"/>
+          <p:nvPr/>
+        </p:nvSpPr>
+        <p:spPr>
+          <a:xfrm>
+            <a:off x="9290304" y="3044952"/>
+            <a:ext cx="713232" cy="274320"/>
+          </a:xfrm>
+          <a:prstGeom prst="rect">
+            <a:avLst/>
+          </a:prstGeom>
+          <a:noFill/>
+        </p:spPr>
+        <p:txBody>
+          <a:bodyPr wrap="square">
+            <a:spAutoFit/>
+          </a:bodyPr>
+          <a:lstStyle/>
+          <a:p>
+            <a:pPr algn="ctr">
+              <a:defRPr sz="950" b="0">
+                <a:solidFill>
+                  <a:srgbClr val="F59E0B"/>
+                </a:solidFill>
+                <a:latin typeface="Calibri"/>
+              </a:defRPr>
+            </a:pPr>
+            <a:r>
+              <a:t>Partiel</a:t>
+            </a:r>
+          </a:p>
+        </p:txBody>
+      </p:sp>
+      <p:sp>
+        <p:nvSpPr>
+          <p:cNvPr id="67" name="Rectangle 66"/>
+          <p:cNvSpPr/>
+          <p:nvPr/>
+        </p:nvSpPr>
+        <p:spPr>
+          <a:xfrm>
+            <a:off x="10104120" y="2990088"/>
+            <a:ext cx="822960" cy="365760"/>
+          </a:xfrm>
+          <a:prstGeom prst="rect">
+            <a:avLst/>
+          </a:prstGeom>
+          <a:solidFill>
+            <a:srgbClr val="F8FAFC"/>
+          </a:solidFill>
+          <a:ln w="12700">
+            <a:solidFill>
+              <a:srgbClr val="E2E8F0"/>
+            </a:solidFill>
+          </a:ln>
+        </p:spPr>
+        <p:style>
+          <a:lnRef idx="1">
+            <a:schemeClr val="accent1"/>
+          </a:lnRef>
+          <a:fillRef idx="3">
+            <a:schemeClr val="accent1"/>
+          </a:fillRef>
+          <a:effectRef idx="2">
+            <a:schemeClr val="accent1"/>
+          </a:effectRef>
+          <a:fontRef idx="minor">
+            <a:schemeClr val="lt1"/>
+          </a:fontRef>
+        </p:style>
+        <p:txBody>
+          <a:bodyPr rtlCol="0" anchor="ctr"/>
+          <a:lstStyle/>
+          <a:p>
+            <a:pPr algn="ctr"/>
+          </a:p>
+        </p:txBody>
+      </p:sp>
+      <p:sp>
+        <p:nvSpPr>
+          <p:cNvPr id="68" name="TextBox 67"/>
+          <p:cNvSpPr txBox="1"/>
+          <p:nvPr/>
+        </p:nvSpPr>
+        <p:spPr>
+          <a:xfrm>
+            <a:off x="10158984" y="3044952"/>
+            <a:ext cx="713232" cy="274320"/>
+          </a:xfrm>
+          <a:prstGeom prst="rect">
+            <a:avLst/>
+          </a:prstGeom>
+          <a:noFill/>
+        </p:spPr>
+        <p:txBody>
+          <a:bodyPr wrap="square">
+            <a:spAutoFit/>
+          </a:bodyPr>
+          <a:lstStyle/>
+          <a:p>
+            <a:pPr algn="ctr">
+              <a:defRPr sz="950" b="0">
+                <a:solidFill>
+                  <a:srgbClr val="EF4444"/>
+                </a:solidFill>
+                <a:latin typeface="Calibri"/>
+              </a:defRPr>
+            </a:pPr>
+            <a:r>
+              <a:t>NON</a:t>
+            </a:r>
+          </a:p>
+        </p:txBody>
+      </p:sp>
+      <p:sp>
+        <p:nvSpPr>
+          <p:cNvPr id="69" name="Rectangle 68"/>
+          <p:cNvSpPr/>
+          <p:nvPr/>
+        </p:nvSpPr>
+        <p:spPr>
+          <a:xfrm>
+            <a:off x="10972800" y="2990088"/>
+            <a:ext cx="822960" cy="365760"/>
+          </a:xfrm>
+          <a:prstGeom prst="rect">
+            <a:avLst/>
+          </a:prstGeom>
+          <a:solidFill>
+            <a:srgbClr val="F8FAFC"/>
+          </a:solidFill>
+          <a:ln w="12700">
+            <a:solidFill>
+              <a:srgbClr val="E2E8F0"/>
+            </a:solidFill>
+          </a:ln>
+        </p:spPr>
+        <p:style>
+          <a:lnRef idx="1">
+            <a:schemeClr val="accent1"/>
+          </a:lnRef>
+          <a:fillRef idx="3">
+            <a:schemeClr val="accent1"/>
+          </a:fillRef>
+          <a:effectRef idx="2">
+            <a:schemeClr val="accent1"/>
+          </a:effectRef>
+          <a:fontRef idx="minor">
+            <a:schemeClr val="lt1"/>
+          </a:fontRef>
+        </p:style>
+        <p:txBody>
+          <a:bodyPr rtlCol="0" anchor="ctr"/>
+          <a:lstStyle/>
+          <a:p>
+            <a:pPr algn="ctr"/>
+          </a:p>
+        </p:txBody>
+      </p:sp>
+      <p:sp>
+        <p:nvSpPr>
+          <p:cNvPr id="70" name="TextBox 69"/>
+          <p:cNvSpPr txBox="1"/>
+          <p:nvPr/>
+        </p:nvSpPr>
+        <p:spPr>
+          <a:xfrm>
+            <a:off x="11027664" y="3044952"/>
+            <a:ext cx="713232" cy="274320"/>
+          </a:xfrm>
+          <a:prstGeom prst="rect">
+            <a:avLst/>
+          </a:prstGeom>
+          <a:noFill/>
+        </p:spPr>
+        <p:txBody>
+          <a:bodyPr wrap="square">
+            <a:spAutoFit/>
+          </a:bodyPr>
+          <a:lstStyle/>
+          <a:p>
+            <a:pPr algn="ctr">
+              <a:defRPr sz="950" b="0">
+                <a:solidFill>
+                  <a:srgbClr val="EF4444"/>
+                </a:solidFill>
+                <a:latin typeface="Calibri"/>
+              </a:defRPr>
+            </a:pPr>
+            <a:r>
+              <a:t>NON</a:t>
+            </a:r>
+          </a:p>
+        </p:txBody>
+      </p:sp>
+      <p:sp>
+        <p:nvSpPr>
+          <p:cNvPr id="71" name="Rectangle 70"/>
+          <p:cNvSpPr/>
+          <p:nvPr/>
+        </p:nvSpPr>
+        <p:spPr>
+          <a:xfrm>
+            <a:off x="6035040" y="3392424"/>
+            <a:ext cx="2103120" cy="365760"/>
+          </a:xfrm>
+          <a:prstGeom prst="rect">
+            <a:avLst/>
+          </a:prstGeom>
+          <a:solidFill>
+            <a:srgbClr val="FFFFFF"/>
+          </a:solidFill>
+          <a:ln w="12700">
+            <a:solidFill>
+              <a:srgbClr val="E2E8F0"/>
+            </a:solidFill>
+          </a:ln>
+        </p:spPr>
+        <p:style>
+          <a:lnRef idx="1">
+            <a:schemeClr val="accent1"/>
+          </a:lnRef>
+          <a:fillRef idx="3">
+            <a:schemeClr val="accent1"/>
+          </a:fillRef>
+          <a:effectRef idx="2">
+            <a:schemeClr val="accent1"/>
+          </a:effectRef>
+          <a:fontRef idx="minor">
+            <a:schemeClr val="lt1"/>
+          </a:fontRef>
+        </p:style>
+        <p:txBody>
+          <a:bodyPr rtlCol="0" anchor="ctr"/>
+          <a:lstStyle/>
+          <a:p>
+            <a:pPr algn="ctr"/>
+          </a:p>
+        </p:txBody>
+      </p:sp>
+      <p:sp>
+        <p:nvSpPr>
+          <p:cNvPr id="72" name="TextBox 71"/>
+          <p:cNvSpPr txBox="1"/>
+          <p:nvPr/>
+        </p:nvSpPr>
+        <p:spPr>
+          <a:xfrm>
+            <a:off x="6089904" y="3447288"/>
+            <a:ext cx="1993392" cy="274320"/>
+          </a:xfrm>
+          <a:prstGeom prst="rect">
+            <a:avLst/>
+          </a:prstGeom>
+          <a:noFill/>
+        </p:spPr>
+        <p:txBody>
+          <a:bodyPr wrap="square">
+            <a:spAutoFit/>
+          </a:bodyPr>
+          <a:lstStyle/>
+          <a:p>
+            <a:pPr algn="l">
+              <a:defRPr sz="950" b="1">
+                <a:solidFill>
+                  <a:srgbClr val="1E293B"/>
+                </a:solidFill>
+                <a:latin typeface="Calibri"/>
+              </a:defRPr>
+            </a:pPr>
+            <a:r>
+              <a:t>ERP &amp; Gestion des stocks</a:t>
+            </a:r>
+          </a:p>
+        </p:txBody>
+      </p:sp>
+      <p:sp>
+        <p:nvSpPr>
+          <p:cNvPr id="73" name="Rectangle 72"/>
+          <p:cNvSpPr/>
+          <p:nvPr/>
+        </p:nvSpPr>
+        <p:spPr>
+          <a:xfrm>
+            <a:off x="8183879" y="3392424"/>
+            <a:ext cx="1005840" cy="365760"/>
+          </a:xfrm>
+          <a:prstGeom prst="rect">
+            <a:avLst/>
+          </a:prstGeom>
+          <a:solidFill>
+            <a:srgbClr val="FFFFFF"/>
+          </a:solidFill>
+          <a:ln w="12700">
+            <a:solidFill>
+              <a:srgbClr val="E2E8F0"/>
+            </a:solidFill>
+          </a:ln>
+        </p:spPr>
+        <p:style>
+          <a:lnRef idx="1">
+            <a:schemeClr val="accent1"/>
+          </a:lnRef>
+          <a:fillRef idx="3">
+            <a:schemeClr val="accent1"/>
+          </a:fillRef>
+          <a:effectRef idx="2">
+            <a:schemeClr val="accent1"/>
+          </a:effectRef>
+          <a:fontRef idx="minor">
+            <a:schemeClr val="lt1"/>
+          </a:fontRef>
+        </p:style>
+        <p:txBody>
+          <a:bodyPr rtlCol="0" anchor="ctr"/>
+          <a:lstStyle/>
+          <a:p>
+            <a:pPr algn="ctr"/>
+          </a:p>
+        </p:txBody>
+      </p:sp>
+      <p:sp>
+        <p:nvSpPr>
+          <p:cNvPr id="74" name="TextBox 73"/>
+          <p:cNvSpPr txBox="1"/>
+          <p:nvPr/>
+        </p:nvSpPr>
+        <p:spPr>
+          <a:xfrm>
+            <a:off x="8238743" y="3447288"/>
+            <a:ext cx="896112" cy="274320"/>
+          </a:xfrm>
+          <a:prstGeom prst="rect">
+            <a:avLst/>
+          </a:prstGeom>
+          <a:noFill/>
+        </p:spPr>
+        <p:txBody>
+          <a:bodyPr wrap="square">
+            <a:spAutoFit/>
+          </a:bodyPr>
+          <a:lstStyle/>
+          <a:p>
+            <a:pPr algn="ctr">
+              <a:defRPr sz="950" b="1">
+                <a:solidFill>
+                  <a:srgbClr val="059669"/>
+                </a:solidFill>
+                <a:latin typeface="Calibri"/>
+              </a:defRPr>
+            </a:pPr>
+            <a:r>
+              <a:t>OUI</a:t>
+            </a:r>
+          </a:p>
+        </p:txBody>
+      </p:sp>
+      <p:sp>
+        <p:nvSpPr>
+          <p:cNvPr id="75" name="Rectangle 74"/>
+          <p:cNvSpPr/>
+          <p:nvPr/>
+        </p:nvSpPr>
+        <p:spPr>
+          <a:xfrm>
+            <a:off x="9235440" y="3392424"/>
+            <a:ext cx="822960" cy="365760"/>
+          </a:xfrm>
+          <a:prstGeom prst="rect">
+            <a:avLst/>
+          </a:prstGeom>
+          <a:solidFill>
+            <a:srgbClr val="FFFFFF"/>
+          </a:solidFill>
+          <a:ln w="12700">
+            <a:solidFill>
+              <a:srgbClr val="E2E8F0"/>
+            </a:solidFill>
+          </a:ln>
+        </p:spPr>
+        <p:style>
+          <a:lnRef idx="1">
+            <a:schemeClr val="accent1"/>
+          </a:lnRef>
+          <a:fillRef idx="3">
+            <a:schemeClr val="accent1"/>
+          </a:fillRef>
+          <a:effectRef idx="2">
+            <a:schemeClr val="accent1"/>
+          </a:effectRef>
+          <a:fontRef idx="minor">
+            <a:schemeClr val="lt1"/>
+          </a:fontRef>
+        </p:style>
+        <p:txBody>
+          <a:bodyPr rtlCol="0" anchor="ctr"/>
+          <a:lstStyle/>
+          <a:p>
+            <a:pPr algn="ctr"/>
+          </a:p>
+        </p:txBody>
+      </p:sp>
+      <p:sp>
+        <p:nvSpPr>
+          <p:cNvPr id="76" name="TextBox 75"/>
+          <p:cNvSpPr txBox="1"/>
+          <p:nvPr/>
+        </p:nvSpPr>
+        <p:spPr>
+          <a:xfrm>
+            <a:off x="9290304" y="3447288"/>
+            <a:ext cx="713232" cy="274320"/>
+          </a:xfrm>
+          <a:prstGeom prst="rect">
+            <a:avLst/>
+          </a:prstGeom>
+          <a:noFill/>
+        </p:spPr>
+        <p:txBody>
+          <a:bodyPr wrap="square">
+            <a:spAutoFit/>
+          </a:bodyPr>
+          <a:lstStyle/>
+          <a:p>
+            <a:pPr algn="ctr">
+              <a:defRPr sz="950" b="0">
+                <a:solidFill>
+                  <a:srgbClr val="EF4444"/>
+                </a:solidFill>
+                <a:latin typeface="Calibri"/>
+              </a:defRPr>
+            </a:pPr>
+            <a:r>
+              <a:t>NON</a:t>
+            </a:r>
+          </a:p>
+        </p:txBody>
+      </p:sp>
+      <p:sp>
+        <p:nvSpPr>
+          <p:cNvPr id="77" name="Rectangle 76"/>
+          <p:cNvSpPr/>
+          <p:nvPr/>
+        </p:nvSpPr>
+        <p:spPr>
+          <a:xfrm>
+            <a:off x="10104120" y="3392424"/>
+            <a:ext cx="822960" cy="365760"/>
+          </a:xfrm>
+          <a:prstGeom prst="rect">
+            <a:avLst/>
+          </a:prstGeom>
+          <a:solidFill>
+            <a:srgbClr val="FFFFFF"/>
+          </a:solidFill>
+          <a:ln w="12700">
+            <a:solidFill>
+              <a:srgbClr val="E2E8F0"/>
+            </a:solidFill>
+          </a:ln>
+        </p:spPr>
+        <p:style>
+          <a:lnRef idx="1">
+            <a:schemeClr val="accent1"/>
+          </a:lnRef>
+          <a:fillRef idx="3">
+            <a:schemeClr val="accent1"/>
+          </a:fillRef>
+          <a:effectRef idx="2">
+            <a:schemeClr val="accent1"/>
+          </a:effectRef>
+          <a:fontRef idx="minor">
+            <a:schemeClr val="lt1"/>
+          </a:fontRef>
+        </p:style>
+        <p:txBody>
+          <a:bodyPr rtlCol="0" anchor="ctr"/>
+          <a:lstStyle/>
+          <a:p>
+            <a:pPr algn="ctr"/>
+          </a:p>
+        </p:txBody>
+      </p:sp>
+      <p:sp>
+        <p:nvSpPr>
+          <p:cNvPr id="78" name="TextBox 77"/>
+          <p:cNvSpPr txBox="1"/>
+          <p:nvPr/>
+        </p:nvSpPr>
+        <p:spPr>
+          <a:xfrm>
+            <a:off x="10158984" y="3447288"/>
+            <a:ext cx="713232" cy="274320"/>
+          </a:xfrm>
+          <a:prstGeom prst="rect">
+            <a:avLst/>
+          </a:prstGeom>
+          <a:noFill/>
+        </p:spPr>
+        <p:txBody>
+          <a:bodyPr wrap="square">
+            <a:spAutoFit/>
+          </a:bodyPr>
+          <a:lstStyle/>
+          <a:p>
+            <a:pPr algn="ctr">
+              <a:defRPr sz="950" b="0">
+                <a:solidFill>
+                  <a:srgbClr val="EF4444"/>
+                </a:solidFill>
+                <a:latin typeface="Calibri"/>
+              </a:defRPr>
+            </a:pPr>
+            <a:r>
+              <a:t>NON</a:t>
+            </a:r>
+          </a:p>
+        </p:txBody>
+      </p:sp>
+      <p:sp>
+        <p:nvSpPr>
+          <p:cNvPr id="79" name="Rectangle 78"/>
+          <p:cNvSpPr/>
+          <p:nvPr/>
+        </p:nvSpPr>
+        <p:spPr>
+          <a:xfrm>
+            <a:off x="10972800" y="3392424"/>
+            <a:ext cx="822960" cy="365760"/>
+          </a:xfrm>
+          <a:prstGeom prst="rect">
+            <a:avLst/>
+          </a:prstGeom>
+          <a:solidFill>
+            <a:srgbClr val="FFFFFF"/>
+          </a:solidFill>
+          <a:ln w="12700">
+            <a:solidFill>
+              <a:srgbClr val="E2E8F0"/>
+            </a:solidFill>
+          </a:ln>
+        </p:spPr>
+        <p:style>
+          <a:lnRef idx="1">
+            <a:schemeClr val="accent1"/>
+          </a:lnRef>
+          <a:fillRef idx="3">
+            <a:schemeClr val="accent1"/>
+          </a:fillRef>
+          <a:effectRef idx="2">
+            <a:schemeClr val="accent1"/>
+          </a:effectRef>
+          <a:fontRef idx="minor">
+            <a:schemeClr val="lt1"/>
+          </a:fontRef>
+        </p:style>
+        <p:txBody>
+          <a:bodyPr rtlCol="0" anchor="ctr"/>
+          <a:lstStyle/>
+          <a:p>
+            <a:pPr algn="ctr"/>
+          </a:p>
+        </p:txBody>
+      </p:sp>
+      <p:sp>
+        <p:nvSpPr>
+          <p:cNvPr id="80" name="TextBox 79"/>
+          <p:cNvSpPr txBox="1"/>
+          <p:nvPr/>
+        </p:nvSpPr>
+        <p:spPr>
+          <a:xfrm>
+            <a:off x="11027664" y="3447288"/>
+            <a:ext cx="713232" cy="274320"/>
+          </a:xfrm>
+          <a:prstGeom prst="rect">
+            <a:avLst/>
+          </a:prstGeom>
+          <a:noFill/>
+        </p:spPr>
+        <p:txBody>
+          <a:bodyPr wrap="square">
+            <a:spAutoFit/>
+          </a:bodyPr>
+          <a:lstStyle/>
+          <a:p>
+            <a:pPr algn="ctr">
+              <a:defRPr sz="950" b="0">
+                <a:solidFill>
+                  <a:srgbClr val="EF4444"/>
+                </a:solidFill>
+                <a:latin typeface="Calibri"/>
+              </a:defRPr>
+            </a:pPr>
+            <a:r>
+              <a:t>NON</a:t>
+            </a:r>
+          </a:p>
+        </p:txBody>
+      </p:sp>
+      <p:sp>
+        <p:nvSpPr>
+          <p:cNvPr id="81" name="Rectangle 80"/>
+          <p:cNvSpPr/>
+          <p:nvPr/>
+        </p:nvSpPr>
+        <p:spPr>
+          <a:xfrm>
+            <a:off x="6035040" y="3794760"/>
+            <a:ext cx="2103120" cy="365760"/>
+          </a:xfrm>
+          <a:prstGeom prst="rect">
+            <a:avLst/>
+          </a:prstGeom>
+          <a:solidFill>
+            <a:srgbClr val="F8FAFC"/>
+          </a:solidFill>
+          <a:ln w="12700">
+            <a:solidFill>
+              <a:srgbClr val="E2E8F0"/>
+            </a:solidFill>
+          </a:ln>
+        </p:spPr>
+        <p:style>
+          <a:lnRef idx="1">
+            <a:schemeClr val="accent1"/>
+          </a:lnRef>
+          <a:fillRef idx="3">
+            <a:schemeClr val="accent1"/>
+          </a:fillRef>
+          <a:effectRef idx="2">
+            <a:schemeClr val="accent1"/>
+          </a:effectRef>
+          <a:fontRef idx="minor">
+            <a:schemeClr val="lt1"/>
+          </a:fontRef>
+        </p:style>
+        <p:txBody>
+          <a:bodyPr rtlCol="0" anchor="ctr"/>
+          <a:lstStyle/>
+          <a:p>
+            <a:pPr algn="ctr"/>
+          </a:p>
+        </p:txBody>
+      </p:sp>
+      <p:sp>
+        <p:nvSpPr>
+          <p:cNvPr id="82" name="TextBox 81"/>
+          <p:cNvSpPr txBox="1"/>
+          <p:nvPr/>
+        </p:nvSpPr>
+        <p:spPr>
+          <a:xfrm>
+            <a:off x="6089904" y="3849624"/>
+            <a:ext cx="1993392" cy="274320"/>
+          </a:xfrm>
+          <a:prstGeom prst="rect">
+            <a:avLst/>
+          </a:prstGeom>
+          <a:noFill/>
+        </p:spPr>
+        <p:txBody>
+          <a:bodyPr wrap="square">
+            <a:spAutoFit/>
+          </a:bodyPr>
+          <a:lstStyle/>
+          <a:p>
+            <a:pPr algn="l">
+              <a:defRPr sz="950" b="1">
+                <a:solidFill>
+                  <a:srgbClr val="1E293B"/>
+                </a:solidFill>
+                <a:latin typeface="Calibri"/>
+              </a:defRPr>
+            </a:pPr>
+            <a:r>
+              <a:t>Contrats garde longue durée</a:t>
+            </a:r>
+          </a:p>
+        </p:txBody>
+      </p:sp>
+      <p:sp>
+        <p:nvSpPr>
+          <p:cNvPr id="83" name="Rectangle 82"/>
+          <p:cNvSpPr/>
+          <p:nvPr/>
+        </p:nvSpPr>
+        <p:spPr>
+          <a:xfrm>
+            <a:off x="8183879" y="3794760"/>
+            <a:ext cx="1005840" cy="365760"/>
+          </a:xfrm>
+          <a:prstGeom prst="rect">
+            <a:avLst/>
+          </a:prstGeom>
+          <a:solidFill>
+            <a:srgbClr val="F8FAFC"/>
+          </a:solidFill>
+          <a:ln w="12700">
+            <a:solidFill>
+              <a:srgbClr val="E2E8F0"/>
+            </a:solidFill>
+          </a:ln>
+        </p:spPr>
+        <p:style>
+          <a:lnRef idx="1">
+            <a:schemeClr val="accent1"/>
+          </a:lnRef>
+          <a:fillRef idx="3">
+            <a:schemeClr val="accent1"/>
+          </a:fillRef>
+          <a:effectRef idx="2">
+            <a:schemeClr val="accent1"/>
+          </a:effectRef>
+          <a:fontRef idx="minor">
+            <a:schemeClr val="lt1"/>
+          </a:fontRef>
+        </p:style>
+        <p:txBody>
+          <a:bodyPr rtlCol="0" anchor="ctr"/>
+          <a:lstStyle/>
+          <a:p>
+            <a:pPr algn="ctr"/>
+          </a:p>
+        </p:txBody>
+      </p:sp>
+      <p:sp>
+        <p:nvSpPr>
+          <p:cNvPr id="84" name="TextBox 83"/>
+          <p:cNvSpPr txBox="1"/>
+          <p:nvPr/>
+        </p:nvSpPr>
+        <p:spPr>
+          <a:xfrm>
+            <a:off x="8238743" y="3849624"/>
+            <a:ext cx="896112" cy="274320"/>
+          </a:xfrm>
+          <a:prstGeom prst="rect">
+            <a:avLst/>
+          </a:prstGeom>
+          <a:noFill/>
+        </p:spPr>
+        <p:txBody>
+          <a:bodyPr wrap="square">
+            <a:spAutoFit/>
+          </a:bodyPr>
+          <a:lstStyle/>
+          <a:p>
+            <a:pPr algn="ctr">
+              <a:defRPr sz="950" b="1">
+                <a:solidFill>
+                  <a:srgbClr val="059669"/>
+                </a:solidFill>
+                <a:latin typeface="Calibri"/>
+              </a:defRPr>
+            </a:pPr>
+            <a:r>
+              <a:t>OUI</a:t>
+            </a:r>
+          </a:p>
+        </p:txBody>
+      </p:sp>
+      <p:sp>
+        <p:nvSpPr>
+          <p:cNvPr id="85" name="Rectangle 84"/>
+          <p:cNvSpPr/>
+          <p:nvPr/>
+        </p:nvSpPr>
+        <p:spPr>
+          <a:xfrm>
+            <a:off x="9235440" y="3794760"/>
+            <a:ext cx="822960" cy="365760"/>
+          </a:xfrm>
+          <a:prstGeom prst="rect">
+            <a:avLst/>
+          </a:prstGeom>
+          <a:solidFill>
+            <a:srgbClr val="F8FAFC"/>
+          </a:solidFill>
+          <a:ln w="12700">
+            <a:solidFill>
+              <a:srgbClr val="E2E8F0"/>
+            </a:solidFill>
+          </a:ln>
+        </p:spPr>
+        <p:style>
+          <a:lnRef idx="1">
+            <a:schemeClr val="accent1"/>
+          </a:lnRef>
+          <a:fillRef idx="3">
+            <a:schemeClr val="accent1"/>
+          </a:fillRef>
+          <a:effectRef idx="2">
+            <a:schemeClr val="accent1"/>
+          </a:effectRef>
+          <a:fontRef idx="minor">
+            <a:schemeClr val="lt1"/>
+          </a:fontRef>
+        </p:style>
+        <p:txBody>
+          <a:bodyPr rtlCol="0" anchor="ctr"/>
+          <a:lstStyle/>
+          <a:p>
+            <a:pPr algn="ctr"/>
+          </a:p>
+        </p:txBody>
+      </p:sp>
+      <p:sp>
+        <p:nvSpPr>
+          <p:cNvPr id="86" name="TextBox 85"/>
+          <p:cNvSpPr txBox="1"/>
+          <p:nvPr/>
+        </p:nvSpPr>
+        <p:spPr>
+          <a:xfrm>
+            <a:off x="9290304" y="3849624"/>
+            <a:ext cx="713232" cy="274320"/>
+          </a:xfrm>
+          <a:prstGeom prst="rect">
+            <a:avLst/>
+          </a:prstGeom>
+          <a:noFill/>
+        </p:spPr>
+        <p:txBody>
+          <a:bodyPr wrap="square">
+            <a:spAutoFit/>
+          </a:bodyPr>
+          <a:lstStyle/>
+          <a:p>
+            <a:pPr algn="ctr">
+              <a:defRPr sz="950" b="0">
+                <a:solidFill>
+                  <a:srgbClr val="EF4444"/>
+                </a:solidFill>
+                <a:latin typeface="Calibri"/>
+              </a:defRPr>
+            </a:pPr>
+            <a:r>
+              <a:t>NON</a:t>
+            </a:r>
+          </a:p>
+        </p:txBody>
+      </p:sp>
+      <p:sp>
+        <p:nvSpPr>
+          <p:cNvPr id="87" name="Rectangle 86"/>
+          <p:cNvSpPr/>
+          <p:nvPr/>
+        </p:nvSpPr>
+        <p:spPr>
+          <a:xfrm>
+            <a:off x="10104120" y="3794760"/>
+            <a:ext cx="822960" cy="365760"/>
+          </a:xfrm>
+          <a:prstGeom prst="rect">
+            <a:avLst/>
+          </a:prstGeom>
+          <a:solidFill>
+            <a:srgbClr val="F8FAFC"/>
+          </a:solidFill>
+          <a:ln w="12700">
+            <a:solidFill>
+              <a:srgbClr val="E2E8F0"/>
+            </a:solidFill>
+          </a:ln>
+        </p:spPr>
+        <p:style>
+          <a:lnRef idx="1">
+            <a:schemeClr val="accent1"/>
+          </a:lnRef>
+          <a:fillRef idx="3">
+            <a:schemeClr val="accent1"/>
+          </a:fillRef>
+          <a:effectRef idx="2">
+            <a:schemeClr val="accent1"/>
+          </a:effectRef>
+          <a:fontRef idx="minor">
+            <a:schemeClr val="lt1"/>
+          </a:fontRef>
+        </p:style>
+        <p:txBody>
+          <a:bodyPr rtlCol="0" anchor="ctr"/>
+          <a:lstStyle/>
+          <a:p>
+            <a:pPr algn="ctr"/>
+          </a:p>
+        </p:txBody>
+      </p:sp>
+      <p:sp>
+        <p:nvSpPr>
+          <p:cNvPr id="88" name="TextBox 87"/>
+          <p:cNvSpPr txBox="1"/>
+          <p:nvPr/>
+        </p:nvSpPr>
+        <p:spPr>
+          <a:xfrm>
+            <a:off x="10158984" y="3849624"/>
+            <a:ext cx="713232" cy="274320"/>
+          </a:xfrm>
+          <a:prstGeom prst="rect">
+            <a:avLst/>
+          </a:prstGeom>
+          <a:noFill/>
+        </p:spPr>
+        <p:txBody>
+          <a:bodyPr wrap="square">
+            <a:spAutoFit/>
+          </a:bodyPr>
+          <a:lstStyle/>
+          <a:p>
+            <a:pPr algn="ctr">
+              <a:defRPr sz="950" b="0">
+                <a:solidFill>
+                  <a:srgbClr val="EF4444"/>
+                </a:solidFill>
+                <a:latin typeface="Calibri"/>
+              </a:defRPr>
+            </a:pPr>
+            <a:r>
+              <a:t>NON</a:t>
+            </a:r>
+          </a:p>
+        </p:txBody>
+      </p:sp>
+      <p:sp>
+        <p:nvSpPr>
+          <p:cNvPr id="89" name="Rectangle 88"/>
+          <p:cNvSpPr/>
+          <p:nvPr/>
+        </p:nvSpPr>
+        <p:spPr>
+          <a:xfrm>
+            <a:off x="10972800" y="3794760"/>
+            <a:ext cx="822960" cy="365760"/>
+          </a:xfrm>
+          <a:prstGeom prst="rect">
+            <a:avLst/>
+          </a:prstGeom>
+          <a:solidFill>
+            <a:srgbClr val="F8FAFC"/>
+          </a:solidFill>
+          <a:ln w="12700">
+            <a:solidFill>
+              <a:srgbClr val="E2E8F0"/>
+            </a:solidFill>
+          </a:ln>
+        </p:spPr>
+        <p:style>
+          <a:lnRef idx="1">
+            <a:schemeClr val="accent1"/>
+          </a:lnRef>
+          <a:fillRef idx="3">
+            <a:schemeClr val="accent1"/>
+          </a:fillRef>
+          <a:effectRef idx="2">
+            <a:schemeClr val="accent1"/>
+          </a:effectRef>
+          <a:fontRef idx="minor">
+            <a:schemeClr val="lt1"/>
+          </a:fontRef>
+        </p:style>
+        <p:txBody>
+          <a:bodyPr rtlCol="0" anchor="ctr"/>
+          <a:lstStyle/>
+          <a:p>
+            <a:pPr algn="ctr"/>
+          </a:p>
+        </p:txBody>
+      </p:sp>
+      <p:sp>
+        <p:nvSpPr>
+          <p:cNvPr id="90" name="TextBox 89"/>
+          <p:cNvSpPr txBox="1"/>
+          <p:nvPr/>
+        </p:nvSpPr>
+        <p:spPr>
+          <a:xfrm>
+            <a:off x="11027664" y="3849624"/>
+            <a:ext cx="713232" cy="274320"/>
+          </a:xfrm>
+          <a:prstGeom prst="rect">
+            <a:avLst/>
+          </a:prstGeom>
+          <a:noFill/>
+        </p:spPr>
+        <p:txBody>
+          <a:bodyPr wrap="square">
+            <a:spAutoFit/>
+          </a:bodyPr>
+          <a:lstStyle/>
+          <a:p>
+            <a:pPr algn="ctr">
+              <a:defRPr sz="950" b="0">
+                <a:solidFill>
+                  <a:srgbClr val="F59E0B"/>
+                </a:solidFill>
+                <a:latin typeface="Calibri"/>
+              </a:defRPr>
+            </a:pPr>
+            <a:r>
+              <a:t>Partiel</a:t>
+            </a:r>
+          </a:p>
+        </p:txBody>
+      </p:sp>
+      <p:sp>
+        <p:nvSpPr>
+          <p:cNvPr id="91" name="Rounded Rectangle 90"/>
+          <p:cNvSpPr/>
+          <p:nvPr/>
+        </p:nvSpPr>
+        <p:spPr>
+          <a:xfrm>
+            <a:off x="6035040" y="4343400"/>
+            <a:ext cx="5760720" cy="1371600"/>
+          </a:xfrm>
+          <a:prstGeom prst="roundRect">
+            <a:avLst/>
+          </a:prstGeom>
+          <a:solidFill>
+            <a:srgbClr val="EEF2FF"/>
+          </a:solidFill>
+          <a:ln w="19050">
+            <a:solidFill>
+              <a:srgbClr val="2563EB"/>
+            </a:solidFill>
+          </a:ln>
+        </p:spPr>
+        <p:style>
+          <a:lnRef idx="1">
+            <a:schemeClr val="accent1"/>
+          </a:lnRef>
+          <a:fillRef idx="3">
+            <a:schemeClr val="accent1"/>
+          </a:fillRef>
+          <a:effectRef idx="2">
+            <a:schemeClr val="accent1"/>
+          </a:effectRef>
+          <a:fontRef idx="minor">
+            <a:schemeClr val="lt1"/>
+          </a:fontRef>
+        </p:style>
+        <p:txBody>
+          <a:bodyPr rtlCol="0" anchor="ctr"/>
+          <a:lstStyle/>
+          <a:p>
+            <a:pPr algn="ctr"/>
+          </a:p>
+        </p:txBody>
+      </p:sp>
+      <p:sp>
+        <p:nvSpPr>
+          <p:cNvPr id="92" name="TextBox 91"/>
+          <p:cNvSpPr txBox="1"/>
+          <p:nvPr/>
+        </p:nvSpPr>
+        <p:spPr>
+          <a:xfrm>
+            <a:off x="6172200" y="4434840"/>
+            <a:ext cx="5486400" cy="274320"/>
+          </a:xfrm>
+          <a:prstGeom prst="rect">
+            <a:avLst/>
+          </a:prstGeom>
+          <a:noFill/>
+        </p:spPr>
+        <p:txBody>
+          <a:bodyPr wrap="square">
+            <a:spAutoFit/>
+          </a:bodyPr>
+          <a:lstStyle/>
+          <a:p>
+            <a:pPr algn="l">
+              <a:defRPr sz="1200" b="1">
+                <a:solidFill>
+                  <a:srgbClr val="2563EB"/>
+                </a:solidFill>
+                <a:latin typeface="Calibri"/>
+              </a:defRPr>
+            </a:pPr>
+            <a:r>
+              <a:t>Positionnement Unique &amp; Avantage Concurrentiel</a:t>
+            </a:r>
+          </a:p>
+        </p:txBody>
+      </p:sp>
+      <p:sp>
+        <p:nvSpPr>
+          <p:cNvPr id="93" name="TextBox 92"/>
+          <p:cNvSpPr txBox="1"/>
+          <p:nvPr/>
+        </p:nvSpPr>
+        <p:spPr>
+          <a:xfrm>
+            <a:off x="6172200" y="4736592"/>
+            <a:ext cx="5486400" cy="896112"/>
+          </a:xfrm>
+          <a:prstGeom prst="rect">
+            <a:avLst/>
+          </a:prstGeom>
+          <a:noFill/>
+        </p:spPr>
+        <p:txBody>
+          <a:bodyPr wrap="square">
+            <a:spAutoFit/>
+          </a:bodyPr>
+          <a:lstStyle/>
+          <a:p>
+            <a:pPr algn="l">
+              <a:defRPr sz="1000" b="0">
+                <a:solidFill>
+                  <a:srgbClr val="1E293B"/>
+                </a:solidFill>
+                <a:latin typeface="Calibri"/>
+              </a:defRPr>
+            </a:pPr>
+            <a:r>
+              <a:t>Dar-Soins comble un vide stratégique au Maroc en combinant un portail patient intuitif, un dispatch soignant géolocalisé et un ERP médical complet avec traçabilité et conformité réglementaire.</a:t>
+            </a:r>
+          </a:p>
+        </p:txBody>
+      </p:sp>
+      <p:sp>
+        <p:nvSpPr>
+          <p:cNvPr id="94" name="TextBox 93"/>
           <p:cNvSpPr txBox="1"/>
           <p:nvPr/>
         </p:nvSpPr>
@@ -33360,7 +36766,7 @@
     <p:bg>
       <p:bgPr>
         <a:solidFill>
-          <a:srgbClr val="2563EB"/>
+          <a:srgbClr val="F8FAFC"/>
         </a:solidFill>
         <a:effectLst/>
       </p:bgPr>
@@ -33381,7 +36787,50 @@
         <p:spPr>
           <a:xfrm>
             <a:off x="0" y="0"/>
-            <a:ext cx="12191695" cy="73152"/>
+            <a:ext cx="320040" cy="6858000"/>
+          </a:xfrm>
+          <a:prstGeom prst="rect">
+            <a:avLst/>
+          </a:prstGeom>
+          <a:solidFill>
+            <a:srgbClr val="2563EB"/>
+          </a:solidFill>
+          <a:ln>
+            <a:noFill/>
+          </a:ln>
+        </p:spPr>
+        <p:style>
+          <a:lnRef idx="1">
+            <a:schemeClr val="accent1"/>
+          </a:lnRef>
+          <a:fillRef idx="3">
+            <a:schemeClr val="accent1"/>
+          </a:fillRef>
+          <a:effectRef idx="2">
+            <a:schemeClr val="accent1"/>
+          </a:effectRef>
+          <a:fontRef idx="minor">
+            <a:schemeClr val="lt1"/>
+          </a:fontRef>
+        </p:style>
+        <p:txBody>
+          <a:bodyPr rtlCol="0" anchor="ctr"/>
+          <a:lstStyle/>
+          <a:p>
+            <a:pPr algn="ctr"/>
+          </a:p>
+        </p:txBody>
+      </p:sp>
+      <p:sp>
+        <p:nvSpPr>
+          <p:cNvPr id="3" name="Rectangle 2"/>
+          <p:cNvSpPr/>
+          <p:nvPr/>
+        </p:nvSpPr>
+        <p:spPr>
+          <a:xfrm>
+            <a:off x="0" y="0"/>
+            <a:ext cx="12191695" cy="54864"/>
           </a:xfrm>
           <a:prstGeom prst="rect">
             <a:avLst/>
@@ -33415,18 +36864,159 @@
           </a:p>
         </p:txBody>
       </p:sp>
-      <p:sp>
-        <p:nvSpPr>
-          <p:cNvPr id="3" name="Rectangle 2"/>
+      <p:pic>
+        <p:nvPicPr>
+          <p:cNvPr id="4" name="Picture 3" descr="logo.png"/>
+          <p:cNvPicPr>
+            <a:picLocks noChangeAspect="1"/>
+          </p:cNvPicPr>
+          <p:nvPr/>
+        </p:nvPicPr>
+        <p:blipFill>
+          <a:blip r:embed="rId2"/>
+          <a:stretch>
+            <a:fillRect/>
+          </a:stretch>
+        </p:blipFill>
+        <p:spPr>
+          <a:xfrm>
+            <a:off x="548640" y="228600"/>
+            <a:ext cx="731520" cy="731520"/>
+          </a:xfrm>
+          <a:prstGeom prst="rect">
+            <a:avLst/>
+          </a:prstGeom>
+        </p:spPr>
+      </p:pic>
+      <p:sp>
+        <p:nvSpPr>
+          <p:cNvPr id="5" name="TextBox 4"/>
+          <p:cNvSpPr txBox="1"/>
+          <p:nvPr/>
+        </p:nvSpPr>
+        <p:spPr>
+          <a:xfrm>
+            <a:off x="1463040" y="228600"/>
+            <a:ext cx="9601200" cy="502920"/>
+          </a:xfrm>
+          <a:prstGeom prst="rect">
+            <a:avLst/>
+          </a:prstGeom>
+          <a:noFill/>
+        </p:spPr>
+        <p:txBody>
+          <a:bodyPr wrap="square">
+            <a:spAutoFit/>
+          </a:bodyPr>
+          <a:lstStyle/>
+          <a:p>
+            <a:pPr algn="l">
+              <a:defRPr sz="2600" b="1">
+                <a:solidFill>
+                  <a:srgbClr val="2563EB"/>
+                </a:solidFill>
+                <a:latin typeface="Calibri"/>
+              </a:defRPr>
+            </a:pPr>
+            <a:r>
+              <a:t>Analyse Stratégique SWOT Approfondie</a:t>
+            </a:r>
+          </a:p>
+        </p:txBody>
+      </p:sp>
+      <p:sp>
+        <p:nvSpPr>
+          <p:cNvPr id="6" name="TextBox 5"/>
+          <p:cNvSpPr txBox="1"/>
+          <p:nvPr/>
+        </p:nvSpPr>
+        <p:spPr>
+          <a:xfrm>
+            <a:off x="1463040" y="658368"/>
+            <a:ext cx="9601200" cy="320040"/>
+          </a:xfrm>
+          <a:prstGeom prst="rect">
+            <a:avLst/>
+          </a:prstGeom>
+          <a:noFill/>
+        </p:spPr>
+        <p:txBody>
+          <a:bodyPr wrap="square">
+            <a:spAutoFit/>
+          </a:bodyPr>
+          <a:lstStyle/>
+          <a:p>
+            <a:pPr algn="l">
+              <a:defRPr sz="1300" b="0">
+                <a:solidFill>
+                  <a:srgbClr val="94A3B8"/>
+                </a:solidFill>
+                <a:latin typeface="Calibri"/>
+              </a:defRPr>
+            </a:pPr>
+            <a:r>
+              <a:t>Diagnostic interne (Forces / Faiblesses) et externe (Opportunités / Menaces)</a:t>
+            </a:r>
+          </a:p>
+        </p:txBody>
+      </p:sp>
+      <p:sp>
+        <p:nvSpPr>
+          <p:cNvPr id="7" name="Rounded Rectangle 6"/>
           <p:cNvSpPr/>
           <p:nvPr/>
         </p:nvSpPr>
         <p:spPr>
           <a:xfrm>
-            <a:off x="0" y="6784848"/>
-            <a:ext cx="12191695" cy="73152"/>
-          </a:xfrm>
-          <a:prstGeom prst="rect">
+            <a:off x="640080" y="1097280"/>
+            <a:ext cx="5212080" cy="2331720"/>
+          </a:xfrm>
+          <a:prstGeom prst="roundRect">
+            <a:avLst/>
+          </a:prstGeom>
+          <a:solidFill>
+            <a:srgbClr val="FFFFFF"/>
+          </a:solidFill>
+          <a:ln w="25400">
+            <a:solidFill>
+              <a:srgbClr val="10B981"/>
+            </a:solidFill>
+          </a:ln>
+        </p:spPr>
+        <p:style>
+          <a:lnRef idx="1">
+            <a:schemeClr val="accent1"/>
+          </a:lnRef>
+          <a:fillRef idx="3">
+            <a:schemeClr val="accent1"/>
+          </a:fillRef>
+          <a:effectRef idx="2">
+            <a:schemeClr val="accent1"/>
+          </a:effectRef>
+          <a:fontRef idx="minor">
+            <a:schemeClr val="lt1"/>
+          </a:fontRef>
+        </p:style>
+        <p:txBody>
+          <a:bodyPr rtlCol="0" anchor="ctr"/>
+          <a:lstStyle/>
+          <a:p>
+            <a:pPr algn="ctr"/>
+          </a:p>
+        </p:txBody>
+      </p:sp>
+      <p:sp>
+        <p:nvSpPr>
+          <p:cNvPr id="8" name="Rounded Rectangle 7"/>
+          <p:cNvSpPr/>
+          <p:nvPr/>
+        </p:nvSpPr>
+        <p:spPr>
+          <a:xfrm>
+            <a:off x="749808" y="1188720"/>
+            <a:ext cx="4992624" cy="347472"/>
+          </a:xfrm>
+          <a:prstGeom prst="roundRect">
             <a:avLst/>
           </a:prstGeom>
           <a:solidFill>
@@ -33460,14 +37050,14 @@
       </p:sp>
       <p:sp>
         <p:nvSpPr>
-          <p:cNvPr id="4" name="TextBox 3"/>
-          <p:cNvSpPr txBox="1"/>
-          <p:nvPr/>
-        </p:nvSpPr>
-        <p:spPr>
-          <a:xfrm>
-            <a:off x="914400" y="2286000"/>
-            <a:ext cx="10058400" cy="1371600"/>
+          <p:cNvPr id="9" name="TextBox 8"/>
+          <p:cNvSpPr txBox="1"/>
+          <p:nvPr/>
+        </p:nvSpPr>
+        <p:spPr>
+          <a:xfrm>
+            <a:off x="822960" y="1207008"/>
+            <a:ext cx="4846320" cy="292608"/>
           </a:xfrm>
           <a:prstGeom prst="rect">
             <a:avLst/>
@@ -33481,7 +37071,7 @@
           <a:lstStyle/>
           <a:p>
             <a:pPr algn="ctr">
-              <a:defRPr sz="4000" b="1">
+              <a:defRPr sz="1300" b="1">
                 <a:solidFill>
                   <a:srgbClr val="FFFFFF"/>
                 </a:solidFill>
@@ -33489,21 +37079,232 @@
               </a:defRPr>
             </a:pPr>
             <a:r>
-              <a:t>IV. Business Model &amp; Business Plan</a:t>
-            </a:r>
-          </a:p>
-        </p:txBody>
-      </p:sp>
-      <p:sp>
-        <p:nvSpPr>
-          <p:cNvPr id="5" name="TextBox 4"/>
-          <p:cNvSpPr txBox="1"/>
-          <p:nvPr/>
-        </p:nvSpPr>
-        <p:spPr>
-          <a:xfrm>
-            <a:off x="914400" y="3657600"/>
-            <a:ext cx="10058400" cy="914400"/>
+              <a:t>FORCES (Strengths)</a:t>
+            </a:r>
+          </a:p>
+        </p:txBody>
+      </p:sp>
+      <p:sp>
+        <p:nvSpPr>
+          <p:cNvPr id="10" name="TextBox 9"/>
+          <p:cNvSpPr txBox="1"/>
+          <p:nvPr/>
+        </p:nvSpPr>
+        <p:spPr>
+          <a:xfrm>
+            <a:off x="822960" y="1600200"/>
+            <a:ext cx="4846320" cy="1737360"/>
+          </a:xfrm>
+          <a:prstGeom prst="rect">
+            <a:avLst/>
+          </a:prstGeom>
+          <a:noFill/>
+        </p:spPr>
+        <p:txBody>
+          <a:bodyPr wrap="square">
+            <a:spAutoFit/>
+          </a:bodyPr>
+          <a:lstStyle/>
+          <a:p>
+            <a:pPr>
+              <a:spcAft>
+                <a:spcPts val="600"/>
+              </a:spcAft>
+              <a:defRPr sz="1050">
+                <a:solidFill>
+                  <a:srgbClr val="1E293B"/>
+                </a:solidFill>
+                <a:latin typeface="Calibri"/>
+              </a:defRPr>
+              <a:buChar char="▸"/>
+              <a:buClr>
+                <a:srgbClr val="1063EB"/>
+              </a:buClr>
+            </a:pPr>
+            <a:r>
+              <a:t>Architecture moderne &amp; robuste (Laravel 12 REST API + React 19)</a:t>
+            </a:r>
+          </a:p>
+          <a:p>
+            <a:pPr>
+              <a:spcAft>
+                <a:spcPts val="600"/>
+              </a:spcAft>
+              <a:defRPr sz="1050">
+                <a:solidFill>
+                  <a:srgbClr val="1E293B"/>
+                </a:solidFill>
+                <a:latin typeface="Calibri"/>
+              </a:defRPr>
+              <a:buChar char="▸"/>
+              <a:buClr>
+                <a:srgbClr val="1063EB"/>
+              </a:buClr>
+            </a:pPr>
+            <a:r>
+              <a:t>ERP médical complet intégré (Stocks, RH, Facturation, Contrats)</a:t>
+            </a:r>
+          </a:p>
+          <a:p>
+            <a:pPr>
+              <a:spcAft>
+                <a:spcPts val="600"/>
+              </a:spcAft>
+              <a:defRPr sz="1050">
+                <a:solidFill>
+                  <a:srgbClr val="1E293B"/>
+                </a:solidFill>
+                <a:latin typeface="Calibri"/>
+              </a:defRPr>
+              <a:buChar char="▸"/>
+              <a:buClr>
+                <a:srgbClr val="1063EB"/>
+              </a:buClr>
+            </a:pPr>
+            <a:r>
+              <a:t>Dispatch géolocalisé &amp; calcul kilométrique automatique</a:t>
+            </a:r>
+          </a:p>
+          <a:p>
+            <a:pPr>
+              <a:spcAft>
+                <a:spcPts val="600"/>
+              </a:spcAft>
+              <a:defRPr sz="1050">
+                <a:solidFill>
+                  <a:srgbClr val="1E293B"/>
+                </a:solidFill>
+                <a:latin typeface="Calibri"/>
+              </a:defRPr>
+              <a:buChar char="▸"/>
+              <a:buClr>
+                <a:srgbClr val="1063EB"/>
+              </a:buClr>
+            </a:pPr>
+            <a:r>
+              <a:t>Traçabilité rigoureuse (constantes, signature, selfie check-in)</a:t>
+            </a:r>
+          </a:p>
+          <a:p>
+            <a:pPr>
+              <a:spcAft>
+                <a:spcPts val="600"/>
+              </a:spcAft>
+              <a:defRPr sz="1050">
+                <a:solidFill>
+                  <a:srgbClr val="1E293B"/>
+                </a:solidFill>
+                <a:latin typeface="Calibri"/>
+              </a:defRPr>
+              <a:buChar char="▸"/>
+              <a:buClr>
+                <a:srgbClr val="1063EB"/>
+              </a:buClr>
+            </a:pPr>
+            <a:r>
+              <a:t>Transparence tarifaire avec devis validé avant intervention</a:t>
+            </a:r>
+          </a:p>
+        </p:txBody>
+      </p:sp>
+      <p:sp>
+        <p:nvSpPr>
+          <p:cNvPr id="11" name="Rounded Rectangle 10"/>
+          <p:cNvSpPr/>
+          <p:nvPr/>
+        </p:nvSpPr>
+        <p:spPr>
+          <a:xfrm>
+            <a:off x="6217920" y="1097280"/>
+            <a:ext cx="5303520" cy="2331720"/>
+          </a:xfrm>
+          <a:prstGeom prst="roundRect">
+            <a:avLst/>
+          </a:prstGeom>
+          <a:solidFill>
+            <a:srgbClr val="FFFFFF"/>
+          </a:solidFill>
+          <a:ln w="25400">
+            <a:solidFill>
+              <a:srgbClr val="EF4444"/>
+            </a:solidFill>
+          </a:ln>
+        </p:spPr>
+        <p:style>
+          <a:lnRef idx="1">
+            <a:schemeClr val="accent1"/>
+          </a:lnRef>
+          <a:fillRef idx="3">
+            <a:schemeClr val="accent1"/>
+          </a:fillRef>
+          <a:effectRef idx="2">
+            <a:schemeClr val="accent1"/>
+          </a:effectRef>
+          <a:fontRef idx="minor">
+            <a:schemeClr val="lt1"/>
+          </a:fontRef>
+        </p:style>
+        <p:txBody>
+          <a:bodyPr rtlCol="0" anchor="ctr"/>
+          <a:lstStyle/>
+          <a:p>
+            <a:pPr algn="ctr"/>
+          </a:p>
+        </p:txBody>
+      </p:sp>
+      <p:sp>
+        <p:nvSpPr>
+          <p:cNvPr id="12" name="Rounded Rectangle 11"/>
+          <p:cNvSpPr/>
+          <p:nvPr/>
+        </p:nvSpPr>
+        <p:spPr>
+          <a:xfrm>
+            <a:off x="6327648" y="1188720"/>
+            <a:ext cx="5084064" cy="347472"/>
+          </a:xfrm>
+          <a:prstGeom prst="roundRect">
+            <a:avLst/>
+          </a:prstGeom>
+          <a:solidFill>
+            <a:srgbClr val="EF4444"/>
+          </a:solidFill>
+          <a:ln>
+            <a:noFill/>
+          </a:ln>
+        </p:spPr>
+        <p:style>
+          <a:lnRef idx="1">
+            <a:schemeClr val="accent1"/>
+          </a:lnRef>
+          <a:fillRef idx="3">
+            <a:schemeClr val="accent1"/>
+          </a:fillRef>
+          <a:effectRef idx="2">
+            <a:schemeClr val="accent1"/>
+          </a:effectRef>
+          <a:fontRef idx="minor">
+            <a:schemeClr val="lt1"/>
+          </a:fontRef>
+        </p:style>
+        <p:txBody>
+          <a:bodyPr rtlCol="0" anchor="ctr"/>
+          <a:lstStyle/>
+          <a:p>
+            <a:pPr algn="ctr"/>
+          </a:p>
+        </p:txBody>
+      </p:sp>
+      <p:sp>
+        <p:nvSpPr>
+          <p:cNvPr id="13" name="TextBox 12"/>
+          <p:cNvSpPr txBox="1"/>
+          <p:nvPr/>
+        </p:nvSpPr>
+        <p:spPr>
+          <a:xfrm>
+            <a:off x="6400800" y="1207008"/>
+            <a:ext cx="4937760" cy="292608"/>
           </a:xfrm>
           <a:prstGeom prst="rect">
             <a:avLst/>
@@ -33517,22 +37318,599 @@
           <a:lstStyle/>
           <a:p>
             <a:pPr algn="ctr">
-              <a:defRPr sz="2000" b="0">
-                <a:solidFill>
-                  <a:srgbClr val="BFDBFE"/>
-                </a:solidFill>
-                <a:latin typeface="Calibri"/>
-              </a:defRPr>
-            </a:pPr>
-            <a:r>
-              <a:t>Modèle économique et projections financières</a:t>
-            </a:r>
-          </a:p>
-        </p:txBody>
-      </p:sp>
-      <p:sp>
-        <p:nvSpPr>
-          <p:cNvPr id="6" name="TextBox 5"/>
+              <a:defRPr sz="1300" b="1">
+                <a:solidFill>
+                  <a:srgbClr val="FFFFFF"/>
+                </a:solidFill>
+                <a:latin typeface="Calibri"/>
+              </a:defRPr>
+            </a:pPr>
+            <a:r>
+              <a:t>FAIBLESSES (Weaknesses)</a:t>
+            </a:r>
+          </a:p>
+        </p:txBody>
+      </p:sp>
+      <p:sp>
+        <p:nvSpPr>
+          <p:cNvPr id="14" name="TextBox 13"/>
+          <p:cNvSpPr txBox="1"/>
+          <p:nvPr/>
+        </p:nvSpPr>
+        <p:spPr>
+          <a:xfrm>
+            <a:off x="6400800" y="1600200"/>
+            <a:ext cx="4937760" cy="1737360"/>
+          </a:xfrm>
+          <a:prstGeom prst="rect">
+            <a:avLst/>
+          </a:prstGeom>
+          <a:noFill/>
+        </p:spPr>
+        <p:txBody>
+          <a:bodyPr wrap="square">
+            <a:spAutoFit/>
+          </a:bodyPr>
+          <a:lstStyle/>
+          <a:p>
+            <a:pPr>
+              <a:spcAft>
+                <a:spcPts val="600"/>
+              </a:spcAft>
+              <a:defRPr sz="1050">
+                <a:solidFill>
+                  <a:srgbClr val="1E293B"/>
+                </a:solidFill>
+                <a:latin typeface="Calibri"/>
+              </a:defRPr>
+              <a:buChar char="▸"/>
+              <a:buClr>
+                <a:srgbClr val="EF63EB"/>
+              </a:buClr>
+            </a:pPr>
+            <a:r>
+              <a:t>Projet en phase de lancement (notoriété de marque à bâtir)</a:t>
+            </a:r>
+          </a:p>
+          <a:p>
+            <a:pPr>
+              <a:spcAft>
+                <a:spcPts val="600"/>
+              </a:spcAft>
+              <a:defRPr sz="1050">
+                <a:solidFill>
+                  <a:srgbClr val="1E293B"/>
+                </a:solidFill>
+                <a:latin typeface="Calibri"/>
+              </a:defRPr>
+              <a:buChar char="▸"/>
+              <a:buClr>
+                <a:srgbClr val="EF63EB"/>
+              </a:buClr>
+            </a:pPr>
+            <a:r>
+              <a:t>Dépendance initiale à la taille du réseau d'infirmiers certifiés</a:t>
+            </a:r>
+          </a:p>
+          <a:p>
+            <a:pPr>
+              <a:spcAft>
+                <a:spcPts val="600"/>
+              </a:spcAft>
+              <a:defRPr sz="1050">
+                <a:solidFill>
+                  <a:srgbClr val="1E293B"/>
+                </a:solidFill>
+                <a:latin typeface="Calibri"/>
+              </a:defRPr>
+              <a:buChar char="▸"/>
+              <a:buClr>
+                <a:srgbClr val="EF63EB"/>
+              </a:buClr>
+            </a:pPr>
+            <a:r>
+              <a:t>Nécessité d'une connectivité mobile permanente sur le terrain</a:t>
+            </a:r>
+          </a:p>
+          <a:p>
+            <a:pPr>
+              <a:spcAft>
+                <a:spcPts val="600"/>
+              </a:spcAft>
+              <a:defRPr sz="1050">
+                <a:solidFill>
+                  <a:srgbClr val="1E293B"/>
+                </a:solidFill>
+                <a:latin typeface="Calibri"/>
+              </a:defRPr>
+              <a:buChar char="▸"/>
+              <a:buClr>
+                <a:srgbClr val="EF63EB"/>
+              </a:buClr>
+            </a:pPr>
+            <a:r>
+              <a:t>Délai d'adoption de l'application par les seniors sans aide familiale</a:t>
+            </a:r>
+          </a:p>
+        </p:txBody>
+      </p:sp>
+      <p:sp>
+        <p:nvSpPr>
+          <p:cNvPr id="15" name="Rounded Rectangle 14"/>
+          <p:cNvSpPr/>
+          <p:nvPr/>
+        </p:nvSpPr>
+        <p:spPr>
+          <a:xfrm>
+            <a:off x="640080" y="3611880"/>
+            <a:ext cx="5212080" cy="2423160"/>
+          </a:xfrm>
+          <a:prstGeom prst="roundRect">
+            <a:avLst/>
+          </a:prstGeom>
+          <a:solidFill>
+            <a:srgbClr val="FFFFFF"/>
+          </a:solidFill>
+          <a:ln w="25400">
+            <a:solidFill>
+              <a:srgbClr val="2563EB"/>
+            </a:solidFill>
+          </a:ln>
+        </p:spPr>
+        <p:style>
+          <a:lnRef idx="1">
+            <a:schemeClr val="accent1"/>
+          </a:lnRef>
+          <a:fillRef idx="3">
+            <a:schemeClr val="accent1"/>
+          </a:fillRef>
+          <a:effectRef idx="2">
+            <a:schemeClr val="accent1"/>
+          </a:effectRef>
+          <a:fontRef idx="minor">
+            <a:schemeClr val="lt1"/>
+          </a:fontRef>
+        </p:style>
+        <p:txBody>
+          <a:bodyPr rtlCol="0" anchor="ctr"/>
+          <a:lstStyle/>
+          <a:p>
+            <a:pPr algn="ctr"/>
+          </a:p>
+        </p:txBody>
+      </p:sp>
+      <p:sp>
+        <p:nvSpPr>
+          <p:cNvPr id="16" name="Rounded Rectangle 15"/>
+          <p:cNvSpPr/>
+          <p:nvPr/>
+        </p:nvSpPr>
+        <p:spPr>
+          <a:xfrm>
+            <a:off x="749808" y="3703320"/>
+            <a:ext cx="4992624" cy="347472"/>
+          </a:xfrm>
+          <a:prstGeom prst="roundRect">
+            <a:avLst/>
+          </a:prstGeom>
+          <a:solidFill>
+            <a:srgbClr val="2563EB"/>
+          </a:solidFill>
+          <a:ln>
+            <a:noFill/>
+          </a:ln>
+        </p:spPr>
+        <p:style>
+          <a:lnRef idx="1">
+            <a:schemeClr val="accent1"/>
+          </a:lnRef>
+          <a:fillRef idx="3">
+            <a:schemeClr val="accent1"/>
+          </a:fillRef>
+          <a:effectRef idx="2">
+            <a:schemeClr val="accent1"/>
+          </a:effectRef>
+          <a:fontRef idx="minor">
+            <a:schemeClr val="lt1"/>
+          </a:fontRef>
+        </p:style>
+        <p:txBody>
+          <a:bodyPr rtlCol="0" anchor="ctr"/>
+          <a:lstStyle/>
+          <a:p>
+            <a:pPr algn="ctr"/>
+          </a:p>
+        </p:txBody>
+      </p:sp>
+      <p:sp>
+        <p:nvSpPr>
+          <p:cNvPr id="17" name="TextBox 16"/>
+          <p:cNvSpPr txBox="1"/>
+          <p:nvPr/>
+        </p:nvSpPr>
+        <p:spPr>
+          <a:xfrm>
+            <a:off x="822960" y="3721608"/>
+            <a:ext cx="4846320" cy="292608"/>
+          </a:xfrm>
+          <a:prstGeom prst="rect">
+            <a:avLst/>
+          </a:prstGeom>
+          <a:noFill/>
+        </p:spPr>
+        <p:txBody>
+          <a:bodyPr wrap="square">
+            <a:spAutoFit/>
+          </a:bodyPr>
+          <a:lstStyle/>
+          <a:p>
+            <a:pPr algn="ctr">
+              <a:defRPr sz="1300" b="1">
+                <a:solidFill>
+                  <a:srgbClr val="FFFFFF"/>
+                </a:solidFill>
+                <a:latin typeface="Calibri"/>
+              </a:defRPr>
+            </a:pPr>
+            <a:r>
+              <a:t>OPPORTUNITÉS (Opportunities)</a:t>
+            </a:r>
+          </a:p>
+        </p:txBody>
+      </p:sp>
+      <p:sp>
+        <p:nvSpPr>
+          <p:cNvPr id="18" name="TextBox 17"/>
+          <p:cNvSpPr txBox="1"/>
+          <p:nvPr/>
+        </p:nvSpPr>
+        <p:spPr>
+          <a:xfrm>
+            <a:off x="822960" y="4114800"/>
+            <a:ext cx="4846320" cy="1828800"/>
+          </a:xfrm>
+          <a:prstGeom prst="rect">
+            <a:avLst/>
+          </a:prstGeom>
+          <a:noFill/>
+        </p:spPr>
+        <p:txBody>
+          <a:bodyPr wrap="square">
+            <a:spAutoFit/>
+          </a:bodyPr>
+          <a:lstStyle/>
+          <a:p>
+            <a:pPr>
+              <a:spcAft>
+                <a:spcPts val="600"/>
+              </a:spcAft>
+              <a:defRPr sz="1050">
+                <a:solidFill>
+                  <a:srgbClr val="1E293B"/>
+                </a:solidFill>
+                <a:latin typeface="Calibri"/>
+              </a:defRPr>
+              <a:buChar char="▸"/>
+              <a:buClr>
+                <a:srgbClr val="2563EB"/>
+              </a:buClr>
+            </a:pPr>
+            <a:r>
+              <a:t>Généralisation de l'Assurance Maladie Obligatoire (AMO) au Maroc</a:t>
+            </a:r>
+          </a:p>
+          <a:p>
+            <a:pPr>
+              <a:spcAft>
+                <a:spcPts val="600"/>
+              </a:spcAft>
+              <a:defRPr sz="1050">
+                <a:solidFill>
+                  <a:srgbClr val="1E293B"/>
+                </a:solidFill>
+                <a:latin typeface="Calibri"/>
+              </a:defRPr>
+              <a:buChar char="▸"/>
+              <a:buClr>
+                <a:srgbClr val="2563EB"/>
+              </a:buClr>
+            </a:pPr>
+            <a:r>
+              <a:t>Vieillissement de la population et hausse des maladies chroniques</a:t>
+            </a:r>
+          </a:p>
+          <a:p>
+            <a:pPr>
+              <a:spcAft>
+                <a:spcPts val="600"/>
+              </a:spcAft>
+              <a:defRPr sz="1050">
+                <a:solidFill>
+                  <a:srgbClr val="1E293B"/>
+                </a:solidFill>
+                <a:latin typeface="Calibri"/>
+              </a:defRPr>
+              <a:buChar char="▸"/>
+              <a:buClr>
+                <a:srgbClr val="2563EB"/>
+              </a:buClr>
+            </a:pPr>
+            <a:r>
+              <a:t>Accélération de la digitalisation et appétence pour la e-santé</a:t>
+            </a:r>
+          </a:p>
+          <a:p>
+            <a:pPr>
+              <a:spcAft>
+                <a:spcPts val="600"/>
+              </a:spcAft>
+              <a:defRPr sz="1050">
+                <a:solidFill>
+                  <a:srgbClr val="1E293B"/>
+                </a:solidFill>
+                <a:latin typeface="Calibri"/>
+              </a:defRPr>
+              <a:buChar char="▸"/>
+              <a:buClr>
+                <a:srgbClr val="2563EB"/>
+              </a:buClr>
+            </a:pPr>
+            <a:r>
+              <a:t>Partenariats mutuelles, cliniques, laboratoires et assurances</a:t>
+            </a:r>
+          </a:p>
+          <a:p>
+            <a:pPr>
+              <a:spcAft>
+                <a:spcPts val="600"/>
+              </a:spcAft>
+              <a:defRPr sz="1050">
+                <a:solidFill>
+                  <a:srgbClr val="1E293B"/>
+                </a:solidFill>
+                <a:latin typeface="Calibri"/>
+              </a:defRPr>
+              <a:buChar char="▸"/>
+              <a:buClr>
+                <a:srgbClr val="2563EB"/>
+              </a:buClr>
+            </a:pPr>
+            <a:r>
+              <a:t>Extension possible aux soins de kinésithérapie et garde de nuit</a:t>
+            </a:r>
+          </a:p>
+        </p:txBody>
+      </p:sp>
+      <p:sp>
+        <p:nvSpPr>
+          <p:cNvPr id="19" name="Rounded Rectangle 18"/>
+          <p:cNvSpPr/>
+          <p:nvPr/>
+        </p:nvSpPr>
+        <p:spPr>
+          <a:xfrm>
+            <a:off x="6217920" y="3611880"/>
+            <a:ext cx="5303520" cy="2423160"/>
+          </a:xfrm>
+          <a:prstGeom prst="roundRect">
+            <a:avLst/>
+          </a:prstGeom>
+          <a:solidFill>
+            <a:srgbClr val="FFFFFF"/>
+          </a:solidFill>
+          <a:ln w="25400">
+            <a:solidFill>
+              <a:srgbClr val="F59E0B"/>
+            </a:solidFill>
+          </a:ln>
+        </p:spPr>
+        <p:style>
+          <a:lnRef idx="1">
+            <a:schemeClr val="accent1"/>
+          </a:lnRef>
+          <a:fillRef idx="3">
+            <a:schemeClr val="accent1"/>
+          </a:fillRef>
+          <a:effectRef idx="2">
+            <a:schemeClr val="accent1"/>
+          </a:effectRef>
+          <a:fontRef idx="minor">
+            <a:schemeClr val="lt1"/>
+          </a:fontRef>
+        </p:style>
+        <p:txBody>
+          <a:bodyPr rtlCol="0" anchor="ctr"/>
+          <a:lstStyle/>
+          <a:p>
+            <a:pPr algn="ctr"/>
+          </a:p>
+        </p:txBody>
+      </p:sp>
+      <p:sp>
+        <p:nvSpPr>
+          <p:cNvPr id="20" name="Rounded Rectangle 19"/>
+          <p:cNvSpPr/>
+          <p:nvPr/>
+        </p:nvSpPr>
+        <p:spPr>
+          <a:xfrm>
+            <a:off x="6327648" y="3703320"/>
+            <a:ext cx="5084064" cy="347472"/>
+          </a:xfrm>
+          <a:prstGeom prst="roundRect">
+            <a:avLst/>
+          </a:prstGeom>
+          <a:solidFill>
+            <a:srgbClr val="F59E0B"/>
+          </a:solidFill>
+          <a:ln>
+            <a:noFill/>
+          </a:ln>
+        </p:spPr>
+        <p:style>
+          <a:lnRef idx="1">
+            <a:schemeClr val="accent1"/>
+          </a:lnRef>
+          <a:fillRef idx="3">
+            <a:schemeClr val="accent1"/>
+          </a:fillRef>
+          <a:effectRef idx="2">
+            <a:schemeClr val="accent1"/>
+          </a:effectRef>
+          <a:fontRef idx="minor">
+            <a:schemeClr val="lt1"/>
+          </a:fontRef>
+        </p:style>
+        <p:txBody>
+          <a:bodyPr rtlCol="0" anchor="ctr"/>
+          <a:lstStyle/>
+          <a:p>
+            <a:pPr algn="ctr"/>
+          </a:p>
+        </p:txBody>
+      </p:sp>
+      <p:sp>
+        <p:nvSpPr>
+          <p:cNvPr id="21" name="TextBox 20"/>
+          <p:cNvSpPr txBox="1"/>
+          <p:nvPr/>
+        </p:nvSpPr>
+        <p:spPr>
+          <a:xfrm>
+            <a:off x="6400800" y="3721608"/>
+            <a:ext cx="4937760" cy="292608"/>
+          </a:xfrm>
+          <a:prstGeom prst="rect">
+            <a:avLst/>
+          </a:prstGeom>
+          <a:noFill/>
+        </p:spPr>
+        <p:txBody>
+          <a:bodyPr wrap="square">
+            <a:spAutoFit/>
+          </a:bodyPr>
+          <a:lstStyle/>
+          <a:p>
+            <a:pPr algn="ctr">
+              <a:defRPr sz="1300" b="1">
+                <a:solidFill>
+                  <a:srgbClr val="FFFFFF"/>
+                </a:solidFill>
+                <a:latin typeface="Calibri"/>
+              </a:defRPr>
+            </a:pPr>
+            <a:r>
+              <a:t>MENACES (Threats)</a:t>
+            </a:r>
+          </a:p>
+        </p:txBody>
+      </p:sp>
+      <p:sp>
+        <p:nvSpPr>
+          <p:cNvPr id="22" name="TextBox 21"/>
+          <p:cNvSpPr txBox="1"/>
+          <p:nvPr/>
+        </p:nvSpPr>
+        <p:spPr>
+          <a:xfrm>
+            <a:off x="6400800" y="4114800"/>
+            <a:ext cx="4937760" cy="1828800"/>
+          </a:xfrm>
+          <a:prstGeom prst="rect">
+            <a:avLst/>
+          </a:prstGeom>
+          <a:noFill/>
+        </p:spPr>
+        <p:txBody>
+          <a:bodyPr wrap="square">
+            <a:spAutoFit/>
+          </a:bodyPr>
+          <a:lstStyle/>
+          <a:p>
+            <a:pPr>
+              <a:spcAft>
+                <a:spcPts val="600"/>
+              </a:spcAft>
+              <a:defRPr sz="1050">
+                <a:solidFill>
+                  <a:srgbClr val="1E293B"/>
+                </a:solidFill>
+                <a:latin typeface="Calibri"/>
+              </a:defRPr>
+              <a:buChar char="▸"/>
+              <a:buClr>
+                <a:srgbClr val="F563EB"/>
+              </a:buClr>
+            </a:pPr>
+            <a:r>
+              <a:t>Résistance culturelle au paiement en ligne et aux outils digitaux</a:t>
+            </a:r>
+          </a:p>
+          <a:p>
+            <a:pPr>
+              <a:spcAft>
+                <a:spcPts val="600"/>
+              </a:spcAft>
+              <a:defRPr sz="1050">
+                <a:solidFill>
+                  <a:srgbClr val="1E293B"/>
+                </a:solidFill>
+                <a:latin typeface="Calibri"/>
+              </a:defRPr>
+              <a:buChar char="▸"/>
+              <a:buClr>
+                <a:srgbClr val="F563EB"/>
+              </a:buClr>
+            </a:pPr>
+            <a:r>
+              <a:t>Évolution du cadre réglementaire et juridique de la télésanté</a:t>
+            </a:r>
+          </a:p>
+          <a:p>
+            <a:pPr>
+              <a:spcAft>
+                <a:spcPts val="600"/>
+              </a:spcAft>
+              <a:defRPr sz="1050">
+                <a:solidFill>
+                  <a:srgbClr val="1E293B"/>
+                </a:solidFill>
+                <a:latin typeface="Calibri"/>
+              </a:defRPr>
+              <a:buChar char="▸"/>
+              <a:buClr>
+                <a:srgbClr val="F563EB"/>
+              </a:buClr>
+            </a:pPr>
+            <a:r>
+              <a:t>Risque de contournement de la plateforme par le relationnel direct</a:t>
+            </a:r>
+          </a:p>
+          <a:p>
+            <a:pPr>
+              <a:spcAft>
+                <a:spcPts val="600"/>
+              </a:spcAft>
+              <a:defRPr sz="1050">
+                <a:solidFill>
+                  <a:srgbClr val="1E293B"/>
+                </a:solidFill>
+                <a:latin typeface="Calibri"/>
+              </a:defRPr>
+              <a:buChar char="▸"/>
+              <a:buClr>
+                <a:srgbClr val="F563EB"/>
+              </a:buClr>
+            </a:pPr>
+            <a:r>
+              <a:t>Arrivée potentielle d'acteurs internationaux du secteur</a:t>
+            </a:r>
+          </a:p>
+        </p:txBody>
+      </p:sp>
+      <p:sp>
+        <p:nvSpPr>
+          <p:cNvPr id="23" name="TextBox 22"/>
           <p:cNvSpPr txBox="1"/>
           <p:nvPr/>
         </p:nvSpPr>
